--- a/data/commit_report.pptx
+++ b/data/commit_report.pptx
@@ -3176,7 +3176,7 @@
           <a:lstStyle/>
           <a:p>
             <a:r>
-              <a:t>기능 개발</a:t>
+              <a:t>구조 개선</a:t>
             </a:r>
           </a:p>
         </p:txBody>
@@ -3197,7 +3197,7 @@
           <a:lstStyle/>
           <a:p>
             <a:r>
-              <a:t>2026-05-20</a:t>
+              <a:t>2026-05-22</a:t>
             </a:r>
           </a:p>
           <a:p>
@@ -3207,38 +3207,28 @@
           </a:p>
           <a:p>
             <a:r>
-              <a:t>데일리 스탠드업(목표/결과 작성) 기능 구현 및 실시간 연동</a:t>
+              <a:t>WebSocket 메시지 발신 표준화(WsEnvelope) 및 DTO 최적화</a:t>
             </a:r>
           </a:p>
           <a:p/>
           <a:p>
             <a:r>
-              <a:t>- DailyStandup 엔티티 설계 (member_id + standupDate 유니크 제약 적용)</a:t>
-            </a:r>
-          </a:p>
-          <a:p>
-            <a:r>
-              <a:t>- 하루 시작 시 '오늘의 목표(Goal)' 생성 및 재호출 시 수정 기능 구현</a:t>
-            </a:r>
-          </a:p>
-          <a:p>
-            <a:r>
-              <a:t>- 하루 종료 시 '오늘의 결과(Result)' 작성 기능 구현 및 목표 선작성 유효성 체크 추가</a:t>
-            </a:r>
-          </a:p>
-          <a:p>
-            <a:r>
-              <a:t>- 내 오늘 스탠드업 조회 및 팀 전체 특정 날짜 스탠드업 조회 API 구현</a:t>
-            </a:r>
-          </a:p>
-          <a:p>
-            <a:r>
-              <a:t>- TransactionSynchronization을 활용한 목표/결과 업데이트 시 팀별 웹소켓 실시간 브로드캐스트 적용</a:t>
-            </a:r>
-          </a:p>
-          <a:p>
-            <a:r>
-              <a:t>- 기능 검증용 HTTP API 테스트 스크립트(.http) 작성</a:t>
+              <a:t>- 프론트엔드 통신 표준화를 위한 공통 이벤트 래퍼 `WsEnvelope` 도입 (event, data, occurredAt, version)</a:t>
+            </a:r>
+          </a:p>
+          <a:p>
+            <a:r>
+              <a:t>- `DailyStandupService`, `MeetingRoomService`, `NotificationService`, `StatusService`, `WorkLogService`의 메시지 전송부를 `WsEnvelope` 규격으로 전면 교체 및 이벤트 명 상수화</a:t>
+            </a:r>
+          </a:p>
+          <a:p>
+            <a:r>
+              <a:t>- 브로드캐스트 전용 DTO를 `WsEnvelope.data` 구조에 맞게 경량화 (`TeamStatusBroadcast` -&gt; `TeamStatusPayload`)</a:t>
+            </a:r>
+          </a:p>
+          <a:p>
+            <a:r>
+              <a:t>- 각 도메인 서비스 내 Member 검증 중복 코드를 `getManagedMember` 등 헬퍼 메서드로 추출 및 알림 페이로드(roomPayload 등) 규격화</a:t>
             </a:r>
           </a:p>
         </p:txBody>
@@ -3298,7 +3288,7 @@
           <a:lstStyle/>
           <a:p>
             <a:r>
-              <a:t>2026-05-20</a:t>
+              <a:t>2026-05-22</a:t>
             </a:r>
           </a:p>
           <a:p>
@@ -3308,38 +3298,23 @@
           </a:p>
           <a:p>
             <a:r>
-              <a:t>미팅룸 생성, 초대/참가 요청 및 실시간 이벤트 연동 기능 구현</a:t>
+              <a:t>팀 초대 코드 DB 영속화 적용 및 관리 로직 개선</a:t>
             </a:r>
           </a:p>
           <a:p/>
           <a:p>
             <a:r>
-              <a:t>- MeetingRoom 및 MeetingParticipant 엔티티 설계 (초대 및 참여 요청 일원화 관리)</a:t>
-            </a:r>
-          </a:p>
-          <a:p>
-            <a:r>
-              <a:t>- 미팅룸 생성 및 참여(수락) 시 해당 회원의 상태를 MEETING으로 자동 변경하는 로직 구현</a:t>
-            </a:r>
-          </a:p>
-          <a:p>
-            <a:r>
-              <a:t>- 미팅룸 종료 및 퇴장 시 회원의 상태를 WORKING으로 복귀 처리</a:t>
-            </a:r>
-          </a:p>
-          <a:p>
-            <a:r>
-              <a:t>- 중복 참여 요청 방지 및 주최자 권한 검증 등 도메인 유효성 로직 추가</a:t>
-            </a:r>
-          </a:p>
-          <a:p>
-            <a:r>
-              <a:t>- 팀 전체 브로드캐스트 및 개인별 WebSocket 실시간 알림 기능 적용</a:t>
-            </a:r>
-          </a:p>
-          <a:p>
-            <a:r>
-              <a:t>- 미팅룸 생성/상세조회/참가/초대/종료/퇴장 관련 REST API 구현</a:t>
+              <a:t>- 인메모리(ConcurrentHashMap) 기반 초대 코드 저장을 DB 엔티티(`InviteCode`)로 마이그레이션하여 서버 재시작 시 데이터 유지</a:t>
+            </a:r>
+          </a:p>
+          <a:p>
+            <a:r>
+              <a:t>- 초대 코드 1회성 사용을 위한 `markAsUsed()` 비즈니스 로직 및 검증 추가</a:t>
+            </a:r>
+          </a:p>
+          <a:p>
+            <a:r>
+              <a:t>- 초대 코드 만료 시간(expiration-seconds)을 application.yaml에서 주입받도록 환경변수 처리 개선</a:t>
             </a:r>
           </a:p>
         </p:txBody>
@@ -3378,7 +3353,7 @@
           <a:lstStyle/>
           <a:p>
             <a:r>
-              <a:t>기능 개발</a:t>
+              <a:t>구조 개선</a:t>
             </a:r>
           </a:p>
         </p:txBody>
@@ -3399,43 +3374,17 @@
           <a:lstStyle/>
           <a:p>
             <a:r>
-              <a:t>2026-05-20</a:t>
-            </a:r>
-          </a:p>
-          <a:p>
-            <a:r>
-              <a:t>원종우</a:t>
-            </a:r>
-          </a:p>
-          <a:p>
-            <a:r>
-              <a:t>알림(Notification) 기능 구현 및 실시간 웹소켓 푸시 추가</a:t>
-            </a:r>
-          </a:p>
-          <a:p/>
-          <a:p>
-            <a:r>
-              <a:t>- 일반 알림(GENERAL) 및 중요 알림(IMPORTANT) 도메인 설계</a:t>
-            </a:r>
-          </a:p>
-          <a:p>
-            <a:r>
-              <a:t>- 중요 알림은 수신자가 WORKING/MEETING 상태일 때만 발송 가능하도록 유효성 검증 추가</a:t>
-            </a:r>
-          </a:p>
-          <a:p>
-            <a:r>
-              <a:t>- 트랜잭션 커밋 후 SimpMessagingTemplate을 활용한 WebSocket 실시간 푸시 발송</a:t>
-            </a:r>
-          </a:p>
-          <a:p>
-            <a:r>
-              <a:t>- 알림 전체/단건 조회, 읽지 않은 알림 수(Badge용) 및 읽음 처리 API 구현</a:t>
-            </a:r>
-          </a:p>
-          <a:p>
-            <a:r>
-              <a:t>- API 검증을 위한 HTTP 테스트 스크립트(.http) 작성</a:t>
+              <a:t>2026-05-21</a:t>
+            </a:r>
+          </a:p>
+          <a:p>
+            <a:r>
+              <a:t>dldnwls07</a:t>
+            </a:r>
+          </a:p>
+          <a:p>
+            <a:r>
+              <a:t>simplify joinRoom signature and optimize media stream management in video calls</a:t>
             </a:r>
           </a:p>
         </p:txBody>
@@ -3495,17 +3444,17 @@
           <a:lstStyle/>
           <a:p>
             <a:r>
-              <a:t>2026-05-20</a:t>
-            </a:r>
-          </a:p>
-          <a:p>
-            <a:r>
-              <a:t>원종우</a:t>
-            </a:r>
-          </a:p>
-          <a:p>
-            <a:r>
-              <a:t>Role.java 경로를 enums 패키지로 이동</a:t>
+              <a:t>2026-05-21</a:t>
+            </a:r>
+          </a:p>
+          <a:p>
+            <a:r>
+              <a:t>dldnwls07</a:t>
+            </a:r>
+          </a:p>
+          <a:p>
+            <a:r>
+              <a:t>centralize status UI settings and update dashboard WebSocket event handling</a:t>
             </a:r>
           </a:p>
         </p:txBody>
@@ -3565,12 +3514,12 @@
           <a:lstStyle/>
           <a:p>
             <a:r>
-              <a:t>dldnwls07: 55 commits</a:t>
-            </a:r>
-          </a:p>
-          <a:p>
-            <a:r>
-              <a:t>원종우: 98 commits</a:t>
+              <a:t>원종우: 101 commits</a:t>
+            </a:r>
+          </a:p>
+          <a:p>
+            <a:r>
+              <a:t>dldnwls07: 58 commits</a:t>
             </a:r>
           </a:p>
           <a:p>
@@ -3636,17 +3585,71 @@
           <a:lstStyle/>
           <a:p>
             <a:r>
+              <a:t>2026-05-24</a:t>
+            </a:r>
+          </a:p>
+          <a:p>
+            <a:r>
+              <a:t>- Merge pull request #6 from Jongwoo0101/feature/frontend-refactor-and-bugfix</a:t>
+            </a:r>
+          </a:p>
+          <a:p/>
+          <a:p>
+            <a:r>
+              <a:t> resolve frontend spec issues and fix shared state bug</a:t>
+            </a:r>
+          </a:p>
+          <a:p/>
+          <a:p>
+            <a:r>
+              <a:t>2026-05-23</a:t>
+            </a:r>
+          </a:p>
+          <a:p>
+            <a:r>
+              <a:t>- recover commute state drift when backend worklog is reset</a:t>
+            </a:r>
+          </a:p>
+          <a:p/>
+          <a:p>
+            <a:r>
               <a:t>2026-05-22</a:t>
             </a:r>
           </a:p>
           <a:p>
             <a:r>
-              <a:t>- add audit specification for hardcoding structure mitigation</a:t>
+              <a:t>- resolve frontend spec issues and fix shared state bug</a:t>
             </a:r>
           </a:p>
           <a:p/>
           <a:p>
             <a:r>
+              <a:t>- Segregated Zustand commute store context per employee (fixed shared session bug)</a:t>
+            </a:r>
+          </a:p>
+          <a:p>
+            <a:r>
+              <a:t>- Standardized WebSocket message handling with WS envelope parser</a:t>
+            </a:r>
+          </a:p>
+          <a:p>
+            <a:r>
+              <a:t>- Unified time data sorting with epoch milliseconds</a:t>
+            </a:r>
+          </a:p>
+          <a:p>
+            <a:r>
+              <a:t>- Removed 'any' types for stronger type safety</a:t>
+            </a:r>
+          </a:p>
+          <a:p>
+            <a:r>
+              <a:t>- Separated router pages and content view files</a:t>
+            </a:r>
+          </a:p>
+          <a:p/>
+          <a:p>
+            <a:r>
               <a:t>2026-05-21</a:t>
             </a:r>
           </a:p>
@@ -3763,85 +3766,6 @@
           <a:p>
             <a:r>
               <a:t>- 백엔드 보안 설정 수정 및 프론트엔드 실시간 DB 연동 고도화</a:t>
-            </a:r>
-          </a:p>
-          <a:p/>
-          <a:p>
-            <a:r>
-              <a:t>2026-05-08</a:t>
-            </a:r>
-          </a:p>
-          <a:p>
-            <a:r>
-              <a:t>- Merge pull request #4 from Jongwoo0101/frontend</a:t>
-            </a:r>
-          </a:p>
-          <a:p/>
-          <a:p>
-            <a:r>
-              <a:t>아래 3개 모두 완료</a:t>
-            </a:r>
-          </a:p>
-          <a:p>
-            <a:r>
-              <a:t>POST /api/teams : 실제 팀(Team) 테이블 Entity 생성</a:t>
-            </a:r>
-          </a:p>
-          <a:p>
-            <a:r>
-              <a:t>GET /api/teams/my-team : 직원이 로그인 시 자신이 소속된 팀 조회</a:t>
-            </a:r>
-          </a:p>
-          <a:p>
-            <a:r>
-              <a:t>GET /api/teams/{id}/members : 관리자가 자신의 팀에 소속된 직원 목록 조회</a:t>
-            </a:r>
-          </a:p>
-          <a:p/>
-          <a:p>
-            <a:r>
-              <a:t>2026-05-07</a:t>
-            </a:r>
-          </a:p>
-          <a:p>
-            <a:r>
-              <a:t>- 팀 기반 관리 시스템 구현 및 사파리 호환성 개선</a:t>
-            </a:r>
-          </a:p>
-          <a:p/>
-          <a:p>
-            <a:r>
-              <a:t>- 관리자가 팀을 생성하고 초대 코드를 발급하는 기능 추가</a:t>
-            </a:r>
-          </a:p>
-          <a:p>
-            <a:r>
-              <a:t>- 직원이 코드를 입력하여 팀에 합류하는 기능 추가</a:t>
-            </a:r>
-          </a:p>
-          <a:p>
-            <a:r>
-              <a:t>- 팀별 모니터링 대시보드 구조 설계 (URL 파라미터 기반)</a:t>
-            </a:r>
-          </a:p>
-          <a:p>
-            <a:r>
-              <a:t>- Safari 브라우저에서 fetch/JSON 패턴 에러 해결</a:t>
-            </a:r>
-          </a:p>
-          <a:p>
-            <a:r>
-              <a:t>- 백엔드 응답 필드명(accessToken, virtualBalance) 동기화</a:t>
-            </a:r>
-          </a:p>
-          <a:p>
-            <a:r>
-              <a:t>- zustand와 localStorage를 이용한 오프라인 폴백 시스템 구축</a:t>
-            </a:r>
-          </a:p>
-          <a:p>
-            <a:r>
-              <a:t>- 미사용 InviteEmployeeModal 삭제</a:t>
             </a:r>
           </a:p>
           <a:p/>
@@ -3882,7 +3806,7 @@
           <a:lstStyle/>
           <a:p>
             <a:r>
-              <a:t>기능 개발</a:t>
+              <a:t>버그 수정</a:t>
             </a:r>
           </a:p>
         </p:txBody>
@@ -3903,43 +3827,17 @@
           <a:lstStyle/>
           <a:p>
             <a:r>
-              <a:t>2026-05-22</a:t>
-            </a:r>
-          </a:p>
-          <a:p>
-            <a:r>
-              <a:t>원종우</a:t>
-            </a:r>
-          </a:p>
-          <a:p>
-            <a:r>
-              <a:t>팀 초대 코드 다회성 사용을 위한 1회성 제한 로직 제거</a:t>
-            </a:r>
-          </a:p>
-          <a:p/>
-          <a:p>
-            <a:r>
-              <a:t>[주요 변경 사항]</a:t>
-            </a:r>
-          </a:p>
-          <a:p>
-            <a:r>
-              <a:t>- 기존 1회성 사용 제한으로 인해 다른 팀원이 동일한 코드로 연이어 참가하지 못하던 문제 해결</a:t>
-            </a:r>
-          </a:p>
-          <a:p>
-            <a:r>
-              <a:t>- `InviteCode` 엔티티에서 불필요해진 `used` 필드 및 `markAsUsed()` 상태 변경 메서드 삭제</a:t>
-            </a:r>
-          </a:p>
-          <a:p>
-            <a:r>
-              <a:t>- `InviteCodeRepository`의 쿼리 메서드를 `findByCodeAndUsedFalse`에서 `findByCode`로 단순화</a:t>
-            </a:r>
-          </a:p>
-          <a:p>
-            <a:r>
-              <a:t>- `MemberService.joinTeam()` 내 1회성 처리 로직을 제거하여, 지정된 만료 시간(기본 5분) 내에는 여러 팀원이 무제한으로 코드를 사용할 수 있도록 비즈니스 로직 개선</a:t>
+              <a:t>2026-05-23</a:t>
+            </a:r>
+          </a:p>
+          <a:p>
+            <a:r>
+              <a:t>dldnwls07</a:t>
+            </a:r>
+          </a:p>
+          <a:p>
+            <a:r>
+              <a:t>recover commute state drift when backend worklog is reset</a:t>
             </a:r>
           </a:p>
         </p:txBody>
@@ -3978,7 +3876,7 @@
           <a:lstStyle/>
           <a:p>
             <a:r>
-              <a:t>구조 개선</a:t>
+              <a:t>기능 개발</a:t>
             </a:r>
           </a:p>
         </p:txBody>
@@ -3999,38 +3897,17 @@
           <a:lstStyle/>
           <a:p>
             <a:r>
-              <a:t>2026-05-22</a:t>
-            </a:r>
-          </a:p>
-          <a:p>
-            <a:r>
-              <a:t>원종우</a:t>
-            </a:r>
-          </a:p>
-          <a:p>
-            <a:r>
-              <a:t>WebSocket 메시지 발신 표준화(WsEnvelope) 및 DTO 최적화</a:t>
-            </a:r>
-          </a:p>
-          <a:p/>
-          <a:p>
-            <a:r>
-              <a:t>- 프론트엔드 통신 표준화를 위한 공통 이벤트 래퍼 `WsEnvelope` 도입 (event, data, occurredAt, version)</a:t>
-            </a:r>
-          </a:p>
-          <a:p>
-            <a:r>
-              <a:t>- `DailyStandupService`, `MeetingRoomService`, `NotificationService`, `StatusService`, `WorkLogService`의 메시지 전송부를 `WsEnvelope` 규격으로 전면 교체 및 이벤트 명 상수화</a:t>
-            </a:r>
-          </a:p>
-          <a:p>
-            <a:r>
-              <a:t>- 브로드캐스트 전용 DTO를 `WsEnvelope.data` 구조에 맞게 경량화 (`TeamStatusBroadcast` -&gt; `TeamStatusPayload`)</a:t>
-            </a:r>
-          </a:p>
-          <a:p>
-            <a:r>
-              <a:t>- 각 도메인 서비스 내 Member 검증 중복 코드를 `getManagedMember` 등 헬퍼 메서드로 추출 및 알림 페이로드(roomPayload 등) 규격화</a:t>
+              <a:t>2026-05-23</a:t>
+            </a:r>
+          </a:p>
+          <a:p>
+            <a:r>
+              <a:t>dldnwls07</a:t>
+            </a:r>
+          </a:p>
+          <a:p>
+            <a:r>
+              <a:t>include participantId in meeting notifications and refactor team store selectors for improved reactivity</a:t>
             </a:r>
           </a:p>
         </p:txBody>
@@ -4069,7 +3946,7 @@
           <a:lstStyle/>
           <a:p>
             <a:r>
-              <a:t>기능 개발</a:t>
+              <a:t>버그 수정</a:t>
             </a:r>
           </a:p>
         </p:txBody>
@@ -4090,7 +3967,7 @@
           <a:lstStyle/>
           <a:p>
             <a:r>
-              <a:t>2026-05-22</a:t>
+              <a:t>2026-05-23</a:t>
             </a:r>
           </a:p>
           <a:p>
@@ -4100,23 +3977,7 @@
           </a:p>
           <a:p>
             <a:r>
-              <a:t>팀 초대 코드 DB 영속화 적용 및 관리 로직 개선</a:t>
-            </a:r>
-          </a:p>
-          <a:p/>
-          <a:p>
-            <a:r>
-              <a:t>- 인메모리(ConcurrentHashMap) 기반 초대 코드 저장을 DB 엔티티(`InviteCode`)로 마이그레이션하여 서버 재시작 시 데이터 유지</a:t>
-            </a:r>
-          </a:p>
-          <a:p>
-            <a:r>
-              <a:t>- 초대 코드 1회성 사용을 위한 `markAsUsed()` 비즈니스 로직 및 검증 추가</a:t>
-            </a:r>
-          </a:p>
-          <a:p>
-            <a:r>
-              <a:t>- 초대 코드 만료 시간(expiration-seconds)을 application.yaml에서 주입받도록 환경변수 처리 개선</a:t>
+              <a:t>화상회의 방 재입장 시 호스트/참가자 상태 동기화 및 모달 미표시 버그 수정</a:t>
             </a:r>
           </a:p>
         </p:txBody>
@@ -4155,7 +4016,7 @@
           <a:lstStyle/>
           <a:p>
             <a:r>
-              <a:t>구조 개선</a:t>
+              <a:t>버그 수정</a:t>
             </a:r>
           </a:p>
         </p:txBody>
@@ -4176,17 +4037,22 @@
           <a:lstStyle/>
           <a:p>
             <a:r>
-              <a:t>2026-05-21</a:t>
-            </a:r>
-          </a:p>
-          <a:p>
-            <a:r>
-              <a:t>dldnwls07</a:t>
-            </a:r>
-          </a:p>
-          <a:p>
-            <a:r>
-              <a:t>simplify joinRoom signature and optimize media stream management in video calls</a:t>
+              <a:t>2026-05-23</a:t>
+            </a:r>
+          </a:p>
+          <a:p>
+            <a:r>
+              <a:t>원종우</a:t>
+            </a:r>
+          </a:p>
+          <a:p>
+            <a:r>
+              <a:t>SecurityConfig.java @Value 제거</a:t>
+            </a:r>
+          </a:p>
+          <a:p>
+            <a:r>
+              <a:t>localhost:5173 하드코딩 유지. 대신 새 API 경로들(/api/meetings/**, /api/notifications/**, /api/standup/**) 추가된 것만 반영</a:t>
             </a:r>
           </a:p>
         </p:txBody>
@@ -4246,7 +4112,7 @@
           <a:lstStyle/>
           <a:p>
             <a:r>
-              <a:t>2026-05-21</a:t>
+              <a:t>2026-05-22</a:t>
             </a:r>
           </a:p>
           <a:p>
@@ -4256,7 +4122,33 @@
           </a:p>
           <a:p>
             <a:r>
-              <a:t>centralize status UI settings and update dashboard WebSocket event handling</a:t>
+              <a:t>resolve frontend spec issues and fix shared state bug</a:t>
+            </a:r>
+          </a:p>
+          <a:p/>
+          <a:p>
+            <a:r>
+              <a:t>- Segregated Zustand commute store context per employee (fixed shared session bug)</a:t>
+            </a:r>
+          </a:p>
+          <a:p>
+            <a:r>
+              <a:t>- Standardized WebSocket message handling with WS envelope parser</a:t>
+            </a:r>
+          </a:p>
+          <a:p>
+            <a:r>
+              <a:t>- Unified time data sorting with epoch milliseconds</a:t>
+            </a:r>
+          </a:p>
+          <a:p>
+            <a:r>
+              <a:t>- Removed 'any' types for stronger type safety</a:t>
+            </a:r>
+          </a:p>
+          <a:p>
+            <a:r>
+              <a:t>- Separated router pages and content view files</a:t>
             </a:r>
           </a:p>
         </p:txBody>
@@ -4295,7 +4187,7 @@
           <a:lstStyle/>
           <a:p>
             <a:r>
-              <a:t>구조 개선</a:t>
+              <a:t>기능 개발</a:t>
             </a:r>
           </a:p>
         </p:txBody>
@@ -4316,7 +4208,7 @@
           <a:lstStyle/>
           <a:p>
             <a:r>
-              <a:t>2026-05-20</a:t>
+              <a:t>2026-05-22</a:t>
             </a:r>
           </a:p>
           <a:p>
@@ -4326,7 +4218,33 @@
           </a:p>
           <a:p>
             <a:r>
-              <a:t>status-api-test.http 경로 변경</a:t>
+              <a:t>팀 초대 코드 다회성 사용을 위한 1회성 제한 로직 제거</a:t>
+            </a:r>
+          </a:p>
+          <a:p/>
+          <a:p>
+            <a:r>
+              <a:t>[주요 변경 사항]</a:t>
+            </a:r>
+          </a:p>
+          <a:p>
+            <a:r>
+              <a:t>- 기존 1회성 사용 제한으로 인해 다른 팀원이 동일한 코드로 연이어 참가하지 못하던 문제 해결</a:t>
+            </a:r>
+          </a:p>
+          <a:p>
+            <a:r>
+              <a:t>- `InviteCode` 엔티티에서 불필요해진 `used` 필드 및 `markAsUsed()` 상태 변경 메서드 삭제</a:t>
+            </a:r>
+          </a:p>
+          <a:p>
+            <a:r>
+              <a:t>- `InviteCodeRepository`의 쿼리 메서드를 `findByCodeAndUsedFalse`에서 `findByCode`로 단순화</a:t>
+            </a:r>
+          </a:p>
+          <a:p>
+            <a:r>
+              <a:t>- `MemberService.joinTeam()` 내 1회성 처리 로직을 제거하여, 지정된 만료 시간(기본 5분) 내에는 여러 팀원이 무제한으로 코드를 사용할 수 있도록 비즈니스 로직 개선</a:t>
             </a:r>
           </a:p>
         </p:txBody>

--- a/data/commit_report.pptx
+++ b/data/commit_report.pptx
@@ -9,15 +9,6 @@
     <p:sldId id="257" r:id="rId8"/>
     <p:sldId id="258" r:id="rId9"/>
     <p:sldId id="259" r:id="rId10"/>
-    <p:sldId id="260" r:id="rId11"/>
-    <p:sldId id="261" r:id="rId12"/>
-    <p:sldId id="262" r:id="rId13"/>
-    <p:sldId id="263" r:id="rId14"/>
-    <p:sldId id="264" r:id="rId15"/>
-    <p:sldId id="265" r:id="rId16"/>
-    <p:sldId id="266" r:id="rId17"/>
-    <p:sldId id="267" r:id="rId18"/>
-    <p:sldId id="268" r:id="rId19"/>
   </p:sldIdLst>
   <p:sldSz cx="9144000" cy="6858000" type="screen4x3"/>
   <p:notesSz cx="6858000" cy="9144000"/>
@@ -3150,323 +3141,6 @@
 </p:sld>
 </file>
 
-<file path=ppt/slides/slide10.xml><?xml version="1.0" encoding="utf-8"?>
-<p:sld xmlns:a="http://schemas.openxmlformats.org/drawingml/2006/main" xmlns:p="http://schemas.openxmlformats.org/presentationml/2006/main" xmlns:r="http://schemas.openxmlformats.org/officeDocument/2006/relationships">
-  <p:cSld>
-    <p:spTree>
-      <p:nvGrpSpPr>
-        <p:cNvPr id="1" name=""/>
-        <p:cNvGrpSpPr/>
-        <p:nvPr/>
-      </p:nvGrpSpPr>
-      <p:grpSpPr/>
-      <p:sp>
-        <p:nvSpPr>
-          <p:cNvPr id="2" name="Title 1"/>
-          <p:cNvSpPr>
-            <a:spLocks noGrp="1"/>
-          </p:cNvSpPr>
-          <p:nvPr>
-            <p:ph type="title"/>
-          </p:nvPr>
-        </p:nvSpPr>
-        <p:spPr/>
-        <p:txBody>
-          <a:bodyPr/>
-          <a:lstStyle/>
-          <a:p>
-            <a:r>
-              <a:t>구조 개선</a:t>
-            </a:r>
-          </a:p>
-        </p:txBody>
-      </p:sp>
-      <p:sp>
-        <p:nvSpPr>
-          <p:cNvPr id="3" name="Content Placeholder 2"/>
-          <p:cNvSpPr>
-            <a:spLocks noGrp="1"/>
-          </p:cNvSpPr>
-          <p:nvPr>
-            <p:ph idx="1"/>
-          </p:nvPr>
-        </p:nvSpPr>
-        <p:spPr/>
-        <p:txBody>
-          <a:bodyPr/>
-          <a:lstStyle/>
-          <a:p>
-            <a:r>
-              <a:t>2026-05-22</a:t>
-            </a:r>
-          </a:p>
-          <a:p>
-            <a:r>
-              <a:t>원종우</a:t>
-            </a:r>
-          </a:p>
-          <a:p>
-            <a:r>
-              <a:t>WebSocket 메시지 발신 표준화(WsEnvelope) 및 DTO 최적화</a:t>
-            </a:r>
-          </a:p>
-          <a:p/>
-          <a:p>
-            <a:r>
-              <a:t>- 프론트엔드 통신 표준화를 위한 공통 이벤트 래퍼 `WsEnvelope` 도입 (event, data, occurredAt, version)</a:t>
-            </a:r>
-          </a:p>
-          <a:p>
-            <a:r>
-              <a:t>- `DailyStandupService`, `MeetingRoomService`, `NotificationService`, `StatusService`, `WorkLogService`의 메시지 전송부를 `WsEnvelope` 규격으로 전면 교체 및 이벤트 명 상수화</a:t>
-            </a:r>
-          </a:p>
-          <a:p>
-            <a:r>
-              <a:t>- 브로드캐스트 전용 DTO를 `WsEnvelope.data` 구조에 맞게 경량화 (`TeamStatusBroadcast` -&gt; `TeamStatusPayload`)</a:t>
-            </a:r>
-          </a:p>
-          <a:p>
-            <a:r>
-              <a:t>- 각 도메인 서비스 내 Member 검증 중복 코드를 `getManagedMember` 등 헬퍼 메서드로 추출 및 알림 페이로드(roomPayload 등) 규격화</a:t>
-            </a:r>
-          </a:p>
-        </p:txBody>
-      </p:sp>
-    </p:spTree>
-  </p:cSld>
-  <p:clrMapOvr>
-    <a:masterClrMapping/>
-  </p:clrMapOvr>
-</p:sld>
-</file>
-
-<file path=ppt/slides/slide11.xml><?xml version="1.0" encoding="utf-8"?>
-<p:sld xmlns:a="http://schemas.openxmlformats.org/drawingml/2006/main" xmlns:p="http://schemas.openxmlformats.org/presentationml/2006/main" xmlns:r="http://schemas.openxmlformats.org/officeDocument/2006/relationships">
-  <p:cSld>
-    <p:spTree>
-      <p:nvGrpSpPr>
-        <p:cNvPr id="1" name=""/>
-        <p:cNvGrpSpPr/>
-        <p:nvPr/>
-      </p:nvGrpSpPr>
-      <p:grpSpPr/>
-      <p:sp>
-        <p:nvSpPr>
-          <p:cNvPr id="2" name="Title 1"/>
-          <p:cNvSpPr>
-            <a:spLocks noGrp="1"/>
-          </p:cNvSpPr>
-          <p:nvPr>
-            <p:ph type="title"/>
-          </p:nvPr>
-        </p:nvSpPr>
-        <p:spPr/>
-        <p:txBody>
-          <a:bodyPr/>
-          <a:lstStyle/>
-          <a:p>
-            <a:r>
-              <a:t>기능 개발</a:t>
-            </a:r>
-          </a:p>
-        </p:txBody>
-      </p:sp>
-      <p:sp>
-        <p:nvSpPr>
-          <p:cNvPr id="3" name="Content Placeholder 2"/>
-          <p:cNvSpPr>
-            <a:spLocks noGrp="1"/>
-          </p:cNvSpPr>
-          <p:nvPr>
-            <p:ph idx="1"/>
-          </p:nvPr>
-        </p:nvSpPr>
-        <p:spPr/>
-        <p:txBody>
-          <a:bodyPr/>
-          <a:lstStyle/>
-          <a:p>
-            <a:r>
-              <a:t>2026-05-22</a:t>
-            </a:r>
-          </a:p>
-          <a:p>
-            <a:r>
-              <a:t>원종우</a:t>
-            </a:r>
-          </a:p>
-          <a:p>
-            <a:r>
-              <a:t>팀 초대 코드 DB 영속화 적용 및 관리 로직 개선</a:t>
-            </a:r>
-          </a:p>
-          <a:p/>
-          <a:p>
-            <a:r>
-              <a:t>- 인메모리(ConcurrentHashMap) 기반 초대 코드 저장을 DB 엔티티(`InviteCode`)로 마이그레이션하여 서버 재시작 시 데이터 유지</a:t>
-            </a:r>
-          </a:p>
-          <a:p>
-            <a:r>
-              <a:t>- 초대 코드 1회성 사용을 위한 `markAsUsed()` 비즈니스 로직 및 검증 추가</a:t>
-            </a:r>
-          </a:p>
-          <a:p>
-            <a:r>
-              <a:t>- 초대 코드 만료 시간(expiration-seconds)을 application.yaml에서 주입받도록 환경변수 처리 개선</a:t>
-            </a:r>
-          </a:p>
-        </p:txBody>
-      </p:sp>
-    </p:spTree>
-  </p:cSld>
-  <p:clrMapOvr>
-    <a:masterClrMapping/>
-  </p:clrMapOvr>
-</p:sld>
-</file>
-
-<file path=ppt/slides/slide12.xml><?xml version="1.0" encoding="utf-8"?>
-<p:sld xmlns:a="http://schemas.openxmlformats.org/drawingml/2006/main" xmlns:p="http://schemas.openxmlformats.org/presentationml/2006/main" xmlns:r="http://schemas.openxmlformats.org/officeDocument/2006/relationships">
-  <p:cSld>
-    <p:spTree>
-      <p:nvGrpSpPr>
-        <p:cNvPr id="1" name=""/>
-        <p:cNvGrpSpPr/>
-        <p:nvPr/>
-      </p:nvGrpSpPr>
-      <p:grpSpPr/>
-      <p:sp>
-        <p:nvSpPr>
-          <p:cNvPr id="2" name="Title 1"/>
-          <p:cNvSpPr>
-            <a:spLocks noGrp="1"/>
-          </p:cNvSpPr>
-          <p:nvPr>
-            <p:ph type="title"/>
-          </p:nvPr>
-        </p:nvSpPr>
-        <p:spPr/>
-        <p:txBody>
-          <a:bodyPr/>
-          <a:lstStyle/>
-          <a:p>
-            <a:r>
-              <a:t>구조 개선</a:t>
-            </a:r>
-          </a:p>
-        </p:txBody>
-      </p:sp>
-      <p:sp>
-        <p:nvSpPr>
-          <p:cNvPr id="3" name="Content Placeholder 2"/>
-          <p:cNvSpPr>
-            <a:spLocks noGrp="1"/>
-          </p:cNvSpPr>
-          <p:nvPr>
-            <p:ph idx="1"/>
-          </p:nvPr>
-        </p:nvSpPr>
-        <p:spPr/>
-        <p:txBody>
-          <a:bodyPr/>
-          <a:lstStyle/>
-          <a:p>
-            <a:r>
-              <a:t>2026-05-21</a:t>
-            </a:r>
-          </a:p>
-          <a:p>
-            <a:r>
-              <a:t>dldnwls07</a:t>
-            </a:r>
-          </a:p>
-          <a:p>
-            <a:r>
-              <a:t>simplify joinRoom signature and optimize media stream management in video calls</a:t>
-            </a:r>
-          </a:p>
-        </p:txBody>
-      </p:sp>
-    </p:spTree>
-  </p:cSld>
-  <p:clrMapOvr>
-    <a:masterClrMapping/>
-  </p:clrMapOvr>
-</p:sld>
-</file>
-
-<file path=ppt/slides/slide13.xml><?xml version="1.0" encoding="utf-8"?>
-<p:sld xmlns:a="http://schemas.openxmlformats.org/drawingml/2006/main" xmlns:p="http://schemas.openxmlformats.org/presentationml/2006/main" xmlns:r="http://schemas.openxmlformats.org/officeDocument/2006/relationships">
-  <p:cSld>
-    <p:spTree>
-      <p:nvGrpSpPr>
-        <p:cNvPr id="1" name=""/>
-        <p:cNvGrpSpPr/>
-        <p:nvPr/>
-      </p:nvGrpSpPr>
-      <p:grpSpPr/>
-      <p:sp>
-        <p:nvSpPr>
-          <p:cNvPr id="2" name="Title 1"/>
-          <p:cNvSpPr>
-            <a:spLocks noGrp="1"/>
-          </p:cNvSpPr>
-          <p:nvPr>
-            <p:ph type="title"/>
-          </p:nvPr>
-        </p:nvSpPr>
-        <p:spPr/>
-        <p:txBody>
-          <a:bodyPr/>
-          <a:lstStyle/>
-          <a:p>
-            <a:r>
-              <a:t>구조 개선</a:t>
-            </a:r>
-          </a:p>
-        </p:txBody>
-      </p:sp>
-      <p:sp>
-        <p:nvSpPr>
-          <p:cNvPr id="3" name="Content Placeholder 2"/>
-          <p:cNvSpPr>
-            <a:spLocks noGrp="1"/>
-          </p:cNvSpPr>
-          <p:nvPr>
-            <p:ph idx="1"/>
-          </p:nvPr>
-        </p:nvSpPr>
-        <p:spPr/>
-        <p:txBody>
-          <a:bodyPr/>
-          <a:lstStyle/>
-          <a:p>
-            <a:r>
-              <a:t>2026-05-21</a:t>
-            </a:r>
-          </a:p>
-          <a:p>
-            <a:r>
-              <a:t>dldnwls07</a:t>
-            </a:r>
-          </a:p>
-          <a:p>
-            <a:r>
-              <a:t>centralize status UI settings and update dashboard WebSocket event handling</a:t>
-            </a:r>
-          </a:p>
-        </p:txBody>
-      </p:sp>
-    </p:spTree>
-  </p:cSld>
-  <p:clrMapOvr>
-    <a:masterClrMapping/>
-  </p:clrMapOvr>
-</p:sld>
-</file>
-
 <file path=ppt/slides/slide2.xml><?xml version="1.0" encoding="utf-8"?>
 <p:sld xmlns:a="http://schemas.openxmlformats.org/drawingml/2006/main" xmlns:p="http://schemas.openxmlformats.org/presentationml/2006/main" xmlns:r="http://schemas.openxmlformats.org/officeDocument/2006/relationships">
   <p:cSld>
@@ -3514,17 +3188,7 @@
           <a:lstStyle/>
           <a:p>
             <a:r>
-              <a:t>원종우: 101 commits</a:t>
-            </a:r>
-          </a:p>
-          <a:p>
-            <a:r>
-              <a:t>dldnwls07: 58 commits</a:t>
-            </a:r>
-          </a:p>
-          <a:p>
-            <a:r>
-              <a:t>070128o: 16 commits</a:t>
+              <a:t>원종우: 1 commits</a:t>
             </a:r>
           </a:p>
           <a:p/>
@@ -3590,182 +3254,7 @@
           </a:p>
           <a:p>
             <a:r>
-              <a:t>- Merge pull request #6 from Jongwoo0101/feature/frontend-refactor-and-bugfix</a:t>
-            </a:r>
-          </a:p>
-          <a:p/>
-          <a:p>
-            <a:r>
-              <a:t> resolve frontend spec issues and fix shared state bug</a:t>
-            </a:r>
-          </a:p>
-          <a:p/>
-          <a:p>
-            <a:r>
-              <a:t>2026-05-23</a:t>
-            </a:r>
-          </a:p>
-          <a:p>
-            <a:r>
-              <a:t>- recover commute state drift when backend worklog is reset</a:t>
-            </a:r>
-          </a:p>
-          <a:p/>
-          <a:p>
-            <a:r>
-              <a:t>2026-05-22</a:t>
-            </a:r>
-          </a:p>
-          <a:p>
-            <a:r>
-              <a:t>- resolve frontend spec issues and fix shared state bug</a:t>
-            </a:r>
-          </a:p>
-          <a:p/>
-          <a:p>
-            <a:r>
-              <a:t>- Segregated Zustand commute store context per employee (fixed shared session bug)</a:t>
-            </a:r>
-          </a:p>
-          <a:p>
-            <a:r>
-              <a:t>- Standardized WebSocket message handling with WS envelope parser</a:t>
-            </a:r>
-          </a:p>
-          <a:p>
-            <a:r>
-              <a:t>- Unified time data sorting with epoch milliseconds</a:t>
-            </a:r>
-          </a:p>
-          <a:p>
-            <a:r>
-              <a:t>- Removed 'any' types for stronger type safety</a:t>
-            </a:r>
-          </a:p>
-          <a:p>
-            <a:r>
-              <a:t>- Separated router pages and content view files</a:t>
-            </a:r>
-          </a:p>
-          <a:p/>
-          <a:p>
-            <a:r>
-              <a:t>2026-05-21</a:t>
-            </a:r>
-          </a:p>
-          <a:p>
-            <a:r>
-              <a:t>- simplify joinRoom signature and optimize media stream management in video calls</a:t>
-            </a:r>
-          </a:p>
-          <a:p/>
-          <a:p>
-            <a:r>
-              <a:t>2026-05-20</a:t>
-            </a:r>
-          </a:p>
-          <a:p>
-            <a:r>
-              <a:t>- chore: status-api-test.http 내에 오타 수정</a:t>
-            </a:r>
-          </a:p>
-          <a:p/>
-          <a:p>
-            <a:r>
-              <a:t>2026-05-15</a:t>
-            </a:r>
-          </a:p>
-          <a:p>
-            <a:r>
-              <a:t>- plan.txt 수정</a:t>
-            </a:r>
-          </a:p>
-          <a:p>
-            <a:r>
-              <a:t>기획완료</a:t>
-            </a:r>
-          </a:p>
-          <a:p/>
-          <a:p>
-            <a:r>
-              <a:t>2026-05-14</a:t>
-            </a:r>
-          </a:p>
-          <a:p>
-            <a:r>
-              <a:t>- refactor(MonitoringService): 트랜잭션 안전성 및 null 처리 개선</a:t>
-            </a:r>
-          </a:p>
-          <a:p/>
-          <a:p>
-            <a:r>
-              <a:t>- WebSocket 브로드캐스팅을 afterCommit() 훅으로 이동</a:t>
-            </a:r>
-          </a:p>
-          <a:p>
-            <a:r>
-              <a:t>  DB 롤백 시 유령 알림 발생 방지</a:t>
-            </a:r>
-          </a:p>
-          <a:p/>
-          <a:p>
-            <a:r>
-              <a:t>- confidence null 처리 개선</a:t>
-            </a:r>
-          </a:p>
-          <a:p>
-            <a:r>
-              <a:t>  Integer nullable 반환 제거, 기본값 0 반환으로 NPE 방지</a:t>
-            </a:r>
-          </a:p>
-          <a:p/>
-          <a:p>
-            <a:r>
-              <a:t>- alert 생성 시 confidence 일관성 확보</a:t>
-            </a:r>
-          </a:p>
-          <a:p>
-            <a:r>
-              <a:t>  event.getConfidence() 대신 normalizeConfidence() 재사용</a:t>
-            </a:r>
-          </a:p>
-          <a:p/>
-          <a:p>
-            <a:r>
-              <a:t>2026-05-13</a:t>
-            </a:r>
-          </a:p>
-          <a:p>
-            <a:r>
-              <a:t>- 팀 스토리지 유틸리티 구현, 모니터링 서비스 유닛 테스트 추가, AI 모델 환경 문제 해결</a:t>
-            </a:r>
-          </a:p>
-          <a:p/>
-          <a:p>
-            <a:r>
-              <a:t>2026-05-12</a:t>
-            </a:r>
-          </a:p>
-          <a:p>
-            <a:r>
-              <a:t>- Merge pull request #5 from Jongwoo0101/frontend</a:t>
-            </a:r>
-          </a:p>
-          <a:p/>
-          <a:p>
-            <a:r>
-              <a:t> 백엔드 보안 설정 수정 및 프론트엔드 실시간 DB 연동 고도화</a:t>
-            </a:r>
-          </a:p>
-          <a:p/>
-          <a:p>
-            <a:r>
-              <a:t>2026-05-10</a:t>
-            </a:r>
-          </a:p>
-          <a:p>
-            <a:r>
-              <a:t>- 백엔드 보안 설정 수정 및 프론트엔드 실시간 DB 연동 고도화</a:t>
+              <a:t>- just for commit bot test. ignore this commit</a:t>
             </a:r>
           </a:p>
           <a:p/>
@@ -3806,7 +3295,7 @@
           <a:lstStyle/>
           <a:p>
             <a:r>
-              <a:t>버그 수정</a:t>
+              <a:t>테스트</a:t>
             </a:r>
           </a:p>
         </p:txBody>
@@ -3827,147 +3316,7 @@
           <a:lstStyle/>
           <a:p>
             <a:r>
-              <a:t>2026-05-23</a:t>
-            </a:r>
-          </a:p>
-          <a:p>
-            <a:r>
-              <a:t>dldnwls07</a:t>
-            </a:r>
-          </a:p>
-          <a:p>
-            <a:r>
-              <a:t>recover commute state drift when backend worklog is reset</a:t>
-            </a:r>
-          </a:p>
-        </p:txBody>
-      </p:sp>
-    </p:spTree>
-  </p:cSld>
-  <p:clrMapOvr>
-    <a:masterClrMapping/>
-  </p:clrMapOvr>
-</p:sld>
-</file>
-
-<file path=ppt/slides/slide5.xml><?xml version="1.0" encoding="utf-8"?>
-<p:sld xmlns:a="http://schemas.openxmlformats.org/drawingml/2006/main" xmlns:p="http://schemas.openxmlformats.org/presentationml/2006/main" xmlns:r="http://schemas.openxmlformats.org/officeDocument/2006/relationships">
-  <p:cSld>
-    <p:spTree>
-      <p:nvGrpSpPr>
-        <p:cNvPr id="1" name=""/>
-        <p:cNvGrpSpPr/>
-        <p:nvPr/>
-      </p:nvGrpSpPr>
-      <p:grpSpPr/>
-      <p:sp>
-        <p:nvSpPr>
-          <p:cNvPr id="2" name="Title 1"/>
-          <p:cNvSpPr>
-            <a:spLocks noGrp="1"/>
-          </p:cNvSpPr>
-          <p:nvPr>
-            <p:ph type="title"/>
-          </p:nvPr>
-        </p:nvSpPr>
-        <p:spPr/>
-        <p:txBody>
-          <a:bodyPr/>
-          <a:lstStyle/>
-          <a:p>
-            <a:r>
-              <a:t>기능 개발</a:t>
-            </a:r>
-          </a:p>
-        </p:txBody>
-      </p:sp>
-      <p:sp>
-        <p:nvSpPr>
-          <p:cNvPr id="3" name="Content Placeholder 2"/>
-          <p:cNvSpPr>
-            <a:spLocks noGrp="1"/>
-          </p:cNvSpPr>
-          <p:nvPr>
-            <p:ph idx="1"/>
-          </p:nvPr>
-        </p:nvSpPr>
-        <p:spPr/>
-        <p:txBody>
-          <a:bodyPr/>
-          <a:lstStyle/>
-          <a:p>
-            <a:r>
-              <a:t>2026-05-23</a:t>
-            </a:r>
-          </a:p>
-          <a:p>
-            <a:r>
-              <a:t>dldnwls07</a:t>
-            </a:r>
-          </a:p>
-          <a:p>
-            <a:r>
-              <a:t>include participantId in meeting notifications and refactor team store selectors for improved reactivity</a:t>
-            </a:r>
-          </a:p>
-        </p:txBody>
-      </p:sp>
-    </p:spTree>
-  </p:cSld>
-  <p:clrMapOvr>
-    <a:masterClrMapping/>
-  </p:clrMapOvr>
-</p:sld>
-</file>
-
-<file path=ppt/slides/slide6.xml><?xml version="1.0" encoding="utf-8"?>
-<p:sld xmlns:a="http://schemas.openxmlformats.org/drawingml/2006/main" xmlns:p="http://schemas.openxmlformats.org/presentationml/2006/main" xmlns:r="http://schemas.openxmlformats.org/officeDocument/2006/relationships">
-  <p:cSld>
-    <p:spTree>
-      <p:nvGrpSpPr>
-        <p:cNvPr id="1" name=""/>
-        <p:cNvGrpSpPr/>
-        <p:nvPr/>
-      </p:nvGrpSpPr>
-      <p:grpSpPr/>
-      <p:sp>
-        <p:nvSpPr>
-          <p:cNvPr id="2" name="Title 1"/>
-          <p:cNvSpPr>
-            <a:spLocks noGrp="1"/>
-          </p:cNvSpPr>
-          <p:nvPr>
-            <p:ph type="title"/>
-          </p:nvPr>
-        </p:nvSpPr>
-        <p:spPr/>
-        <p:txBody>
-          <a:bodyPr/>
-          <a:lstStyle/>
-          <a:p>
-            <a:r>
-              <a:t>버그 수정</a:t>
-            </a:r>
-          </a:p>
-        </p:txBody>
-      </p:sp>
-      <p:sp>
-        <p:nvSpPr>
-          <p:cNvPr id="3" name="Content Placeholder 2"/>
-          <p:cNvSpPr>
-            <a:spLocks noGrp="1"/>
-          </p:cNvSpPr>
-          <p:nvPr>
-            <p:ph idx="1"/>
-          </p:nvPr>
-        </p:nvSpPr>
-        <p:spPr/>
-        <p:txBody>
-          <a:bodyPr/>
-          <a:lstStyle/>
-          <a:p>
-            <a:r>
-              <a:t>2026-05-23</a:t>
+              <a:t>2026-05-24</a:t>
             </a:r>
           </a:p>
           <a:p>
@@ -3977,274 +3326,7 @@
           </a:p>
           <a:p>
             <a:r>
-              <a:t>화상회의 방 재입장 시 호스트/참가자 상태 동기화 및 모달 미표시 버그 수정</a:t>
-            </a:r>
-          </a:p>
-        </p:txBody>
-      </p:sp>
-    </p:spTree>
-  </p:cSld>
-  <p:clrMapOvr>
-    <a:masterClrMapping/>
-  </p:clrMapOvr>
-</p:sld>
-</file>
-
-<file path=ppt/slides/slide7.xml><?xml version="1.0" encoding="utf-8"?>
-<p:sld xmlns:a="http://schemas.openxmlformats.org/drawingml/2006/main" xmlns:p="http://schemas.openxmlformats.org/presentationml/2006/main" xmlns:r="http://schemas.openxmlformats.org/officeDocument/2006/relationships">
-  <p:cSld>
-    <p:spTree>
-      <p:nvGrpSpPr>
-        <p:cNvPr id="1" name=""/>
-        <p:cNvGrpSpPr/>
-        <p:nvPr/>
-      </p:nvGrpSpPr>
-      <p:grpSpPr/>
-      <p:sp>
-        <p:nvSpPr>
-          <p:cNvPr id="2" name="Title 1"/>
-          <p:cNvSpPr>
-            <a:spLocks noGrp="1"/>
-          </p:cNvSpPr>
-          <p:nvPr>
-            <p:ph type="title"/>
-          </p:nvPr>
-        </p:nvSpPr>
-        <p:spPr/>
-        <p:txBody>
-          <a:bodyPr/>
-          <a:lstStyle/>
-          <a:p>
-            <a:r>
-              <a:t>버그 수정</a:t>
-            </a:r>
-          </a:p>
-        </p:txBody>
-      </p:sp>
-      <p:sp>
-        <p:nvSpPr>
-          <p:cNvPr id="3" name="Content Placeholder 2"/>
-          <p:cNvSpPr>
-            <a:spLocks noGrp="1"/>
-          </p:cNvSpPr>
-          <p:nvPr>
-            <p:ph idx="1"/>
-          </p:nvPr>
-        </p:nvSpPr>
-        <p:spPr/>
-        <p:txBody>
-          <a:bodyPr/>
-          <a:lstStyle/>
-          <a:p>
-            <a:r>
-              <a:t>2026-05-23</a:t>
-            </a:r>
-          </a:p>
-          <a:p>
-            <a:r>
-              <a:t>원종우</a:t>
-            </a:r>
-          </a:p>
-          <a:p>
-            <a:r>
-              <a:t>SecurityConfig.java @Value 제거</a:t>
-            </a:r>
-          </a:p>
-          <a:p>
-            <a:r>
-              <a:t>localhost:5173 하드코딩 유지. 대신 새 API 경로들(/api/meetings/**, /api/notifications/**, /api/standup/**) 추가된 것만 반영</a:t>
-            </a:r>
-          </a:p>
-        </p:txBody>
-      </p:sp>
-    </p:spTree>
-  </p:cSld>
-  <p:clrMapOvr>
-    <a:masterClrMapping/>
-  </p:clrMapOvr>
-</p:sld>
-</file>
-
-<file path=ppt/slides/slide8.xml><?xml version="1.0" encoding="utf-8"?>
-<p:sld xmlns:a="http://schemas.openxmlformats.org/drawingml/2006/main" xmlns:p="http://schemas.openxmlformats.org/presentationml/2006/main" xmlns:r="http://schemas.openxmlformats.org/officeDocument/2006/relationships">
-  <p:cSld>
-    <p:spTree>
-      <p:nvGrpSpPr>
-        <p:cNvPr id="1" name=""/>
-        <p:cNvGrpSpPr/>
-        <p:nvPr/>
-      </p:nvGrpSpPr>
-      <p:grpSpPr/>
-      <p:sp>
-        <p:nvSpPr>
-          <p:cNvPr id="2" name="Title 1"/>
-          <p:cNvSpPr>
-            <a:spLocks noGrp="1"/>
-          </p:cNvSpPr>
-          <p:nvPr>
-            <p:ph type="title"/>
-          </p:nvPr>
-        </p:nvSpPr>
-        <p:spPr/>
-        <p:txBody>
-          <a:bodyPr/>
-          <a:lstStyle/>
-          <a:p>
-            <a:r>
-              <a:t>구조 개선</a:t>
-            </a:r>
-          </a:p>
-        </p:txBody>
-      </p:sp>
-      <p:sp>
-        <p:nvSpPr>
-          <p:cNvPr id="3" name="Content Placeholder 2"/>
-          <p:cNvSpPr>
-            <a:spLocks noGrp="1"/>
-          </p:cNvSpPr>
-          <p:nvPr>
-            <p:ph idx="1"/>
-          </p:nvPr>
-        </p:nvSpPr>
-        <p:spPr/>
-        <p:txBody>
-          <a:bodyPr/>
-          <a:lstStyle/>
-          <a:p>
-            <a:r>
-              <a:t>2026-05-22</a:t>
-            </a:r>
-          </a:p>
-          <a:p>
-            <a:r>
-              <a:t>dldnwls07</a:t>
-            </a:r>
-          </a:p>
-          <a:p>
-            <a:r>
-              <a:t>resolve frontend spec issues and fix shared state bug</a:t>
-            </a:r>
-          </a:p>
-          <a:p/>
-          <a:p>
-            <a:r>
-              <a:t>- Segregated Zustand commute store context per employee (fixed shared session bug)</a:t>
-            </a:r>
-          </a:p>
-          <a:p>
-            <a:r>
-              <a:t>- Standardized WebSocket message handling with WS envelope parser</a:t>
-            </a:r>
-          </a:p>
-          <a:p>
-            <a:r>
-              <a:t>- Unified time data sorting with epoch milliseconds</a:t>
-            </a:r>
-          </a:p>
-          <a:p>
-            <a:r>
-              <a:t>- Removed 'any' types for stronger type safety</a:t>
-            </a:r>
-          </a:p>
-          <a:p>
-            <a:r>
-              <a:t>- Separated router pages and content view files</a:t>
-            </a:r>
-          </a:p>
-        </p:txBody>
-      </p:sp>
-    </p:spTree>
-  </p:cSld>
-  <p:clrMapOvr>
-    <a:masterClrMapping/>
-  </p:clrMapOvr>
-</p:sld>
-</file>
-
-<file path=ppt/slides/slide9.xml><?xml version="1.0" encoding="utf-8"?>
-<p:sld xmlns:a="http://schemas.openxmlformats.org/drawingml/2006/main" xmlns:p="http://schemas.openxmlformats.org/presentationml/2006/main" xmlns:r="http://schemas.openxmlformats.org/officeDocument/2006/relationships">
-  <p:cSld>
-    <p:spTree>
-      <p:nvGrpSpPr>
-        <p:cNvPr id="1" name=""/>
-        <p:cNvGrpSpPr/>
-        <p:nvPr/>
-      </p:nvGrpSpPr>
-      <p:grpSpPr/>
-      <p:sp>
-        <p:nvSpPr>
-          <p:cNvPr id="2" name="Title 1"/>
-          <p:cNvSpPr>
-            <a:spLocks noGrp="1"/>
-          </p:cNvSpPr>
-          <p:nvPr>
-            <p:ph type="title"/>
-          </p:nvPr>
-        </p:nvSpPr>
-        <p:spPr/>
-        <p:txBody>
-          <a:bodyPr/>
-          <a:lstStyle/>
-          <a:p>
-            <a:r>
-              <a:t>기능 개발</a:t>
-            </a:r>
-          </a:p>
-        </p:txBody>
-      </p:sp>
-      <p:sp>
-        <p:nvSpPr>
-          <p:cNvPr id="3" name="Content Placeholder 2"/>
-          <p:cNvSpPr>
-            <a:spLocks noGrp="1"/>
-          </p:cNvSpPr>
-          <p:nvPr>
-            <p:ph idx="1"/>
-          </p:nvPr>
-        </p:nvSpPr>
-        <p:spPr/>
-        <p:txBody>
-          <a:bodyPr/>
-          <a:lstStyle/>
-          <a:p>
-            <a:r>
-              <a:t>2026-05-22</a:t>
-            </a:r>
-          </a:p>
-          <a:p>
-            <a:r>
-              <a:t>원종우</a:t>
-            </a:r>
-          </a:p>
-          <a:p>
-            <a:r>
-              <a:t>팀 초대 코드 다회성 사용을 위한 1회성 제한 로직 제거</a:t>
-            </a:r>
-          </a:p>
-          <a:p/>
-          <a:p>
-            <a:r>
-              <a:t>[주요 변경 사항]</a:t>
-            </a:r>
-          </a:p>
-          <a:p>
-            <a:r>
-              <a:t>- 기존 1회성 사용 제한으로 인해 다른 팀원이 동일한 코드로 연이어 참가하지 못하던 문제 해결</a:t>
-            </a:r>
-          </a:p>
-          <a:p>
-            <a:r>
-              <a:t>- `InviteCode` 엔티티에서 불필요해진 `used` 필드 및 `markAsUsed()` 상태 변경 메서드 삭제</a:t>
-            </a:r>
-          </a:p>
-          <a:p>
-            <a:r>
-              <a:t>- `InviteCodeRepository`의 쿼리 메서드를 `findByCodeAndUsedFalse`에서 `findByCode`로 단순화</a:t>
-            </a:r>
-          </a:p>
-          <a:p>
-            <a:r>
-              <a:t>- `MemberService.joinTeam()` 내 1회성 처리 로직을 제거하여, 지정된 만료 시간(기본 5분) 내에는 여러 팀원이 무제한으로 코드를 사용할 수 있도록 비즈니스 로직 개선</a:t>
+              <a:t>just for commit bot test. ignore this commit</a:t>
             </a:r>
           </a:p>
         </p:txBody>

--- a/data/commit_report.pptx
+++ b/data/commit_report.pptx
@@ -185,6 +185,9 @@
     <p:sldId id="433" r:id="rId184"/>
     <p:sldId id="434" r:id="rId185"/>
     <p:sldId id="435" r:id="rId186"/>
+    <p:sldId id="436" r:id="rId187"/>
+    <p:sldId id="437" r:id="rId188"/>
+    <p:sldId id="438" r:id="rId189"/>
   </p:sldIdLst>
   <p:sldSz cx="9144000" cy="6858000" type="screen4x3"/>
   <p:notesSz cx="6858000" cy="9144000"/>
@@ -3369,22 +3372,17 @@
           </a:p>
           <a:p>
             <a:r>
-              <a:t>작성자: 원종우</a:t>
-            </a:r>
-          </a:p>
-          <a:p>
-            <a:r>
-              <a:t>요약: SecurityConfig.java @Value 제거</a:t>
-            </a:r>
-          </a:p>
-          <a:p>
-            <a:r>
-              <a:t>localhost:5173 하드코딩 유지. 대신 새 API 경로들(/api/meetings/**, /api/notifications/**, /api/standup/**) 추가된 것만 반영</a:t>
-            </a:r>
-          </a:p>
-          <a:p>
-            <a:r>
-              <a:t>SHA: 2733dd7</a:t>
+              <a:t>작성자: dldnwls07</a:t>
+            </a:r>
+          </a:p>
+          <a:p>
+            <a:r>
+              <a:t>요약: recover commute state drift when backend worklog is reset</a:t>
+            </a:r>
+          </a:p>
+          <a:p>
+            <a:r>
+              <a:t>SHA: 2771b01</a:t>
             </a:r>
           </a:p>
         </p:txBody>
@@ -3423,28 +3421,28 @@
           <a:lstStyle/>
           <a:p>
             <a:r>
-              <a:t>기타 (PR Merge)</a:t>
-            </a:r>
-          </a:p>
-        </p:txBody>
-      </p:sp>
-      <p:sp>
-        <p:nvSpPr>
-          <p:cNvPr id="3" name="Content Placeholder 2"/>
-          <p:cNvSpPr>
-            <a:spLocks noGrp="1"/>
-          </p:cNvSpPr>
-          <p:nvPr>
-            <p:ph idx="1"/>
-          </p:nvPr>
-        </p:nvSpPr>
-        <p:spPr/>
-        <p:txBody>
-          <a:bodyPr/>
-          <a:lstStyle/>
-          <a:p>
-            <a:r>
-              <a:t>날짜: 2026-05-07</a:t>
+              <a:t>기타</a:t>
+            </a:r>
+          </a:p>
+        </p:txBody>
+      </p:sp>
+      <p:sp>
+        <p:nvSpPr>
+          <p:cNvPr id="3" name="Content Placeholder 2"/>
+          <p:cNvSpPr>
+            <a:spLocks noGrp="1"/>
+          </p:cNvSpPr>
+          <p:nvPr>
+            <p:ph idx="1"/>
+          </p:nvPr>
+        </p:nvSpPr>
+        <p:spPr/>
+        <p:txBody>
+          <a:bodyPr/>
+          <a:lstStyle/>
+          <a:p>
+            <a:r>
+              <a:t>날짜: 2026-05-08</a:t>
             </a:r>
           </a:p>
           <a:p>
@@ -3454,23 +3452,23 @@
           </a:p>
           <a:p>
             <a:r>
-              <a:t>요약: Merge pull request #3 from Jongwoo0101/frontend</a:t>
+              <a:t>요약: chore: JWT 만료 시간 연장 및 테스트 API 파일 업데이트</a:t>
             </a:r>
           </a:p>
           <a:p/>
           <a:p>
             <a:r>
-              <a:t>프론트엔드 수정 및 개선 확인 완료</a:t>
-            </a:r>
-          </a:p>
-          <a:p>
-            <a:r>
-              <a:t>백엔드 수정 예정</a:t>
-            </a:r>
-          </a:p>
-          <a:p>
-            <a:r>
-              <a:t>SHA: 943c3ad</a:t>
+              <a:t>- application.yaml: jwt.expiration 24시간으로 변경 (개발 편의)</a:t>
+            </a:r>
+          </a:p>
+          <a:p>
+            <a:r>
+              <a:t>- test-api.http: 초대 코드 플로우, 팀 조회, 에러 케이스 테스트 추가</a:t>
+            </a:r>
+          </a:p>
+          <a:p>
+            <a:r>
+              <a:t>SHA: 734d54c</a:t>
             </a:r>
           </a:p>
         </p:txBody>
@@ -3509,43 +3507,64 @@
           <a:lstStyle/>
           <a:p>
             <a:r>
-              <a:t>버그 수정</a:t>
-            </a:r>
-          </a:p>
-        </p:txBody>
-      </p:sp>
-      <p:sp>
-        <p:nvSpPr>
-          <p:cNvPr id="3" name="Content Placeholder 2"/>
-          <p:cNvSpPr>
-            <a:spLocks noGrp="1"/>
-          </p:cNvSpPr>
-          <p:nvPr>
-            <p:ph idx="1"/>
-          </p:nvPr>
-        </p:nvSpPr>
-        <p:spPr/>
-        <p:txBody>
-          <a:bodyPr/>
-          <a:lstStyle/>
-          <a:p>
-            <a:r>
-              <a:t>날짜: 2026-05-07</a:t>
-            </a:r>
-          </a:p>
-          <a:p>
-            <a:r>
-              <a:t>작성자: dldnwls07</a:t>
-            </a:r>
-          </a:p>
-          <a:p>
-            <a:r>
-              <a:t>요약: merge base branch Jongwoo0101 and resolve conflicts in api.ts and authStore.ts</a:t>
-            </a:r>
-          </a:p>
-          <a:p>
-            <a:r>
-              <a:t>SHA: 674461b</a:t>
+              <a:t>기타 (PR Merge)</a:t>
+            </a:r>
+          </a:p>
+        </p:txBody>
+      </p:sp>
+      <p:sp>
+        <p:nvSpPr>
+          <p:cNvPr id="3" name="Content Placeholder 2"/>
+          <p:cNvSpPr>
+            <a:spLocks noGrp="1"/>
+          </p:cNvSpPr>
+          <p:nvPr>
+            <p:ph idx="1"/>
+          </p:nvPr>
+        </p:nvSpPr>
+        <p:spPr/>
+        <p:txBody>
+          <a:bodyPr/>
+          <a:lstStyle/>
+          <a:p>
+            <a:r>
+              <a:t>날짜: 2026-05-08</a:t>
+            </a:r>
+          </a:p>
+          <a:p>
+            <a:r>
+              <a:t>작성자: 원종우</a:t>
+            </a:r>
+          </a:p>
+          <a:p>
+            <a:r>
+              <a:t>요약: Merge pull request #4 from Jongwoo0101/frontend</a:t>
+            </a:r>
+          </a:p>
+          <a:p/>
+          <a:p>
+            <a:r>
+              <a:t>아래 3개 모두 완료</a:t>
+            </a:r>
+          </a:p>
+          <a:p>
+            <a:r>
+              <a:t>POST /api/teams : 실제 팀(Team) 테이블 Entity 생성</a:t>
+            </a:r>
+          </a:p>
+          <a:p>
+            <a:r>
+              <a:t>GET /api/teams/my-team : 직원이 로그인 시 자신이 소속된 팀 조회</a:t>
+            </a:r>
+          </a:p>
+          <a:p>
+            <a:r>
+              <a:t>GET /api/teams/{id}/members : 관리자가 자신의 팀에 소속된 직원 목록 조회</a:t>
+            </a:r>
+          </a:p>
+          <a:p>
+            <a:r>
+              <a:t>SHA: d4e9af5</a:t>
             </a:r>
           </a:p>
         </p:txBody>
@@ -3584,7 +3603,7 @@
           <a:lstStyle/>
           <a:p>
             <a:r>
-              <a:t>기타</a:t>
+              <a:t>기능 개발</a:t>
             </a:r>
           </a:p>
         </p:txBody>
@@ -3615,12 +3634,33 @@
           </a:p>
           <a:p>
             <a:r>
-              <a:t>요약: 지원페이지 이메일변경</a:t>
-            </a:r>
-          </a:p>
-          <a:p>
-            <a:r>
-              <a:t>SHA: e25fbfa</a:t>
+              <a:t>요약: 초대 코드 기반 직원 추가 시스템 구현 및 UI 개선</a:t>
+            </a:r>
+          </a:p>
+          <a:p/>
+          <a:p>
+            <a:r>
+              <a:t>- 직원 초대 코드를 생성하고 5분 후 자동 만료되는 타이머 기능 추가</a:t>
+            </a:r>
+          </a:p>
+          <a:p>
+            <a:r>
+              <a:t>- 관리자가 초대 코드를 입력하여 팀원을 추가하는 모달 UI 구현</a:t>
+            </a:r>
+          </a:p>
+          <a:p>
+            <a:r>
+              <a:t>- API 에러 핸들링 강화 (백엔드 미구현 시 사용자 친화적 메시지 출력)</a:t>
+            </a:r>
+          </a:p>
+          <a:p>
+            <a:r>
+              <a:t>- 초대 코드 수동 취소 기능 추가</a:t>
+            </a:r>
+          </a:p>
+          <a:p>
+            <a:r>
+              <a:t>SHA: aecb64a</a:t>
             </a:r>
           </a:p>
         </p:txBody>
@@ -3690,33 +3730,12 @@
           </a:p>
           <a:p>
             <a:r>
-              <a:t>요약: 초대 코드 기반 직원 추가 시스템 구현 및 UI 개선</a:t>
-            </a:r>
-          </a:p>
-          <a:p/>
-          <a:p>
-            <a:r>
-              <a:t>- 직원 초대 코드를 생성하고 5분 후 자동 만료되는 타이머 기능 추가</a:t>
-            </a:r>
-          </a:p>
-          <a:p>
-            <a:r>
-              <a:t>- 관리자가 초대 코드를 입력하여 팀원을 추가하는 모달 UI 구현</a:t>
-            </a:r>
-          </a:p>
-          <a:p>
-            <a:r>
-              <a:t>- API 에러 핸들링 강화 (백엔드 미구현 시 사용자 친화적 메시지 출력)</a:t>
-            </a:r>
-          </a:p>
-          <a:p>
-            <a:r>
-              <a:t>- 초대 코드 수동 취소 기능 추가</a:t>
-            </a:r>
-          </a:p>
-          <a:p>
-            <a:r>
-              <a:t>SHA: aecb64a</a:t>
+              <a:t>요약: frontend CSS refactoring, JWT integration, and sync backend updates</a:t>
+            </a:r>
+          </a:p>
+          <a:p>
+            <a:r>
+              <a:t>SHA: 00ad585</a:t>
             </a:r>
           </a:p>
         </p:txBody>
@@ -3755,7 +3774,7 @@
           <a:lstStyle/>
           <a:p>
             <a:r>
-              <a:t>구조 개선</a:t>
+              <a:t>기능 개발</a:t>
             </a:r>
           </a:p>
         </p:txBody>
@@ -3786,12 +3805,12 @@
           </a:p>
           <a:p>
             <a:r>
-              <a:t>요약: decompose monolithic dashboard components and centralize websocket logic</a:t>
-            </a:r>
-          </a:p>
-          <a:p>
-            <a:r>
-              <a:t>SHA: 4aef356</a:t>
+              <a:t>요약: modularize pages, add checkout flow, and eliminate inline styles</a:t>
+            </a:r>
+          </a:p>
+          <a:p>
+            <a:r>
+              <a:t>SHA: fb9f55a</a:t>
             </a:r>
           </a:p>
         </p:txBody>
@@ -3830,7 +3849,7 @@
           <a:lstStyle/>
           <a:p>
             <a:r>
-              <a:t>기능 개발</a:t>
+              <a:t>구조 개선</a:t>
             </a:r>
           </a:p>
         </p:txBody>
@@ -3861,12 +3880,12 @@
           </a:p>
           <a:p>
             <a:r>
-              <a:t>요약: modularize pages, add checkout flow, and eliminate inline styles</a:t>
-            </a:r>
-          </a:p>
-          <a:p>
-            <a:r>
-              <a:t>SHA: fb9f55a</a:t>
+              <a:t>요약: decompose monolithic dashboard components and centralize websocket logic</a:t>
+            </a:r>
+          </a:p>
+          <a:p>
+            <a:r>
+              <a:t>SHA: 4aef356</a:t>
             </a:r>
           </a:p>
         </p:txBody>
@@ -3936,12 +3955,48 @@
           </a:p>
           <a:p>
             <a:r>
-              <a:t>요약: frontend CSS refactoring, JWT integration, and sync backend updates</a:t>
-            </a:r>
-          </a:p>
-          <a:p>
-            <a:r>
-              <a:t>SHA: 00ad585</a:t>
+              <a:t>요약: 팀 기반 관리 시스템 구현 및 사파리 호환성 개선</a:t>
+            </a:r>
+          </a:p>
+          <a:p/>
+          <a:p>
+            <a:r>
+              <a:t>- 관리자가 팀을 생성하고 초대 코드를 발급하는 기능 추가</a:t>
+            </a:r>
+          </a:p>
+          <a:p>
+            <a:r>
+              <a:t>- 직원이 코드를 입력하여 팀에 합류하는 기능 추가</a:t>
+            </a:r>
+          </a:p>
+          <a:p>
+            <a:r>
+              <a:t>- 팀별 모니터링 대시보드 구조 설계 (URL 파라미터 기반)</a:t>
+            </a:r>
+          </a:p>
+          <a:p>
+            <a:r>
+              <a:t>- Safari 브라우저에서 fetch/JSON 패턴 에러 해결</a:t>
+            </a:r>
+          </a:p>
+          <a:p>
+            <a:r>
+              <a:t>- 백엔드 응답 필드명(accessToken, virtualBalance) 동기화</a:t>
+            </a:r>
+          </a:p>
+          <a:p>
+            <a:r>
+              <a:t>- zustand와 localStorage를 이용한 오프라인 폴백 시스템 구축</a:t>
+            </a:r>
+          </a:p>
+          <a:p>
+            <a:r>
+              <a:t>- 미사용 InviteEmployeeModal 삭제</a:t>
+            </a:r>
+          </a:p>
+          <a:p>
+            <a:r>
+              <a:t>SHA: 055aa6f</a:t>
             </a:r>
           </a:p>
         </p:txBody>
@@ -3980,54 +4035,43 @@
           <a:lstStyle/>
           <a:p>
             <a:r>
-              <a:t>구조 개선</a:t>
-            </a:r>
-          </a:p>
-        </p:txBody>
-      </p:sp>
-      <p:sp>
-        <p:nvSpPr>
-          <p:cNvPr id="3" name="Content Placeholder 2"/>
-          <p:cNvSpPr>
-            <a:spLocks noGrp="1"/>
-          </p:cNvSpPr>
-          <p:nvPr>
-            <p:ph idx="1"/>
-          </p:nvPr>
-        </p:nvSpPr>
-        <p:spPr/>
-        <p:txBody>
-          <a:bodyPr/>
-          <a:lstStyle/>
-          <a:p>
-            <a:r>
-              <a:t>날짜: 2026-05-06</a:t>
-            </a:r>
-          </a:p>
-          <a:p>
-            <a:r>
-              <a:t>작성자: 원종우</a:t>
-            </a:r>
-          </a:p>
-          <a:p>
-            <a:r>
-              <a:t>요약: refactor(security): 인증 필터를 userId 기반으로 변경</a:t>
-            </a:r>
-          </a:p>
-          <a:p/>
-          <a:p>
-            <a:r>
-              <a:t>- JwtAuthenticationFilter: access token 타입 검증 추가, userId 기반 인증으로 변경</a:t>
-            </a:r>
-          </a:p>
-          <a:p>
-            <a:r>
-              <a:t>- CustomUserDetailsService: username 조회에서 id 조회로 변경</a:t>
-            </a:r>
-          </a:p>
-          <a:p>
-            <a:r>
-              <a:t>SHA: ea5a092</a:t>
+              <a:t>기타</a:t>
+            </a:r>
+          </a:p>
+        </p:txBody>
+      </p:sp>
+      <p:sp>
+        <p:nvSpPr>
+          <p:cNvPr id="3" name="Content Placeholder 2"/>
+          <p:cNvSpPr>
+            <a:spLocks noGrp="1"/>
+          </p:cNvSpPr>
+          <p:nvPr>
+            <p:ph idx="1"/>
+          </p:nvPr>
+        </p:nvSpPr>
+        <p:spPr/>
+        <p:txBody>
+          <a:bodyPr/>
+          <a:lstStyle/>
+          <a:p>
+            <a:r>
+              <a:t>날짜: 2026-05-07</a:t>
+            </a:r>
+          </a:p>
+          <a:p>
+            <a:r>
+              <a:t>작성자: dldnwls07</a:t>
+            </a:r>
+          </a:p>
+          <a:p>
+            <a:r>
+              <a:t>요약: 지원페이지 이메일변경</a:t>
+            </a:r>
+          </a:p>
+          <a:p>
+            <a:r>
+              <a:t>SHA: e25fbfa</a:t>
             </a:r>
           </a:p>
         </p:txBody>
@@ -4066,64 +4110,43 @@
           <a:lstStyle/>
           <a:p>
             <a:r>
-              <a:t>기능 개발</a:t>
-            </a:r>
-          </a:p>
-        </p:txBody>
-      </p:sp>
-      <p:sp>
-        <p:nvSpPr>
-          <p:cNvPr id="3" name="Content Placeholder 2"/>
-          <p:cNvSpPr>
-            <a:spLocks noGrp="1"/>
-          </p:cNvSpPr>
-          <p:nvPr>
-            <p:ph idx="1"/>
-          </p:nvPr>
-        </p:nvSpPr>
-        <p:spPr/>
-        <p:txBody>
-          <a:bodyPr/>
-          <a:lstStyle/>
-          <a:p>
-            <a:r>
-              <a:t>날짜: 2026-05-06</a:t>
-            </a:r>
-          </a:p>
-          <a:p>
-            <a:r>
-              <a:t>작성자: 원종우</a:t>
-            </a:r>
-          </a:p>
-          <a:p>
-            <a:r>
-              <a:t>요약: feat(member): 로그인 응답에 refresh token 추가 및 재발급 엔드포인트 구현</a:t>
-            </a:r>
-          </a:p>
-          <a:p/>
-          <a:p>
-            <a:r>
-              <a:t>- MemberDto: LoginResponse에 accessToken/refreshToken 분리, ReissueRequest 추가</a:t>
-            </a:r>
-          </a:p>
-          <a:p>
-            <a:r>
-              <a:t>- MemberService: 로그인 시 refresh token 발급 및 저장, reissue() 추가</a:t>
-            </a:r>
-          </a:p>
-          <a:p>
-            <a:r>
-              <a:t>- MemberController: POST /api/members/reissue 추가</a:t>
-            </a:r>
-          </a:p>
-          <a:p>
-            <a:r>
-              <a:t>- SecurityConfig: /api/members/reissue permitAll 추가</a:t>
-            </a:r>
-          </a:p>
-          <a:p>
-            <a:r>
-              <a:t>SHA: 82ca026</a:t>
+              <a:t>버그 수정</a:t>
+            </a:r>
+          </a:p>
+        </p:txBody>
+      </p:sp>
+      <p:sp>
+        <p:nvSpPr>
+          <p:cNvPr id="3" name="Content Placeholder 2"/>
+          <p:cNvSpPr>
+            <a:spLocks noGrp="1"/>
+          </p:cNvSpPr>
+          <p:nvPr>
+            <p:ph idx="1"/>
+          </p:nvPr>
+        </p:nvSpPr>
+        <p:spPr/>
+        <p:txBody>
+          <a:bodyPr/>
+          <a:lstStyle/>
+          <a:p>
+            <a:r>
+              <a:t>날짜: 2026-05-07</a:t>
+            </a:r>
+          </a:p>
+          <a:p>
+            <a:r>
+              <a:t>작성자: dldnwls07</a:t>
+            </a:r>
+          </a:p>
+          <a:p>
+            <a:r>
+              <a:t>요약: merge base branch Jongwoo0101 and resolve conflicts in api.ts and authStore.ts</a:t>
+            </a:r>
+          </a:p>
+          <a:p>
+            <a:r>
+              <a:t>SHA: 674461b</a:t>
             </a:r>
           </a:p>
         </p:txBody>
@@ -4162,28 +4185,28 @@
           <a:lstStyle/>
           <a:p>
             <a:r>
-              <a:t>기능 개발</a:t>
-            </a:r>
-          </a:p>
-        </p:txBody>
-      </p:sp>
-      <p:sp>
-        <p:nvSpPr>
-          <p:cNvPr id="3" name="Content Placeholder 2"/>
-          <p:cNvSpPr>
-            <a:spLocks noGrp="1"/>
-          </p:cNvSpPr>
-          <p:nvPr>
-            <p:ph idx="1"/>
-          </p:nvPr>
-        </p:nvSpPr>
-        <p:spPr/>
-        <p:txBody>
-          <a:bodyPr/>
-          <a:lstStyle/>
-          <a:p>
-            <a:r>
-              <a:t>날짜: 2026-05-06</a:t>
+              <a:t>기타 (PR Merge)</a:t>
+            </a:r>
+          </a:p>
+        </p:txBody>
+      </p:sp>
+      <p:sp>
+        <p:nvSpPr>
+          <p:cNvPr id="3" name="Content Placeholder 2"/>
+          <p:cNvSpPr>
+            <a:spLocks noGrp="1"/>
+          </p:cNvSpPr>
+          <p:nvPr>
+            <p:ph idx="1"/>
+          </p:nvPr>
+        </p:nvSpPr>
+        <p:spPr/>
+        <p:txBody>
+          <a:bodyPr/>
+          <a:lstStyle/>
+          <a:p>
+            <a:r>
+              <a:t>날짜: 2026-05-07</a:t>
             </a:r>
           </a:p>
           <a:p>
@@ -4193,28 +4216,23 @@
           </a:p>
           <a:p>
             <a:r>
-              <a:t>요약: feat(auth): refresh token DB 저장 및 재발급 구현</a:t>
+              <a:t>요약: Merge pull request #3 from Jongwoo0101/frontend</a:t>
             </a:r>
           </a:p>
           <a:p/>
           <a:p>
             <a:r>
-              <a:t>- RefreshToken 엔티티 추가 (memberId, token, expiresAt)</a:t>
-            </a:r>
-          </a:p>
-          <a:p>
-            <a:r>
-              <a:t>- RefreshTokenRepository 추가</a:t>
-            </a:r>
-          </a:p>
-          <a:p>
-            <a:r>
-              <a:t>- RefreshTokenService 추가 (저장/검증/rotate/삭제)</a:t>
-            </a:r>
-          </a:p>
-          <a:p>
-            <a:r>
-              <a:t>SHA: fd3fc85</a:t>
+              <a:t>프론트엔드 수정 및 개선 확인 완료</a:t>
+            </a:r>
+          </a:p>
+          <a:p>
+            <a:r>
+              <a:t>백엔드 수정 예정</a:t>
+            </a:r>
+          </a:p>
+          <a:p>
+            <a:r>
+              <a:t>SHA: 943c3ad</a:t>
             </a:r>
           </a:p>
         </p:txBody>
@@ -4253,28 +4271,28 @@
           <a:lstStyle/>
           <a:p>
             <a:r>
-              <a:t>구조 개선</a:t>
-            </a:r>
-          </a:p>
-        </p:txBody>
-      </p:sp>
-      <p:sp>
-        <p:nvSpPr>
-          <p:cNvPr id="3" name="Content Placeholder 2"/>
-          <p:cNvSpPr>
-            <a:spLocks noGrp="1"/>
-          </p:cNvSpPr>
-          <p:nvPr>
-            <p:ph idx="1"/>
-          </p:nvPr>
-        </p:nvSpPr>
-        <p:spPr/>
-        <p:txBody>
-          <a:bodyPr/>
-          <a:lstStyle/>
-          <a:p>
-            <a:r>
-              <a:t>날짜: 2026-05-22</a:t>
+              <a:t>기능 개발</a:t>
+            </a:r>
+          </a:p>
+        </p:txBody>
+      </p:sp>
+      <p:sp>
+        <p:nvSpPr>
+          <p:cNvPr id="3" name="Content Placeholder 2"/>
+          <p:cNvSpPr>
+            <a:spLocks noGrp="1"/>
+          </p:cNvSpPr>
+          <p:nvPr>
+            <p:ph idx="1"/>
+          </p:nvPr>
+        </p:nvSpPr>
+        <p:spPr/>
+        <p:txBody>
+          <a:bodyPr/>
+          <a:lstStyle/>
+          <a:p>
+            <a:r>
+              <a:t>날짜: 2026-05-23</a:t>
             </a:r>
           </a:p>
           <a:p>
@@ -4284,38 +4302,12 @@
           </a:p>
           <a:p>
             <a:r>
-              <a:t>요약: resolve frontend spec issues and fix shared state bug</a:t>
-            </a:r>
-          </a:p>
-          <a:p/>
-          <a:p>
-            <a:r>
-              <a:t>- Segregated Zustand commute store context per employee (fixed shared session bug)</a:t>
-            </a:r>
-          </a:p>
-          <a:p>
-            <a:r>
-              <a:t>- Standardized WebSocket message handling with WS envelope parser</a:t>
-            </a:r>
-          </a:p>
-          <a:p>
-            <a:r>
-              <a:t>- Unified time data sorting with epoch milliseconds</a:t>
-            </a:r>
-          </a:p>
-          <a:p>
-            <a:r>
-              <a:t>- Removed 'any' types for stronger type safety</a:t>
-            </a:r>
-          </a:p>
-          <a:p>
-            <a:r>
-              <a:t>- Separated router pages and content view files</a:t>
-            </a:r>
-          </a:p>
-          <a:p>
-            <a:r>
-              <a:t>SHA: 10b1c19</a:t>
+              <a:t>요약: include participantId in meeting notifications and refactor team store selectors for improved reactivity</a:t>
+            </a:r>
+          </a:p>
+          <a:p>
+            <a:r>
+              <a:t>SHA: ffd89bd</a:t>
             </a:r>
           </a:p>
         </p:txBody>
@@ -4354,7 +4346,7 @@
           <a:lstStyle/>
           <a:p>
             <a:r>
-              <a:t>구조 개선</a:t>
+              <a:t>기능 개발</a:t>
             </a:r>
           </a:p>
         </p:txBody>
@@ -4385,38 +4377,28 @@
           </a:p>
           <a:p>
             <a:r>
-              <a:t>요약: refactor(jwt): access/refresh 토큰 분리 및 subject를 userId로 변경</a:t>
+              <a:t>요약: feat(auth): refresh token DB 저장 및 재발급 구현</a:t>
             </a:r>
           </a:p>
           <a:p/>
           <a:p>
             <a:r>
-              <a:t>- JwtProvider: generateAccessToken/generateRefreshToken 분리</a:t>
-            </a:r>
-          </a:p>
-          <a:p>
-            <a:r>
-              <a:t>- subject를 username에서 userId(Long)로 변경</a:t>
-            </a:r>
-          </a:p>
-          <a:p>
-            <a:r>
-              <a:t>- roles를 List 구조로 변경</a:t>
-            </a:r>
-          </a:p>
-          <a:p>
-            <a:r>
-              <a:t>- secret key 최소 길이(32바이트) 검증 추가</a:t>
-            </a:r>
-          </a:p>
-          <a:p>
-            <a:r>
-              <a:t>- token type(access/refresh) claim 추가</a:t>
-            </a:r>
-          </a:p>
-          <a:p>
-            <a:r>
-              <a:t>SHA: be160f1</a:t>
+              <a:t>- RefreshToken 엔티티 추가 (memberId, token, expiresAt)</a:t>
+            </a:r>
+          </a:p>
+          <a:p>
+            <a:r>
+              <a:t>- RefreshTokenRepository 추가</a:t>
+            </a:r>
+          </a:p>
+          <a:p>
+            <a:r>
+              <a:t>- RefreshTokenService 추가 (저장/검증/rotate/삭제)</a:t>
+            </a:r>
+          </a:p>
+          <a:p>
+            <a:r>
+              <a:t>SHA: fd3fc85</a:t>
             </a:r>
           </a:p>
         </p:txBody>
@@ -4455,28 +4437,28 @@
           <a:lstStyle/>
           <a:p>
             <a:r>
-              <a:t>기타</a:t>
-            </a:r>
-          </a:p>
-        </p:txBody>
-      </p:sp>
-      <p:sp>
-        <p:nvSpPr>
-          <p:cNvPr id="3" name="Content Placeholder 2"/>
-          <p:cNvSpPr>
-            <a:spLocks noGrp="1"/>
-          </p:cNvSpPr>
-          <p:nvPr>
-            <p:ph idx="1"/>
-          </p:nvPr>
-        </p:nvSpPr>
-        <p:spPr/>
-        <p:txBody>
-          <a:bodyPr/>
-          <a:lstStyle/>
-          <a:p>
-            <a:r>
-              <a:t>날짜: 2026-05-04</a:t>
+              <a:t>구조 개선</a:t>
+            </a:r>
+          </a:p>
+        </p:txBody>
+      </p:sp>
+      <p:sp>
+        <p:nvSpPr>
+          <p:cNvPr id="3" name="Content Placeholder 2"/>
+          <p:cNvSpPr>
+            <a:spLocks noGrp="1"/>
+          </p:cNvSpPr>
+          <p:nvPr>
+            <p:ph idx="1"/>
+          </p:nvPr>
+        </p:nvSpPr>
+        <p:spPr/>
+        <p:txBody>
+          <a:bodyPr/>
+          <a:lstStyle/>
+          <a:p>
+            <a:r>
+              <a:t>날짜: 2026-05-06</a:t>
             </a:r>
           </a:p>
           <a:p>
@@ -4486,12 +4468,38 @@
           </a:p>
           <a:p>
             <a:r>
-              <a:t>요약: chore: 향후 개선 방향 작성</a:t>
-            </a:r>
-          </a:p>
-          <a:p>
-            <a:r>
-              <a:t>SHA: 4a418f5</a:t>
+              <a:t>요약: refactor(jwt): access/refresh 토큰 분리 및 subject를 userId로 변경</a:t>
+            </a:r>
+          </a:p>
+          <a:p/>
+          <a:p>
+            <a:r>
+              <a:t>- JwtProvider: generateAccessToken/generateRefreshToken 분리</a:t>
+            </a:r>
+          </a:p>
+          <a:p>
+            <a:r>
+              <a:t>- subject를 username에서 userId(Long)로 변경</a:t>
+            </a:r>
+          </a:p>
+          <a:p>
+            <a:r>
+              <a:t>- roles를 List 구조로 변경</a:t>
+            </a:r>
+          </a:p>
+          <a:p>
+            <a:r>
+              <a:t>- secret key 최소 길이(32바이트) 검증 추가</a:t>
+            </a:r>
+          </a:p>
+          <a:p>
+            <a:r>
+              <a:t>- token type(access/refresh) claim 추가</a:t>
+            </a:r>
+          </a:p>
+          <a:p>
+            <a:r>
+              <a:t>SHA: be160f1</a:t>
             </a:r>
           </a:p>
         </p:txBody>
@@ -4530,28 +4538,28 @@
           <a:lstStyle/>
           <a:p>
             <a:r>
-              <a:t>기타</a:t>
-            </a:r>
-          </a:p>
-        </p:txBody>
-      </p:sp>
-      <p:sp>
-        <p:nvSpPr>
-          <p:cNvPr id="3" name="Content Placeholder 2"/>
-          <p:cNvSpPr>
-            <a:spLocks noGrp="1"/>
-          </p:cNvSpPr>
-          <p:nvPr>
-            <p:ph idx="1"/>
-          </p:nvPr>
-        </p:nvSpPr>
-        <p:spPr/>
-        <p:txBody>
-          <a:bodyPr/>
-          <a:lstStyle/>
-          <a:p>
-            <a:r>
-              <a:t>날짜: 2026-05-04</a:t>
+              <a:t>구조 개선</a:t>
+            </a:r>
+          </a:p>
+        </p:txBody>
+      </p:sp>
+      <p:sp>
+        <p:nvSpPr>
+          <p:cNvPr id="3" name="Content Placeholder 2"/>
+          <p:cNvSpPr>
+            <a:spLocks noGrp="1"/>
+          </p:cNvSpPr>
+          <p:nvPr>
+            <p:ph idx="1"/>
+          </p:nvPr>
+        </p:nvSpPr>
+        <p:spPr/>
+        <p:txBody>
+          <a:bodyPr/>
+          <a:lstStyle/>
+          <a:p>
+            <a:r>
+              <a:t>날짜: 2026-05-06</a:t>
             </a:r>
           </a:p>
           <a:p>
@@ -4561,12 +4569,23 @@
           </a:p>
           <a:p>
             <a:r>
-              <a:t>요약: chore: api test 파일 수정</a:t>
-            </a:r>
-          </a:p>
-          <a:p>
-            <a:r>
-              <a:t>SHA: dd54bf6</a:t>
+              <a:t>요약: refactor(security): 인증 필터를 userId 기반으로 변경</a:t>
+            </a:r>
+          </a:p>
+          <a:p/>
+          <a:p>
+            <a:r>
+              <a:t>- JwtAuthenticationFilter: access token 타입 검증 추가, userId 기반 인증으로 변경</a:t>
+            </a:r>
+          </a:p>
+          <a:p>
+            <a:r>
+              <a:t>- CustomUserDetailsService: username 조회에서 id 조회로 변경</a:t>
+            </a:r>
+          </a:p>
+          <a:p>
+            <a:r>
+              <a:t>SHA: ea5a092</a:t>
             </a:r>
           </a:p>
         </p:txBody>
@@ -4605,28 +4624,28 @@
           <a:lstStyle/>
           <a:p>
             <a:r>
-              <a:t>문서 작업</a:t>
-            </a:r>
-          </a:p>
-        </p:txBody>
-      </p:sp>
-      <p:sp>
-        <p:nvSpPr>
-          <p:cNvPr id="3" name="Content Placeholder 2"/>
-          <p:cNvSpPr>
-            <a:spLocks noGrp="1"/>
-          </p:cNvSpPr>
-          <p:nvPr>
-            <p:ph idx="1"/>
-          </p:nvPr>
-        </p:nvSpPr>
-        <p:spPr/>
-        <p:txBody>
-          <a:bodyPr/>
-          <a:lstStyle/>
-          <a:p>
-            <a:r>
-              <a:t>날짜: 2026-05-04</a:t>
+              <a:t>기능 개발</a:t>
+            </a:r>
+          </a:p>
+        </p:txBody>
+      </p:sp>
+      <p:sp>
+        <p:nvSpPr>
+          <p:cNvPr id="3" name="Content Placeholder 2"/>
+          <p:cNvSpPr>
+            <a:spLocks noGrp="1"/>
+          </p:cNvSpPr>
+          <p:nvPr>
+            <p:ph idx="1"/>
+          </p:nvPr>
+        </p:nvSpPr>
+        <p:spPr/>
+        <p:txBody>
+          <a:bodyPr/>
+          <a:lstStyle/>
+          <a:p>
+            <a:r>
+              <a:t>날짜: 2026-05-06</a:t>
             </a:r>
           </a:p>
           <a:p>
@@ -4636,12 +4655,33 @@
           </a:p>
           <a:p>
             <a:r>
-              <a:t>요약: api 명세서 수정</a:t>
-            </a:r>
-          </a:p>
-          <a:p>
-            <a:r>
-              <a:t>SHA: af5248e</a:t>
+              <a:t>요약: feat(member): 로그인 응답에 refresh token 추가 및 재발급 엔드포인트 구현</a:t>
+            </a:r>
+          </a:p>
+          <a:p/>
+          <a:p>
+            <a:r>
+              <a:t>- MemberDto: LoginResponse에 accessToken/refreshToken 분리, ReissueRequest 추가</a:t>
+            </a:r>
+          </a:p>
+          <a:p>
+            <a:r>
+              <a:t>- MemberService: 로그인 시 refresh token 발급 및 저장, reissue() 추가</a:t>
+            </a:r>
+          </a:p>
+          <a:p>
+            <a:r>
+              <a:t>- MemberController: POST /api/members/reissue 추가</a:t>
+            </a:r>
+          </a:p>
+          <a:p>
+            <a:r>
+              <a:t>- SecurityConfig: /api/members/reissue permitAll 추가</a:t>
+            </a:r>
+          </a:p>
+          <a:p>
+            <a:r>
+              <a:t>SHA: 82ca026</a:t>
             </a:r>
           </a:p>
         </p:txBody>
@@ -4711,17 +4751,12 @@
           </a:p>
           <a:p>
             <a:r>
-              <a:t>요약: chore: jwt access token 유효기간 관련 자잘한 수정</a:t>
-            </a:r>
-          </a:p>
-          <a:p>
-            <a:r>
-              <a:t>24시간 -&gt; 30분</a:t>
-            </a:r>
-          </a:p>
-          <a:p>
-            <a:r>
-              <a:t>SHA: 7f010bf</a:t>
+              <a:t>요약: chore: 향후 개선 방향 작성</a:t>
+            </a:r>
+          </a:p>
+          <a:p>
+            <a:r>
+              <a:t>SHA: 4a418f5</a:t>
             </a:r>
           </a:p>
         </p:txBody>
@@ -4760,7 +4795,7 @@
           <a:lstStyle/>
           <a:p>
             <a:r>
-              <a:t>기능 개발</a:t>
+              <a:t>기타</a:t>
             </a:r>
           </a:p>
         </p:txBody>
@@ -4791,73 +4826,12 @@
           </a:p>
           <a:p>
             <a:r>
-              <a:t>요약: JWT 기반 회원 인증 시스템 구현</a:t>
-            </a:r>
-          </a:p>
-          <a:p/>
-          <a:p>
-            <a:r>
-              <a:t>- JwtProvider: 토큰 생성, 유효성 검증, 파싱 로직 추가</a:t>
-            </a:r>
-          </a:p>
-          <a:p>
-            <a:r>
-              <a:t>- JwtAuthenticationFilter: 요청마다 Bearer 토큰 검증 및 SecurityContext 등록</a:t>
-            </a:r>
-          </a:p>
-          <a:p>
-            <a:r>
-              <a:t>- CustomUserDetailsService: DB 기반 UserDetailsService 구현체 추가</a:t>
-            </a:r>
-          </a:p>
-          <a:p>
-            <a:r>
-              <a:t>- Member: UserDetails 인터페이스 구현</a:t>
-            </a:r>
-          </a:p>
-          <a:p>
-            <a:r>
-              <a:t>- SecurityConfig: JWT 필터 등록 및 InMemoryUserDetailsManager 제거</a:t>
-            </a:r>
-          </a:p>
-          <a:p>
-            <a:r>
-              <a:t>- MemberDto: LoginResponse 레코드 추가 (token + 유저 정보)</a:t>
-            </a:r>
-          </a:p>
-          <a:p>
-            <a:r>
-              <a:t>- MemberService: login() 반환 타입을 LoginResponse로 변경</a:t>
-            </a:r>
-          </a:p>
-          <a:p>
-            <a:r>
-              <a:t>- MemberController: login() 응답을 LoginResponse로 변경</a:t>
-            </a:r>
-          </a:p>
-          <a:p>
-            <a:r>
-              <a:t>- build.gradle: jjwt 의존성 추가 (0.12.6)</a:t>
-            </a:r>
-          </a:p>
-          <a:p>
-            <a:r>
-              <a:t>- application.yaml: jwt.secret, jwt.expiration 설정 추가</a:t>
-            </a:r>
-          </a:p>
-          <a:p>
-            <a:r>
-              <a:t>- api.ts: login() 반환 타입 LoginResponse로 변경</a:t>
-            </a:r>
-          </a:p>
-          <a:p>
-            <a:r>
-              <a:t>- authStore.ts: 토큰 localStorage 저장 및 virtualBalance 필드 수정</a:t>
-            </a:r>
-          </a:p>
-          <a:p>
-            <a:r>
-              <a:t>SHA: 1829dfa</a:t>
+              <a:t>요약: chore: api test 파일 수정</a:t>
+            </a:r>
+          </a:p>
+          <a:p>
+            <a:r>
+              <a:t>SHA: dd54bf6</a:t>
             </a:r>
           </a:p>
         </p:txBody>
@@ -4896,7 +4870,7 @@
           <a:lstStyle/>
           <a:p>
             <a:r>
-              <a:t>기능 개발</a:t>
+              <a:t>문서 작업</a:t>
             </a:r>
           </a:p>
         </p:txBody>
@@ -4927,12 +4901,12 @@
           </a:p>
           <a:p>
             <a:r>
-              <a:t>요약: feat(DB관련): 테이블 생성 시 소문자로 생성되는 이슈 수정.</a:t>
-            </a:r>
-          </a:p>
-          <a:p>
-            <a:r>
-              <a:t>SHA: 61835d9</a:t>
+              <a:t>요약: api 명세서 수정</a:t>
+            </a:r>
+          </a:p>
+          <a:p>
+            <a:r>
+              <a:t>SHA: af5248e</a:t>
             </a:r>
           </a:p>
         </p:txBody>
@@ -4992,7 +4966,7 @@
           <a:lstStyle/>
           <a:p>
             <a:r>
-              <a:t>날짜: 2026-05-02</a:t>
+              <a:t>날짜: 2026-05-04</a:t>
             </a:r>
           </a:p>
           <a:p>
@@ -5002,12 +4976,17 @@
           </a:p>
           <a:p>
             <a:r>
-              <a:t>요약: chore: plan.txt -&gt; md 로 변경</a:t>
-            </a:r>
-          </a:p>
-          <a:p>
-            <a:r>
-              <a:t>SHA: aea2703</a:t>
+              <a:t>요약: chore: jwt access token 유효기간 관련 자잘한 수정</a:t>
+            </a:r>
+          </a:p>
+          <a:p>
+            <a:r>
+              <a:t>24시간 -&gt; 30분</a:t>
+            </a:r>
+          </a:p>
+          <a:p>
+            <a:r>
+              <a:t>SHA: 7f010bf</a:t>
             </a:r>
           </a:p>
         </p:txBody>
@@ -5067,7 +5046,7 @@
           <a:lstStyle/>
           <a:p>
             <a:r>
-              <a:t>날짜: 2026-05-02</a:t>
+              <a:t>날짜: 2026-05-04</a:t>
             </a:r>
           </a:p>
           <a:p>
@@ -5077,48 +5056,73 @@
           </a:p>
           <a:p>
             <a:r>
-              <a:t>요약: feat(security): JWT 도입을 위한 SecurityConfig 개선</a:t>
+              <a:t>요약: JWT 기반 회원 인증 시스템 구현</a:t>
             </a:r>
           </a:p>
           <a:p/>
           <a:p>
             <a:r>
-              <a:t>- CORS 허용 출처를 와일드카드(*)에서 localhost:5173으로 제한</a:t>
-            </a:r>
-          </a:p>
-          <a:p>
-            <a:r>
-              <a:t>- CORS 허용 헤더를 명시적으로 지정 (Authorization, Content-Type, Accept)</a:t>
-            </a:r>
-          </a:p>
-          <a:p>
-            <a:r>
-              <a:t>- SessionCreationPolicy.STATELESS 명시 (JWT Stateless 인증 전제)</a:t>
-            </a:r>
-          </a:p>
-          <a:p>
-            <a:r>
-              <a:t>- 엔드포인트 권한 세분화: 회원가입·로그인 POST만 permitAll, 나머지 authenticated</a:t>
-            </a:r>
-          </a:p>
-          <a:p>
-            <a:r>
-              <a:t>- JWT 필터 연동 위치 주석 추가 (addFilterBefore)</a:t>
-            </a:r>
-          </a:p>
-          <a:p>
-            <a:r>
-              <a:t>- UserDetailsService 교체 예정 주석 추가</a:t>
-            </a:r>
-          </a:p>
-          <a:p>
-            <a:r>
-              <a:t>- 불필요한 InMemoryUserDetailsManager Bean 임시 유지</a:t>
-            </a:r>
-          </a:p>
-          <a:p>
-            <a:r>
-              <a:t>SHA: bdd1cad</a:t>
+              <a:t>- JwtProvider: 토큰 생성, 유효성 검증, 파싱 로직 추가</a:t>
+            </a:r>
+          </a:p>
+          <a:p>
+            <a:r>
+              <a:t>- JwtAuthenticationFilter: 요청마다 Bearer 토큰 검증 및 SecurityContext 등록</a:t>
+            </a:r>
+          </a:p>
+          <a:p>
+            <a:r>
+              <a:t>- CustomUserDetailsService: DB 기반 UserDetailsService 구현체 추가</a:t>
+            </a:r>
+          </a:p>
+          <a:p>
+            <a:r>
+              <a:t>- Member: UserDetails 인터페이스 구현</a:t>
+            </a:r>
+          </a:p>
+          <a:p>
+            <a:r>
+              <a:t>- SecurityConfig: JWT 필터 등록 및 InMemoryUserDetailsManager 제거</a:t>
+            </a:r>
+          </a:p>
+          <a:p>
+            <a:r>
+              <a:t>- MemberDto: LoginResponse 레코드 추가 (token + 유저 정보)</a:t>
+            </a:r>
+          </a:p>
+          <a:p>
+            <a:r>
+              <a:t>- MemberService: login() 반환 타입을 LoginResponse로 변경</a:t>
+            </a:r>
+          </a:p>
+          <a:p>
+            <a:r>
+              <a:t>- MemberController: login() 응답을 LoginResponse로 변경</a:t>
+            </a:r>
+          </a:p>
+          <a:p>
+            <a:r>
+              <a:t>- build.gradle: jjwt 의존성 추가 (0.12.6)</a:t>
+            </a:r>
+          </a:p>
+          <a:p>
+            <a:r>
+              <a:t>- application.yaml: jwt.secret, jwt.expiration 설정 추가</a:t>
+            </a:r>
+          </a:p>
+          <a:p>
+            <a:r>
+              <a:t>- api.ts: login() 반환 타입 LoginResponse로 변경</a:t>
+            </a:r>
+          </a:p>
+          <a:p>
+            <a:r>
+              <a:t>- authStore.ts: 토큰 localStorage 저장 및 virtualBalance 필드 수정</a:t>
+            </a:r>
+          </a:p>
+          <a:p>
+            <a:r>
+              <a:t>SHA: 1829dfa</a:t>
             </a:r>
           </a:p>
         </p:txBody>
@@ -5157,43 +5161,43 @@
           <a:lstStyle/>
           <a:p>
             <a:r>
-              <a:t>기타</a:t>
-            </a:r>
-          </a:p>
-        </p:txBody>
-      </p:sp>
-      <p:sp>
-        <p:nvSpPr>
-          <p:cNvPr id="3" name="Content Placeholder 2"/>
-          <p:cNvSpPr>
-            <a:spLocks noGrp="1"/>
-          </p:cNvSpPr>
-          <p:nvPr>
-            <p:ph idx="1"/>
-          </p:nvPr>
-        </p:nvSpPr>
-        <p:spPr/>
-        <p:txBody>
-          <a:bodyPr/>
-          <a:lstStyle/>
-          <a:p>
-            <a:r>
-              <a:t>날짜: 2026-04-30</a:t>
-            </a:r>
-          </a:p>
-          <a:p>
-            <a:r>
-              <a:t>작성자: dldnwls07</a:t>
-            </a:r>
-          </a:p>
-          <a:p>
-            <a:r>
-              <a:t>요약: chore: backup frontend local changes before backend folder sync</a:t>
-            </a:r>
-          </a:p>
-          <a:p>
-            <a:r>
-              <a:t>SHA: 5b7bb89</a:t>
+              <a:t>기능 개발</a:t>
+            </a:r>
+          </a:p>
+        </p:txBody>
+      </p:sp>
+      <p:sp>
+        <p:nvSpPr>
+          <p:cNvPr id="3" name="Content Placeholder 2"/>
+          <p:cNvSpPr>
+            <a:spLocks noGrp="1"/>
+          </p:cNvSpPr>
+          <p:nvPr>
+            <p:ph idx="1"/>
+          </p:nvPr>
+        </p:nvSpPr>
+        <p:spPr/>
+        <p:txBody>
+          <a:bodyPr/>
+          <a:lstStyle/>
+          <a:p>
+            <a:r>
+              <a:t>날짜: 2026-05-04</a:t>
+            </a:r>
+          </a:p>
+          <a:p>
+            <a:r>
+              <a:t>작성자: 원종우</a:t>
+            </a:r>
+          </a:p>
+          <a:p>
+            <a:r>
+              <a:t>요약: feat(DB관련): 테이블 생성 시 소문자로 생성되는 이슈 수정.</a:t>
+            </a:r>
+          </a:p>
+          <a:p>
+            <a:r>
+              <a:t>SHA: 61835d9</a:t>
             </a:r>
           </a:p>
         </p:txBody>
@@ -5232,43 +5236,43 @@
           <a:lstStyle/>
           <a:p>
             <a:r>
-              <a:t>문서 작업</a:t>
-            </a:r>
-          </a:p>
-        </p:txBody>
-      </p:sp>
-      <p:sp>
-        <p:nvSpPr>
-          <p:cNvPr id="3" name="Content Placeholder 2"/>
-          <p:cNvSpPr>
-            <a:spLocks noGrp="1"/>
-          </p:cNvSpPr>
-          <p:nvPr>
-            <p:ph idx="1"/>
-          </p:nvPr>
-        </p:nvSpPr>
-        <p:spPr/>
-        <p:txBody>
-          <a:bodyPr/>
-          <a:lstStyle/>
-          <a:p>
-            <a:r>
-              <a:t>날짜: 2026-05-22</a:t>
-            </a:r>
-          </a:p>
-          <a:p>
-            <a:r>
-              <a:t>작성자: dldnwls07</a:t>
-            </a:r>
-          </a:p>
-          <a:p>
-            <a:r>
-              <a:t>요약: add audit specification for hardcoding structure mitigation</a:t>
-            </a:r>
-          </a:p>
-          <a:p>
-            <a:r>
-              <a:t>SHA: 46d4465</a:t>
+              <a:t>버그 수정</a:t>
+            </a:r>
+          </a:p>
+        </p:txBody>
+      </p:sp>
+      <p:sp>
+        <p:nvSpPr>
+          <p:cNvPr id="3" name="Content Placeholder 2"/>
+          <p:cNvSpPr>
+            <a:spLocks noGrp="1"/>
+          </p:cNvSpPr>
+          <p:nvPr>
+            <p:ph idx="1"/>
+          </p:nvPr>
+        </p:nvSpPr>
+        <p:spPr/>
+        <p:txBody>
+          <a:bodyPr/>
+          <a:lstStyle/>
+          <a:p>
+            <a:r>
+              <a:t>날짜: 2026-05-23</a:t>
+            </a:r>
+          </a:p>
+          <a:p>
+            <a:r>
+              <a:t>작성자: 원종우</a:t>
+            </a:r>
+          </a:p>
+          <a:p>
+            <a:r>
+              <a:t>요약: 화상회의 방 재입장 시 호스트/참가자 상태 동기화 및 모달 미표시 버그 수정</a:t>
+            </a:r>
+          </a:p>
+          <a:p>
+            <a:r>
+              <a:t>SHA: 9cc00cd</a:t>
             </a:r>
           </a:p>
         </p:txBody>
@@ -5307,28 +5311,28 @@
           <a:lstStyle/>
           <a:p>
             <a:r>
-              <a:t>기타 (PR Merge)</a:t>
-            </a:r>
-          </a:p>
-        </p:txBody>
-      </p:sp>
-      <p:sp>
-        <p:nvSpPr>
-          <p:cNvPr id="3" name="Content Placeholder 2"/>
-          <p:cNvSpPr>
-            <a:spLocks noGrp="1"/>
-          </p:cNvSpPr>
-          <p:nvPr>
-            <p:ph idx="1"/>
-          </p:nvPr>
-        </p:nvSpPr>
-        <p:spPr/>
-        <p:txBody>
-          <a:bodyPr/>
-          <a:lstStyle/>
-          <a:p>
-            <a:r>
-              <a:t>날짜: 2026-04-30</a:t>
+              <a:t>기타</a:t>
+            </a:r>
+          </a:p>
+        </p:txBody>
+      </p:sp>
+      <p:sp>
+        <p:nvSpPr>
+          <p:cNvPr id="3" name="Content Placeholder 2"/>
+          <p:cNvSpPr>
+            <a:spLocks noGrp="1"/>
+          </p:cNvSpPr>
+          <p:nvPr>
+            <p:ph idx="1"/>
+          </p:nvPr>
+        </p:nvSpPr>
+        <p:spPr/>
+        <p:txBody>
+          <a:bodyPr/>
+          <a:lstStyle/>
+          <a:p>
+            <a:r>
+              <a:t>날짜: 2026-05-02</a:t>
             </a:r>
           </a:p>
           <a:p>
@@ -5338,18 +5342,12 @@
           </a:p>
           <a:p>
             <a:r>
-              <a:t>요약: Merge pull request #2 from Jongwoo0101/frontend</a:t>
-            </a:r>
-          </a:p>
-          <a:p/>
-          <a:p>
-            <a:r>
-              <a:t> backend 폴더 동기화 및 프론트엔드 로컬 변경사항 반영</a:t>
-            </a:r>
-          </a:p>
-          <a:p>
-            <a:r>
-              <a:t>SHA: 047870a</a:t>
+              <a:t>요약: chore: plan.txt -&gt; md 로 변경</a:t>
+            </a:r>
+          </a:p>
+          <a:p>
+            <a:r>
+              <a:t>SHA: aea2703</a:t>
             </a:r>
           </a:p>
         </p:txBody>
@@ -5388,49 +5386,79 @@
           <a:lstStyle/>
           <a:p>
             <a:r>
-              <a:t>기타 (PR Merge)</a:t>
-            </a:r>
-          </a:p>
-        </p:txBody>
-      </p:sp>
-      <p:sp>
-        <p:nvSpPr>
-          <p:cNvPr id="3" name="Content Placeholder 2"/>
-          <p:cNvSpPr>
-            <a:spLocks noGrp="1"/>
-          </p:cNvSpPr>
-          <p:nvPr>
-            <p:ph idx="1"/>
-          </p:nvPr>
-        </p:nvSpPr>
-        <p:spPr/>
-        <p:txBody>
-          <a:bodyPr/>
-          <a:lstStyle/>
-          <a:p>
-            <a:r>
-              <a:t>날짜: 2026-04-30</a:t>
-            </a:r>
-          </a:p>
-          <a:p>
-            <a:r>
-              <a:t>작성자: dldnwls07</a:t>
-            </a:r>
-          </a:p>
-          <a:p>
-            <a:r>
-              <a:t>요약: Merge pull request #1 from Jongwoo0101/backend</a:t>
+              <a:t>기능 개발</a:t>
+            </a:r>
+          </a:p>
+        </p:txBody>
+      </p:sp>
+      <p:sp>
+        <p:nvSpPr>
+          <p:cNvPr id="3" name="Content Placeholder 2"/>
+          <p:cNvSpPr>
+            <a:spLocks noGrp="1"/>
+          </p:cNvSpPr>
+          <p:nvPr>
+            <p:ph idx="1"/>
+          </p:nvPr>
+        </p:nvSpPr>
+        <p:spPr/>
+        <p:txBody>
+          <a:bodyPr/>
+          <a:lstStyle/>
+          <a:p>
+            <a:r>
+              <a:t>날짜: 2026-05-02</a:t>
+            </a:r>
+          </a:p>
+          <a:p>
+            <a:r>
+              <a:t>작성자: 원종우</a:t>
+            </a:r>
+          </a:p>
+          <a:p>
+            <a:r>
+              <a:t>요약: feat(security): JWT 도입을 위한 SecurityConfig 개선</a:t>
             </a:r>
           </a:p>
           <a:p/>
           <a:p>
             <a:r>
-              <a:t>Backend 설계, 구현 완료</a:t>
-            </a:r>
-          </a:p>
-          <a:p>
-            <a:r>
-              <a:t>SHA: 557e53d</a:t>
+              <a:t>- CORS 허용 출처를 와일드카드(*)에서 localhost:5173으로 제한</a:t>
+            </a:r>
+          </a:p>
+          <a:p>
+            <a:r>
+              <a:t>- CORS 허용 헤더를 명시적으로 지정 (Authorization, Content-Type, Accept)</a:t>
+            </a:r>
+          </a:p>
+          <a:p>
+            <a:r>
+              <a:t>- SessionCreationPolicy.STATELESS 명시 (JWT Stateless 인증 전제)</a:t>
+            </a:r>
+          </a:p>
+          <a:p>
+            <a:r>
+              <a:t>- 엔드포인트 권한 세분화: 회원가입·로그인 POST만 permitAll, 나머지 authenticated</a:t>
+            </a:r>
+          </a:p>
+          <a:p>
+            <a:r>
+              <a:t>- JWT 필터 연동 위치 주석 추가 (addFilterBefore)</a:t>
+            </a:r>
+          </a:p>
+          <a:p>
+            <a:r>
+              <a:t>- UserDetailsService 교체 예정 주석 추가</a:t>
+            </a:r>
+          </a:p>
+          <a:p>
+            <a:r>
+              <a:t>- 불필요한 InMemoryUserDetailsManager Bean 임시 유지</a:t>
+            </a:r>
+          </a:p>
+          <a:p>
+            <a:r>
+              <a:t>SHA: bdd1cad</a:t>
             </a:r>
           </a:p>
         </p:txBody>
@@ -5495,17 +5523,22 @@
           </a:p>
           <a:p>
             <a:r>
-              <a:t>작성자: dldnwls07</a:t>
-            </a:r>
-          </a:p>
-          <a:p>
-            <a:r>
-              <a:t>요약: sync backend folder with backend branch</a:t>
-            </a:r>
-          </a:p>
-          <a:p>
-            <a:r>
-              <a:t>SHA: ff0c0dc</a:t>
+              <a:t>작성자: 원종우</a:t>
+            </a:r>
+          </a:p>
+          <a:p>
+            <a:r>
+              <a:t>요약: api 테스트 페이지 개선</a:t>
+            </a:r>
+          </a:p>
+          <a:p>
+            <a:r>
+              <a:t>모든 api 정상작동 확인</a:t>
+            </a:r>
+          </a:p>
+          <a:p>
+            <a:r>
+              <a:t>SHA: bc84f43</a:t>
             </a:r>
           </a:p>
         </p:txBody>
@@ -5544,7 +5577,7 @@
           <a:lstStyle/>
           <a:p>
             <a:r>
-              <a:t>기능 개발</a:t>
+              <a:t>기타</a:t>
             </a:r>
           </a:p>
         </p:txBody>
@@ -5575,12 +5608,47 @@
           </a:p>
           <a:p>
             <a:r>
-              <a:t>요약: 테스트 코드파일 경로 변경 + html, css, js 파일 분리</a:t>
-            </a:r>
-          </a:p>
-          <a:p>
-            <a:r>
-              <a:t>SHA: ab9fb71</a:t>
+              <a:t>요약: pref: 중복 아이디 예외처리 추가</a:t>
+            </a:r>
+          </a:p>
+          <a:p>
+            <a:r>
+              <a:t>+ 에러메시지 로직 구현</a:t>
+            </a:r>
+          </a:p>
+          <a:p>
+            <a:r>
+              <a:t>- 409: 이미사용중인 아이디</a:t>
+            </a:r>
+          </a:p>
+          <a:p>
+            <a:r>
+              <a:t>- 401: 아이디 또는 비밀번호가 올바르지</a:t>
+            </a:r>
+          </a:p>
+          <a:p>
+            <a:r>
+              <a:t>- 403: 접근 권한 x</a:t>
+            </a:r>
+          </a:p>
+          <a:p>
+            <a:r>
+              <a:t>- 404: 존재하지 않는 계정</a:t>
+            </a:r>
+          </a:p>
+          <a:p>
+            <a:r>
+              <a:t>- 400: 입력정보 다시 확인</a:t>
+            </a:r>
+          </a:p>
+          <a:p>
+            <a:r>
+              <a:t>- 500: 서버오류</a:t>
+            </a:r>
+          </a:p>
+          <a:p>
+            <a:r>
+              <a:t>SHA: fb1f5dd</a:t>
             </a:r>
           </a:p>
         </p:txBody>
@@ -5619,7 +5687,7 @@
           <a:lstStyle/>
           <a:p>
             <a:r>
-              <a:t>기능 개발</a:t>
+              <a:t>기타</a:t>
             </a:r>
           </a:p>
         </p:txBody>
@@ -5645,22 +5713,17 @@
           </a:p>
           <a:p>
             <a:r>
-              <a:t>작성자: 원종우</a:t>
-            </a:r>
-          </a:p>
-          <a:p>
-            <a:r>
-              <a:t>요약: api 테스트 페이지 개선</a:t>
-            </a:r>
-          </a:p>
-          <a:p>
-            <a:r>
-              <a:t>모든 api 정상작동 확인</a:t>
-            </a:r>
-          </a:p>
-          <a:p>
-            <a:r>
-              <a:t>SHA: bc84f43</a:t>
+              <a:t>작성자: dldnwls07</a:t>
+            </a:r>
+          </a:p>
+          <a:p>
+            <a:r>
+              <a:t>요약: pipline fix</a:t>
+            </a:r>
+          </a:p>
+          <a:p>
+            <a:r>
+              <a:t>SHA: 7e3f25d</a:t>
             </a:r>
           </a:p>
         </p:txBody>
@@ -5699,7 +5762,7 @@
           <a:lstStyle/>
           <a:p>
             <a:r>
-              <a:t>기능 개발</a:t>
+              <a:t>기타</a:t>
             </a:r>
           </a:p>
         </p:txBody>
@@ -5730,27 +5793,12 @@
           </a:p>
           <a:p>
             <a:r>
-              <a:t>요약: test-api.http api 테스트 추가</a:t>
-            </a:r>
-          </a:p>
-          <a:p>
-            <a:r>
-              <a:t>- 이상 상태 보고 테스트</a:t>
-            </a:r>
-          </a:p>
-          <a:p>
-            <a:r>
-              <a:t>- 다양한 이상 상태 테스트</a:t>
-            </a:r>
-          </a:p>
-          <a:p>
-            <a:r>
-              <a:t>- 정상 상태 보고 테스트</a:t>
-            </a:r>
-          </a:p>
-          <a:p>
-            <a:r>
-              <a:t>SHA: 9b04774</a:t>
+              <a:t>요약: Merge remote-tracking branch 'origin/frontend' into backend</a:t>
+            </a:r>
+          </a:p>
+          <a:p>
+            <a:r>
+              <a:t>SHA: 31c3e9e</a:t>
             </a:r>
           </a:p>
         </p:txBody>
@@ -5789,7 +5837,7 @@
           <a:lstStyle/>
           <a:p>
             <a:r>
-              <a:t>기타</a:t>
+              <a:t>기능 개발</a:t>
             </a:r>
           </a:p>
         </p:txBody>
@@ -5820,12 +5868,27 @@
           </a:p>
           <a:p>
             <a:r>
-              <a:t>요약: Merge remote-tracking branch 'origin/frontend' into backend</a:t>
-            </a:r>
-          </a:p>
-          <a:p>
-            <a:r>
-              <a:t>SHA: 31c3e9e</a:t>
+              <a:t>요약: test-api.http api 테스트 추가</a:t>
+            </a:r>
+          </a:p>
+          <a:p>
+            <a:r>
+              <a:t>- 이상 상태 보고 테스트</a:t>
+            </a:r>
+          </a:p>
+          <a:p>
+            <a:r>
+              <a:t>- 다양한 이상 상태 테스트</a:t>
+            </a:r>
+          </a:p>
+          <a:p>
+            <a:r>
+              <a:t>- 정상 상태 보고 테스트</a:t>
+            </a:r>
+          </a:p>
+          <a:p>
+            <a:r>
+              <a:t>SHA: 9b04774</a:t>
             </a:r>
           </a:p>
         </p:txBody>
@@ -5864,7 +5927,7 @@
           <a:lstStyle/>
           <a:p>
             <a:r>
-              <a:t>기타</a:t>
+              <a:t>기능 개발</a:t>
             </a:r>
           </a:p>
         </p:txBody>
@@ -5895,12 +5958,12 @@
           </a:p>
           <a:p>
             <a:r>
-              <a:t>요약: pipline fix</a:t>
-            </a:r>
-          </a:p>
-          <a:p>
-            <a:r>
-              <a:t>SHA: 7e3f25d</a:t>
+              <a:t>요약: sync backend folder with backend branch</a:t>
+            </a:r>
+          </a:p>
+          <a:p>
+            <a:r>
+              <a:t>SHA: ff0c0dc</a:t>
             </a:r>
           </a:p>
         </p:txBody>
@@ -5939,7 +6002,7 @@
           <a:lstStyle/>
           <a:p>
             <a:r>
-              <a:t>기타</a:t>
+              <a:t>기능 개발</a:t>
             </a:r>
           </a:p>
         </p:txBody>
@@ -5970,47 +6033,12 @@
           </a:p>
           <a:p>
             <a:r>
-              <a:t>요약: pref: 중복 아이디 예외처리 추가</a:t>
-            </a:r>
-          </a:p>
-          <a:p>
-            <a:r>
-              <a:t>+ 에러메시지 로직 구현</a:t>
-            </a:r>
-          </a:p>
-          <a:p>
-            <a:r>
-              <a:t>- 409: 이미사용중인 아이디</a:t>
-            </a:r>
-          </a:p>
-          <a:p>
-            <a:r>
-              <a:t>- 401: 아이디 또는 비밀번호가 올바르지</a:t>
-            </a:r>
-          </a:p>
-          <a:p>
-            <a:r>
-              <a:t>- 403: 접근 권한 x</a:t>
-            </a:r>
-          </a:p>
-          <a:p>
-            <a:r>
-              <a:t>- 404: 존재하지 않는 계정</a:t>
-            </a:r>
-          </a:p>
-          <a:p>
-            <a:r>
-              <a:t>- 400: 입력정보 다시 확인</a:t>
-            </a:r>
-          </a:p>
-          <a:p>
-            <a:r>
-              <a:t>- 500: 서버오류</a:t>
-            </a:r>
-          </a:p>
-          <a:p>
-            <a:r>
-              <a:t>SHA: fb1f5dd</a:t>
+              <a:t>요약: 테스트 코드파일 경로 변경 + html, css, js 파일 분리</a:t>
+            </a:r>
+          </a:p>
+          <a:p>
+            <a:r>
+              <a:t>SHA: ab9fb71</a:t>
             </a:r>
           </a:p>
         </p:txBody>
@@ -6049,28 +6077,28 @@
           <a:lstStyle/>
           <a:p>
             <a:r>
-              <a:t>기타</a:t>
-            </a:r>
-          </a:p>
-        </p:txBody>
-      </p:sp>
-      <p:sp>
-        <p:nvSpPr>
-          <p:cNvPr id="3" name="Content Placeholder 2"/>
-          <p:cNvSpPr>
-            <a:spLocks noGrp="1"/>
-          </p:cNvSpPr>
-          <p:nvPr>
-            <p:ph idx="1"/>
-          </p:nvPr>
-        </p:nvSpPr>
-        <p:spPr/>
-        <p:txBody>
-          <a:bodyPr/>
-          <a:lstStyle/>
-          <a:p>
-            <a:r>
-              <a:t>날짜: 2026-04-29</a:t>
+              <a:t>기타 (PR Merge)</a:t>
+            </a:r>
+          </a:p>
+        </p:txBody>
+      </p:sp>
+      <p:sp>
+        <p:nvSpPr>
+          <p:cNvPr id="3" name="Content Placeholder 2"/>
+          <p:cNvSpPr>
+            <a:spLocks noGrp="1"/>
+          </p:cNvSpPr>
+          <p:nvPr>
+            <p:ph idx="1"/>
+          </p:nvPr>
+        </p:nvSpPr>
+        <p:spPr/>
+        <p:txBody>
+          <a:bodyPr/>
+          <a:lstStyle/>
+          <a:p>
+            <a:r>
+              <a:t>날짜: 2026-04-30</a:t>
             </a:r>
           </a:p>
           <a:p>
@@ -6080,12 +6108,18 @@
           </a:p>
           <a:p>
             <a:r>
-              <a:t>요약: 잘못올라간 이미지 삭제</a:t>
-            </a:r>
-          </a:p>
-          <a:p>
-            <a:r>
-              <a:t>SHA: 2167919</a:t>
+              <a:t>요약: Merge pull request #1 from Jongwoo0101/backend</a:t>
+            </a:r>
+          </a:p>
+          <a:p/>
+          <a:p>
+            <a:r>
+              <a:t>Backend 설계, 구현 완료</a:t>
+            </a:r>
+          </a:p>
+          <a:p>
+            <a:r>
+              <a:t>SHA: 557e53d</a:t>
             </a:r>
           </a:p>
         </p:txBody>
@@ -6124,28 +6158,28 @@
           <a:lstStyle/>
           <a:p>
             <a:r>
-              <a:t>기능 개발</a:t>
-            </a:r>
-          </a:p>
-        </p:txBody>
-      </p:sp>
-      <p:sp>
-        <p:nvSpPr>
-          <p:cNvPr id="3" name="Content Placeholder 2"/>
-          <p:cNvSpPr>
-            <a:spLocks noGrp="1"/>
-          </p:cNvSpPr>
-          <p:nvPr>
-            <p:ph idx="1"/>
-          </p:nvPr>
-        </p:nvSpPr>
-        <p:spPr/>
-        <p:txBody>
-          <a:bodyPr/>
-          <a:lstStyle/>
-          <a:p>
-            <a:r>
-              <a:t>날짜: 2026-05-22</a:t>
+              <a:t>버그 수정</a:t>
+            </a:r>
+          </a:p>
+        </p:txBody>
+      </p:sp>
+      <p:sp>
+        <p:nvSpPr>
+          <p:cNvPr id="3" name="Content Placeholder 2"/>
+          <p:cNvSpPr>
+            <a:spLocks noGrp="1"/>
+          </p:cNvSpPr>
+          <p:nvPr>
+            <p:ph idx="1"/>
+          </p:nvPr>
+        </p:nvSpPr>
+        <p:spPr/>
+        <p:txBody>
+          <a:bodyPr/>
+          <a:lstStyle/>
+          <a:p>
+            <a:r>
+              <a:t>날짜: 2026-05-23</a:t>
             </a:r>
           </a:p>
           <a:p>
@@ -6155,38 +6189,17 @@
           </a:p>
           <a:p>
             <a:r>
-              <a:t>요약: 팀 초대 코드 다회성 사용을 위한 1회성 제한 로직 제거</a:t>
-            </a:r>
-          </a:p>
-          <a:p/>
-          <a:p>
-            <a:r>
-              <a:t>[주요 변경 사항]</a:t>
-            </a:r>
-          </a:p>
-          <a:p>
-            <a:r>
-              <a:t>- 기존 1회성 사용 제한으로 인해 다른 팀원이 동일한 코드로 연이어 참가하지 못하던 문제 해결</a:t>
-            </a:r>
-          </a:p>
-          <a:p>
-            <a:r>
-              <a:t>- `InviteCode` 엔티티에서 불필요해진 `used` 필드 및 `markAsUsed()` 상태 변경 메서드 삭제</a:t>
-            </a:r>
-          </a:p>
-          <a:p>
-            <a:r>
-              <a:t>- `InviteCodeRepository`의 쿼리 메서드를 `findByCodeAndUsedFalse`에서 `findByCode`로 단순화</a:t>
-            </a:r>
-          </a:p>
-          <a:p>
-            <a:r>
-              <a:t>- `MemberService.joinTeam()` 내 1회성 처리 로직을 제거하여, 지정된 만료 시간(기본 5분) 내에는 여러 팀원이 무제한으로 코드를 사용할 수 있도록 비즈니스 로직 개선</a:t>
-            </a:r>
-          </a:p>
-          <a:p>
-            <a:r>
-              <a:t>SHA: 766cfc6</a:t>
+              <a:t>요약: SecurityConfig.java @Value 제거</a:t>
+            </a:r>
+          </a:p>
+          <a:p>
+            <a:r>
+              <a:t>localhost:5173 하드코딩 유지. 대신 새 API 경로들(/api/meetings/**, /api/notifications/**, /api/standup/**) 추가된 것만 반영</a:t>
+            </a:r>
+          </a:p>
+          <a:p>
+            <a:r>
+              <a:t>SHA: 2733dd7</a:t>
             </a:r>
           </a:p>
         </p:txBody>
@@ -6225,43 +6238,49 @@
           <a:lstStyle/>
           <a:p>
             <a:r>
-              <a:t>문서 작업</a:t>
-            </a:r>
-          </a:p>
-        </p:txBody>
-      </p:sp>
-      <p:sp>
-        <p:nvSpPr>
-          <p:cNvPr id="3" name="Content Placeholder 2"/>
-          <p:cNvSpPr>
-            <a:spLocks noGrp="1"/>
-          </p:cNvSpPr>
-          <p:nvPr>
-            <p:ph idx="1"/>
-          </p:nvPr>
-        </p:nvSpPr>
-        <p:spPr/>
-        <p:txBody>
-          <a:bodyPr/>
-          <a:lstStyle/>
-          <a:p>
-            <a:r>
-              <a:t>날짜: 2026-04-29</a:t>
-            </a:r>
-          </a:p>
-          <a:p>
-            <a:r>
-              <a:t>작성자: dldnwls07</a:t>
-            </a:r>
-          </a:p>
-          <a:p>
-            <a:r>
-              <a:t>요약: 프론트엔드 작업 현황 리포트 추가 (코드 제외)</a:t>
-            </a:r>
-          </a:p>
-          <a:p>
-            <a:r>
-              <a:t>SHA: 7d3faf0</a:t>
+              <a:t>기타 (PR Merge)</a:t>
+            </a:r>
+          </a:p>
+        </p:txBody>
+      </p:sp>
+      <p:sp>
+        <p:nvSpPr>
+          <p:cNvPr id="3" name="Content Placeholder 2"/>
+          <p:cNvSpPr>
+            <a:spLocks noGrp="1"/>
+          </p:cNvSpPr>
+          <p:nvPr>
+            <p:ph idx="1"/>
+          </p:nvPr>
+        </p:nvSpPr>
+        <p:spPr/>
+        <p:txBody>
+          <a:bodyPr/>
+          <a:lstStyle/>
+          <a:p>
+            <a:r>
+              <a:t>날짜: 2026-04-30</a:t>
+            </a:r>
+          </a:p>
+          <a:p>
+            <a:r>
+              <a:t>작성자: 원종우</a:t>
+            </a:r>
+          </a:p>
+          <a:p>
+            <a:r>
+              <a:t>요약: Merge pull request #2 from Jongwoo0101/frontend</a:t>
+            </a:r>
+          </a:p>
+          <a:p/>
+          <a:p>
+            <a:r>
+              <a:t> backend 폴더 동기화 및 프론트엔드 로컬 변경사항 반영</a:t>
+            </a:r>
+          </a:p>
+          <a:p>
+            <a:r>
+              <a:t>SHA: 047870a</a:t>
             </a:r>
           </a:p>
         </p:txBody>
@@ -6300,28 +6319,28 @@
           <a:lstStyle/>
           <a:p>
             <a:r>
-              <a:t>기능 개발</a:t>
-            </a:r>
-          </a:p>
-        </p:txBody>
-      </p:sp>
-      <p:sp>
-        <p:nvSpPr>
-          <p:cNvPr id="3" name="Content Placeholder 2"/>
-          <p:cNvSpPr>
-            <a:spLocks noGrp="1"/>
-          </p:cNvSpPr>
-          <p:nvPr>
-            <p:ph idx="1"/>
-          </p:nvPr>
-        </p:nvSpPr>
-        <p:spPr/>
-        <p:txBody>
-          <a:bodyPr/>
-          <a:lstStyle/>
-          <a:p>
-            <a:r>
-              <a:t>날짜: 2026-04-29</a:t>
+              <a:t>기타</a:t>
+            </a:r>
+          </a:p>
+        </p:txBody>
+      </p:sp>
+      <p:sp>
+        <p:nvSpPr>
+          <p:cNvPr id="3" name="Content Placeholder 2"/>
+          <p:cNvSpPr>
+            <a:spLocks noGrp="1"/>
+          </p:cNvSpPr>
+          <p:nvPr>
+            <p:ph idx="1"/>
+          </p:nvPr>
+        </p:nvSpPr>
+        <p:spPr/>
+        <p:txBody>
+          <a:bodyPr/>
+          <a:lstStyle/>
+          <a:p>
+            <a:r>
+              <a:t>날짜: 2026-04-30</a:t>
             </a:r>
           </a:p>
           <a:p>
@@ -6331,12 +6350,12 @@
           </a:p>
           <a:p>
             <a:r>
-              <a:t>요약: 실제 백엔드 인증 시스템 연동 및 API 프록시 설정 추가</a:t>
-            </a:r>
-          </a:p>
-          <a:p>
-            <a:r>
-              <a:t>SHA: c200bba</a:t>
+              <a:t>요약: chore: backup frontend local changes before backend folder sync</a:t>
+            </a:r>
+          </a:p>
+          <a:p>
+            <a:r>
+              <a:t>SHA: 5b7bb89</a:t>
             </a:r>
           </a:p>
         </p:txBody>
@@ -6375,7 +6394,7 @@
           <a:lstStyle/>
           <a:p>
             <a:r>
-              <a:t>버그 수정</a:t>
+              <a:t>기타</a:t>
             </a:r>
           </a:p>
         </p:txBody>
@@ -6401,17 +6420,17 @@
           </a:p>
           <a:p>
             <a:r>
-              <a:t>작성자: dldnwls07</a:t>
-            </a:r>
-          </a:p>
-          <a:p>
-            <a:r>
-              <a:t>요약: Vite 웹소켓 호환성 해결 및 DashboardStats 타입 에러 수정</a:t>
-            </a:r>
-          </a:p>
-          <a:p>
-            <a:r>
-              <a:t>SHA: dd57ad5</a:t>
+              <a:t>작성자: 원종우</a:t>
+            </a:r>
+          </a:p>
+          <a:p>
+            <a:r>
+              <a:t>요약: delete test.txt</a:t>
+            </a:r>
+          </a:p>
+          <a:p>
+            <a:r>
+              <a:t>SHA: 988d4f2</a:t>
             </a:r>
           </a:p>
         </p:txBody>
@@ -6450,7 +6469,7 @@
           <a:lstStyle/>
           <a:p>
             <a:r>
-              <a:t>기능 개발</a:t>
+              <a:t>기타</a:t>
             </a:r>
           </a:p>
         </p:txBody>
@@ -6476,17 +6495,17 @@
           </a:p>
           <a:p>
             <a:r>
-              <a:t>작성자: dldnwls07</a:t>
-            </a:r>
-          </a:p>
-          <a:p>
-            <a:r>
-              <a:t>요약: 백엔드 API 연동 및 웹소켓 실시간 알림 기능 구현</a:t>
-            </a:r>
-          </a:p>
-          <a:p>
-            <a:r>
-              <a:t>SHA: ca7d14d</a:t>
+              <a:t>작성자: 원종우</a:t>
+            </a:r>
+          </a:p>
+          <a:p>
+            <a:r>
+              <a:t>요약: edit plan.txt</a:t>
+            </a:r>
+          </a:p>
+          <a:p>
+            <a:r>
+              <a:t>SHA: 64801f8</a:t>
             </a:r>
           </a:p>
         </p:txBody>
@@ -6551,17 +6570,22 @@
           </a:p>
           <a:p>
             <a:r>
-              <a:t>작성자: dldnwls07</a:t>
-            </a:r>
-          </a:p>
-          <a:p>
-            <a:r>
-              <a:t>요약: style: 레이아웃 텍스트 겹침 수정 및 불필요한 에셋 정리</a:t>
-            </a:r>
-          </a:p>
-          <a:p>
-            <a:r>
-              <a:t>SHA: 4ae07b7</a:t>
+              <a:t>작성자: 원종우</a:t>
+            </a:r>
+          </a:p>
+          <a:p>
+            <a:r>
+              <a:t>요약: WebSocketConfig.java</a:t>
+            </a:r>
+          </a:p>
+          <a:p>
+            <a:r>
+              <a:t>실시간 모니터링을 위한 웹소켓 엔드포인트 (ws-monitoring) 및 메시지 설정</a:t>
+            </a:r>
+          </a:p>
+          <a:p>
+            <a:r>
+              <a:t>SHA: c58c353</a:t>
             </a:r>
           </a:p>
         </p:txBody>
@@ -6631,12 +6655,17 @@
           </a:p>
           <a:p>
             <a:r>
-              <a:t>요약: api 명세서 작성</a:t>
-            </a:r>
-          </a:p>
-          <a:p>
-            <a:r>
-              <a:t>SHA: cbedf74</a:t>
+              <a:t>요약: application.yaml</a:t>
+            </a:r>
+          </a:p>
+          <a:p>
+            <a:r>
+              <a:t>h2, jpa 하이버네이트 로그 설정 및 환경변수 관리</a:t>
+            </a:r>
+          </a:p>
+          <a:p>
+            <a:r>
+              <a:t>SHA: a1ebbac</a:t>
             </a:r>
           </a:p>
         </p:txBody>
@@ -6675,7 +6704,7 @@
           <a:lstStyle/>
           <a:p>
             <a:r>
-              <a:t>기능 개발</a:t>
+              <a:t>기타</a:t>
             </a:r>
           </a:p>
         </p:txBody>
@@ -6701,17 +6730,27 @@
           </a:p>
           <a:p>
             <a:r>
-              <a:t>작성자: dldnwls07</a:t>
-            </a:r>
-          </a:p>
-          <a:p>
-            <a:r>
-              <a:t>요약: 프론트엔드 뼈대 구축 완료 (Home, Login, EmployeeView, Dashboard) 및 Mock 데이터 연결</a:t>
-            </a:r>
-          </a:p>
-          <a:p>
-            <a:r>
-              <a:t>SHA: 1d45732</a:t>
+              <a:t>작성자: 원종우</a:t>
+            </a:r>
+          </a:p>
+          <a:p>
+            <a:r>
+              <a:t>요약: SecurityConfig.java</a:t>
+            </a:r>
+          </a:p>
+          <a:p>
+            <a:r>
+              <a:t>스프링 시큐리티 필터 체인설정</a:t>
+            </a:r>
+          </a:p>
+          <a:p>
+            <a:r>
+              <a:t>CSRF 비활성화, CORS허용, H2 콘솔 접근 및 API 경로별 권한 정의</a:t>
+            </a:r>
+          </a:p>
+          <a:p>
+            <a:r>
+              <a:t>SHA: 99108a8</a:t>
             </a:r>
           </a:p>
         </p:txBody>
@@ -6750,7 +6789,7 @@
           <a:lstStyle/>
           <a:p>
             <a:r>
-              <a:t>기타</a:t>
+              <a:t>기능 개발</a:t>
             </a:r>
           </a:p>
         </p:txBody>
@@ -6776,17 +6815,17 @@
           </a:p>
           <a:p>
             <a:r>
-              <a:t>작성자: 원종우</a:t>
-            </a:r>
-          </a:p>
-          <a:p>
-            <a:r>
-              <a:t>요약: 폴더명 재정의</a:t>
-            </a:r>
-          </a:p>
-          <a:p>
-            <a:r>
-              <a:t>SHA: 7b05593</a:t>
+              <a:t>작성자: dldnwls07</a:t>
+            </a:r>
+          </a:p>
+          <a:p>
+            <a:r>
+              <a:t>요약: import worksight-api from backend branch</a:t>
+            </a:r>
+          </a:p>
+          <a:p>
+            <a:r>
+              <a:t>SHA: 39b1196</a:t>
             </a:r>
           </a:p>
         </p:txBody>
@@ -6825,7 +6864,7 @@
           <a:lstStyle/>
           <a:p>
             <a:r>
-              <a:t>테스트</a:t>
+              <a:t>기타</a:t>
             </a:r>
           </a:p>
         </p:txBody>
@@ -6856,12 +6895,12 @@
           </a:p>
           <a:p>
             <a:r>
-              <a:t>요약: test-api.http: 회원가입, 로그인 더미데이터로 테스트하기</a:t>
-            </a:r>
-          </a:p>
-          <a:p>
-            <a:r>
-              <a:t>SHA: 496a9f0</a:t>
+              <a:t>요약: add backend basic logic</a:t>
+            </a:r>
+          </a:p>
+          <a:p>
+            <a:r>
+              <a:t>SHA: d347752</a:t>
             </a:r>
           </a:p>
         </p:txBody>
@@ -6900,7 +6939,7 @@
           <a:lstStyle/>
           <a:p>
             <a:r>
-              <a:t>테스트</a:t>
+              <a:t>기타</a:t>
             </a:r>
           </a:p>
         </p:txBody>
@@ -6931,12 +6970,12 @@
           </a:p>
           <a:p>
             <a:r>
-              <a:t>요약: test.html: 회원가입, 로그인 api 테스트</a:t>
-            </a:r>
-          </a:p>
-          <a:p>
-            <a:r>
-              <a:t>SHA: 658a53f</a:t>
+              <a:t>요약: gitattributes 업로드</a:t>
+            </a:r>
+          </a:p>
+          <a:p>
+            <a:r>
+              <a:t>SHA: 1aece09</a:t>
             </a:r>
           </a:p>
         </p:txBody>
@@ -6975,7 +7014,7 @@
           <a:lstStyle/>
           <a:p>
             <a:r>
-              <a:t>구조 개선</a:t>
+              <a:t>기능 개발</a:t>
             </a:r>
           </a:p>
         </p:txBody>
@@ -7006,33 +7045,38 @@
           </a:p>
           <a:p>
             <a:r>
-              <a:t>요약: WebSocket 메시지 발신 표준화(WsEnvelope) 및 DTO 최적화</a:t>
+              <a:t>요약: 팀 초대 코드 다회성 사용을 위한 1회성 제한 로직 제거</a:t>
             </a:r>
           </a:p>
           <a:p/>
           <a:p>
             <a:r>
-              <a:t>- 프론트엔드 통신 표준화를 위한 공통 이벤트 래퍼 `WsEnvelope` 도입 (event, data, occurredAt, version)</a:t>
-            </a:r>
-          </a:p>
-          <a:p>
-            <a:r>
-              <a:t>- `DailyStandupService`, `MeetingRoomService`, `NotificationService`, `StatusService`, `WorkLogService`의 메시지 전송부를 `WsEnvelope` 규격으로 전면 교체 및 이벤트 명 상수화</a:t>
-            </a:r>
-          </a:p>
-          <a:p>
-            <a:r>
-              <a:t>- 브로드캐스트 전용 DTO를 `WsEnvelope.data` 구조에 맞게 경량화 (`TeamStatusBroadcast` -&gt; `TeamStatusPayload`)</a:t>
-            </a:r>
-          </a:p>
-          <a:p>
-            <a:r>
-              <a:t>- 각 도메인 서비스 내 Member 검증 중복 코드를 `getManagedMember` 등 헬퍼 메서드로 추출 및 알림 페이로드(roomPayload 등) 규격화</a:t>
-            </a:r>
-          </a:p>
-          <a:p>
-            <a:r>
-              <a:t>SHA: 2d0efae</a:t>
+              <a:t>[주요 변경 사항]</a:t>
+            </a:r>
+          </a:p>
+          <a:p>
+            <a:r>
+              <a:t>- 기존 1회성 사용 제한으로 인해 다른 팀원이 동일한 코드로 연이어 참가하지 못하던 문제 해결</a:t>
+            </a:r>
+          </a:p>
+          <a:p>
+            <a:r>
+              <a:t>- `InviteCode` 엔티티에서 불필요해진 `used` 필드 및 `markAsUsed()` 상태 변경 메서드 삭제</a:t>
+            </a:r>
+          </a:p>
+          <a:p>
+            <a:r>
+              <a:t>- `InviteCodeRepository`의 쿼리 메서드를 `findByCodeAndUsedFalse`에서 `findByCode`로 단순화</a:t>
+            </a:r>
+          </a:p>
+          <a:p>
+            <a:r>
+              <a:t>- `MemberService.joinTeam()` 내 1회성 처리 로직을 제거하여, 지정된 만료 시간(기본 5분) 내에는 여러 팀원이 무제한으로 코드를 사용할 수 있도록 비즈니스 로직 개선</a:t>
+            </a:r>
+          </a:p>
+          <a:p>
+            <a:r>
+              <a:t>SHA: 766cfc6</a:t>
             </a:r>
           </a:p>
         </p:txBody>
@@ -7102,12 +7146,12 @@
           </a:p>
           <a:p>
             <a:r>
-              <a:t>요약: h2 콘솔 대소문자 관련 설정 해제</a:t>
-            </a:r>
-          </a:p>
-          <a:p>
-            <a:r>
-              <a:t>SHA: 7ae3f6c</a:t>
+              <a:t>요약: 백엔드 폴더 내 gitignore 업로드</a:t>
+            </a:r>
+          </a:p>
+          <a:p>
+            <a:r>
+              <a:t>SHA: 2e9b813</a:t>
             </a:r>
           </a:p>
         </p:txBody>
@@ -7172,17 +7216,17 @@
           </a:p>
           <a:p>
             <a:r>
-              <a:t>작성자: dldnwls07</a:t>
-            </a:r>
-          </a:p>
-          <a:p>
-            <a:r>
-              <a:t>요약: 프론트앤드개발계획서 및, 개발방향계획수정</a:t>
-            </a:r>
-          </a:p>
-          <a:p>
-            <a:r>
-              <a:t>SHA: ef101d2</a:t>
+              <a:t>작성자: 원종우</a:t>
+            </a:r>
+          </a:p>
+          <a:p>
+            <a:r>
+              <a:t>요약: edit plan.txt</a:t>
+            </a:r>
+          </a:p>
+          <a:p>
+            <a:r>
+              <a:t>SHA: eca21fa</a:t>
             </a:r>
           </a:p>
         </p:txBody>
@@ -7221,7 +7265,7 @@
           <a:lstStyle/>
           <a:p>
             <a:r>
-              <a:t>기능 개발</a:t>
+              <a:t>기타</a:t>
             </a:r>
           </a:p>
         </p:txBody>
@@ -7247,37 +7291,17 @@
           </a:p>
           <a:p>
             <a:r>
-              <a:t>작성자: dldnwls07</a:t>
-            </a:r>
-          </a:p>
-          <a:p>
-            <a:r>
-              <a:t>요약: 프론트엔드 초기 아키텍처 설계 및 개발 환경 구축</a:t>
-            </a:r>
-          </a:p>
-          <a:p>
-            <a:r>
-              <a:t>- React + Vite + TypeScript 기반 프로젝트 초기화</a:t>
-            </a:r>
-          </a:p>
-          <a:p>
-            <a:r>
-              <a:t>- 주요 라이브러리 설치 (TailwindCSS, Zustand, React Router)</a:t>
-            </a:r>
-          </a:p>
-          <a:p>
-            <a:r>
-              <a:t>- 페이지별 빈 파일 및 폴더 구조(pages, components, store, lib) 생성</a:t>
-            </a:r>
-          </a:p>
-          <a:p>
-            <a:r>
-              <a:t>- 프론트엔드 개발 가이드라인(frontend_PipLine.md) 작성</a:t>
-            </a:r>
-          </a:p>
-          <a:p>
-            <a:r>
-              <a:t>SHA: 2aa9134</a:t>
+              <a:t>작성자: 원종우</a:t>
+            </a:r>
+          </a:p>
+          <a:p>
+            <a:r>
+              <a:t>요약: dir test</a:t>
+            </a:r>
+          </a:p>
+          <a:p>
+            <a:r>
+              <a:t>SHA: 1f9e427</a:t>
             </a:r>
           </a:p>
         </p:txBody>
@@ -7347,12 +7371,12 @@
           </a:p>
           <a:p>
             <a:r>
-              <a:t>요약: Role.java: 사용자 권한을 정의한 Enum (EMPLOYEE, MANAGER).</a:t>
-            </a:r>
-          </a:p>
-          <a:p>
-            <a:r>
-              <a:t>SHA: 3b64822</a:t>
+              <a:t>요약: edit gitignore</a:t>
+            </a:r>
+          </a:p>
+          <a:p>
+            <a:r>
+              <a:t>SHA: d97fecd</a:t>
             </a:r>
           </a:p>
         </p:txBody>
@@ -7422,12 +7446,12 @@
           </a:p>
           <a:p>
             <a:r>
-              <a:t>요약: MonitoringController.java: 실시간 업무 상태 전송 및 기록을 위한 컨트롤러.</a:t>
-            </a:r>
-          </a:p>
-          <a:p>
-            <a:r>
-              <a:t>SHA: 8f71819</a:t>
+              <a:t>요약: Member.java: 회원 정보(id, pw, role, 잔액)를 담은 jpa 엔티티 정의</a:t>
+            </a:r>
+          </a:p>
+          <a:p>
+            <a:r>
+              <a:t>SHA: cc3bcf8</a:t>
             </a:r>
           </a:p>
         </p:txBody>
@@ -7497,12 +7521,12 @@
           </a:p>
           <a:p>
             <a:r>
-              <a:t>요약: MonitoringService.java: 업무 상태 기록 및 분석 로직.</a:t>
-            </a:r>
-          </a:p>
-          <a:p>
-            <a:r>
-              <a:t>SHA: 87b6241</a:t>
+              <a:t>요약: add gitignore</a:t>
+            </a:r>
+          </a:p>
+          <a:p>
+            <a:r>
+              <a:t>SHA: 32c467a</a:t>
             </a:r>
           </a:p>
         </p:txBody>
@@ -7567,17 +7591,17 @@
           </a:p>
           <a:p>
             <a:r>
-              <a:t>작성자: 원종우</a:t>
-            </a:r>
-          </a:p>
-          <a:p>
-            <a:r>
-              <a:t>요약: WorkEventRepository.java: 업무 이벤트 데이터 접근을 위한 인터페이스.</a:t>
-            </a:r>
-          </a:p>
-          <a:p>
-            <a:r>
-              <a:t>SHA: d0ea172</a:t>
+              <a:t>작성자: dldnwls07</a:t>
+            </a:r>
+          </a:p>
+          <a:p>
+            <a:r>
+              <a:t>요약: chore: 백엔드 폴더 동기화 및 Git 설정 최적화 (node_modules, .vite 제외)</a:t>
+            </a:r>
+          </a:p>
+          <a:p>
+            <a:r>
+              <a:t>SHA: c6a3532</a:t>
             </a:r>
           </a:p>
         </p:txBody>
@@ -7647,12 +7671,12 @@
           </a:p>
           <a:p>
             <a:r>
-              <a:t>요약: MonitoringDto.java: 모니터링 데이터 전송을 위한 DTO.</a:t>
-            </a:r>
-          </a:p>
-          <a:p>
-            <a:r>
-              <a:t>SHA: 007cec6</a:t>
+              <a:t>요약: edit ai-team-standards.md</a:t>
+            </a:r>
+          </a:p>
+          <a:p>
+            <a:r>
+              <a:t>SHA: 5d1cefe</a:t>
             </a:r>
           </a:p>
         </p:txBody>
@@ -7717,17 +7741,17 @@
           </a:p>
           <a:p>
             <a:r>
-              <a:t>작성자: 원종우</a:t>
-            </a:r>
-          </a:p>
-          <a:p>
-            <a:r>
-              <a:t>요약: EventType.java: 이벤트 종류를 정의한 Enum (NORMAL, AWAY, SLEEP 등).</a:t>
-            </a:r>
-          </a:p>
-          <a:p>
-            <a:r>
-              <a:t>SHA: b5fe1a1</a:t>
+              <a:t>작성자: dldnwls07</a:t>
+            </a:r>
+          </a:p>
+          <a:p>
+            <a:r>
+              <a:t>요약: Restore test.txt</a:t>
+            </a:r>
+          </a:p>
+          <a:p>
+            <a:r>
+              <a:t>SHA: e4112db</a:t>
             </a:r>
           </a:p>
         </p:txBody>
@@ -7792,17 +7816,17 @@
           </a:p>
           <a:p>
             <a:r>
-              <a:t>작성자: 원종우</a:t>
-            </a:r>
-          </a:p>
-          <a:p>
-            <a:r>
-              <a:t>요약: WorkEvent.java: 업무 중 발생하는 이벤트(상태 변경 등)를 기록하는 JPA 엔티티.</a:t>
-            </a:r>
-          </a:p>
-          <a:p>
-            <a:r>
-              <a:t>SHA: 6fff1f2</a:t>
+              <a:t>작성자: dldnwls07</a:t>
+            </a:r>
+          </a:p>
+          <a:p>
+            <a:r>
+              <a:t>요약: Merge remote-tracking branch 'origin/Jongwoo0101' into Jongwoo0101</a:t>
+            </a:r>
+          </a:p>
+          <a:p>
+            <a:r>
+              <a:t>SHA: 2aeb3fd</a:t>
             </a:r>
           </a:p>
         </p:txBody>
@@ -7958,17 +7982,17 @@
           </a:p>
           <a:p>
             <a:r>
-              <a:t>작성자: 원종우</a:t>
-            </a:r>
-          </a:p>
-          <a:p>
-            <a:r>
-              <a:t>요약: MemberController.java: 회원 관련 REST API 엔드포인트 구현.</a:t>
-            </a:r>
-          </a:p>
-          <a:p>
-            <a:r>
-              <a:t>SHA: 6ae8113</a:t>
+              <a:t>작성자: dldnwls07</a:t>
+            </a:r>
+          </a:p>
+          <a:p>
+            <a:r>
+              <a:t>요약: skills세팅 확인필요</a:t>
+            </a:r>
+          </a:p>
+          <a:p>
+            <a:r>
+              <a:t>SHA: 3f7a79f</a:t>
             </a:r>
           </a:p>
         </p:txBody>
@@ -8038,12 +8062,12 @@
           </a:p>
           <a:p>
             <a:r>
-              <a:t>요약: MembersService.java: 회원 가입, 조회 등 핵심 비즈니스 로직 구현.</a:t>
-            </a:r>
-          </a:p>
-          <a:p>
-            <a:r>
-              <a:t>SHA: a67c5e2</a:t>
+              <a:t>요약: edit plan.txt</a:t>
+            </a:r>
+          </a:p>
+          <a:p>
+            <a:r>
+              <a:t>SHA: c7dc9db</a:t>
             </a:r>
           </a:p>
         </p:txBody>
@@ -8113,12 +8137,12 @@
           </a:p>
           <a:p>
             <a:r>
-              <a:t>요약: MemberRepository.java: DB 접근을 위한 Spring Data JPA 인터페이스.</a:t>
-            </a:r>
-          </a:p>
-          <a:p>
-            <a:r>
-              <a:t>SHA: cbaefd2</a:t>
+              <a:t>요약: delete test.txt</a:t>
+            </a:r>
+          </a:p>
+          <a:p>
+            <a:r>
+              <a:t>SHA: 927d5b1</a:t>
             </a:r>
           </a:p>
         </p:txBody>
@@ -8188,12 +8212,12 @@
           </a:p>
           <a:p>
             <a:r>
-              <a:t>요약: MemberDto.java: API 통신에 사용되는 회원 데이터 전송 객체.</a:t>
-            </a:r>
-          </a:p>
-          <a:p>
-            <a:r>
-              <a:t>SHA: d93f580</a:t>
+              <a:t>요약: add plan.txt</a:t>
+            </a:r>
+          </a:p>
+          <a:p>
+            <a:r>
+              <a:t>SHA: c6ab9fa</a:t>
             </a:r>
           </a:p>
         </p:txBody>
@@ -8232,7 +8256,7 @@
           <a:lstStyle/>
           <a:p>
             <a:r>
-              <a:t>기타</a:t>
+              <a:t>테스트</a:t>
             </a:r>
           </a:p>
         </p:txBody>
@@ -8258,17 +8282,17 @@
           </a:p>
           <a:p>
             <a:r>
-              <a:t>작성자: 원종우</a:t>
-            </a:r>
-          </a:p>
-          <a:p>
-            <a:r>
-              <a:t>요약: backend 내 test.txt 삭제</a:t>
-            </a:r>
-          </a:p>
-          <a:p>
-            <a:r>
-              <a:t>SHA: e038a87</a:t>
+              <a:t>작성자: dldnwls07</a:t>
+            </a:r>
+          </a:p>
+          <a:p>
+            <a:r>
+              <a:t>요약: test2</a:t>
+            </a:r>
+          </a:p>
+          <a:p>
+            <a:r>
+              <a:t>SHA: 9d0bcd5</a:t>
             </a:r>
           </a:p>
         </p:txBody>
@@ -8307,7 +8331,7 @@
           <a:lstStyle/>
           <a:p>
             <a:r>
-              <a:t>기타</a:t>
+              <a:t>테스트</a:t>
             </a:r>
           </a:p>
         </p:txBody>
@@ -8338,12 +8362,12 @@
           </a:p>
           <a:p>
             <a:r>
-              <a:t>요약: chore: 백엔드 폴더 동기화 및 Git 설정 최적화 (node_modules, .vite 제외)</a:t>
-            </a:r>
-          </a:p>
-          <a:p>
-            <a:r>
-              <a:t>SHA: c6a3532</a:t>
+              <a:t>요약: test commit</a:t>
+            </a:r>
+          </a:p>
+          <a:p>
+            <a:r>
+              <a:t>SHA: 180a8d5</a:t>
             </a:r>
           </a:p>
         </p:txBody>
@@ -8493,12 +8517,12 @@
           </a:p>
           <a:p>
             <a:r>
-              <a:t>요약: edit plan.txt</a:t>
-            </a:r>
-          </a:p>
-          <a:p>
-            <a:r>
-              <a:t>SHA: 64801f8</a:t>
+              <a:t>요약: api 명세서 작성</a:t>
+            </a:r>
+          </a:p>
+          <a:p>
+            <a:r>
+              <a:t>SHA: cbedf74</a:t>
             </a:r>
           </a:p>
         </p:txBody>
@@ -8568,17 +8592,12 @@
           </a:p>
           <a:p>
             <a:r>
-              <a:t>요약: WebSocketConfig.java</a:t>
-            </a:r>
-          </a:p>
-          <a:p>
-            <a:r>
-              <a:t>실시간 모니터링을 위한 웹소켓 엔드포인트 (ws-monitoring) 및 메시지 설정</a:t>
-            </a:r>
-          </a:p>
-          <a:p>
-            <a:r>
-              <a:t>SHA: c58c353</a:t>
+              <a:t>요약: backend 내 test.txt 삭제</a:t>
+            </a:r>
+          </a:p>
+          <a:p>
+            <a:r>
+              <a:t>SHA: e038a87</a:t>
             </a:r>
           </a:p>
         </p:txBody>
@@ -8648,17 +8667,12 @@
           </a:p>
           <a:p>
             <a:r>
-              <a:t>요약: application.yaml</a:t>
-            </a:r>
-          </a:p>
-          <a:p>
-            <a:r>
-              <a:t>h2, jpa 하이버네이트 로그 설정 및 환경변수 관리</a:t>
-            </a:r>
-          </a:p>
-          <a:p>
-            <a:r>
-              <a:t>SHA: a1ebbac</a:t>
+              <a:t>요약: MemberDto.java: API 통신에 사용되는 회원 데이터 전송 객체.</a:t>
+            </a:r>
+          </a:p>
+          <a:p>
+            <a:r>
+              <a:t>SHA: d93f580</a:t>
             </a:r>
           </a:p>
         </p:txBody>
@@ -8697,43 +8711,64 @@
           <a:lstStyle/>
           <a:p>
             <a:r>
-              <a:t>기타</a:t>
-            </a:r>
-          </a:p>
-        </p:txBody>
-      </p:sp>
-      <p:sp>
-        <p:nvSpPr>
-          <p:cNvPr id="3" name="Content Placeholder 2"/>
-          <p:cNvSpPr>
-            <a:spLocks noGrp="1"/>
-          </p:cNvSpPr>
-          <p:nvPr>
-            <p:ph idx="1"/>
-          </p:nvPr>
-        </p:nvSpPr>
-        <p:spPr/>
-        <p:txBody>
-          <a:bodyPr/>
-          <a:lstStyle/>
-          <a:p>
-            <a:r>
-              <a:t>날짜: 2026-05-21</a:t>
-            </a:r>
-          </a:p>
-          <a:p>
-            <a:r>
-              <a:t>작성자: dldnwls07</a:t>
-            </a:r>
-          </a:p>
-          <a:p>
-            <a:r>
-              <a:t>요약: chore: enable strict mode in frontend TypeScript configuration</a:t>
-            </a:r>
-          </a:p>
-          <a:p>
-            <a:r>
-              <a:t>SHA: 7206c4f</a:t>
+              <a:t>구조 개선</a:t>
+            </a:r>
+          </a:p>
+        </p:txBody>
+      </p:sp>
+      <p:sp>
+        <p:nvSpPr>
+          <p:cNvPr id="3" name="Content Placeholder 2"/>
+          <p:cNvSpPr>
+            <a:spLocks noGrp="1"/>
+          </p:cNvSpPr>
+          <p:nvPr>
+            <p:ph idx="1"/>
+          </p:nvPr>
+        </p:nvSpPr>
+        <p:spPr/>
+        <p:txBody>
+          <a:bodyPr/>
+          <a:lstStyle/>
+          <a:p>
+            <a:r>
+              <a:t>날짜: 2026-05-22</a:t>
+            </a:r>
+          </a:p>
+          <a:p>
+            <a:r>
+              <a:t>작성자: 원종우</a:t>
+            </a:r>
+          </a:p>
+          <a:p>
+            <a:r>
+              <a:t>요약: WebSocket 메시지 발신 표준화(WsEnvelope) 및 DTO 최적화</a:t>
+            </a:r>
+          </a:p>
+          <a:p/>
+          <a:p>
+            <a:r>
+              <a:t>- 프론트엔드 통신 표준화를 위한 공통 이벤트 래퍼 `WsEnvelope` 도입 (event, data, occurredAt, version)</a:t>
+            </a:r>
+          </a:p>
+          <a:p>
+            <a:r>
+              <a:t>- `DailyStandupService`, `MeetingRoomService`, `NotificationService`, `StatusService`, `WorkLogService`의 메시지 전송부를 `WsEnvelope` 규격으로 전면 교체 및 이벤트 명 상수화</a:t>
+            </a:r>
+          </a:p>
+          <a:p>
+            <a:r>
+              <a:t>- 브로드캐스트 전용 DTO를 `WsEnvelope.data` 구조에 맞게 경량화 (`TeamStatusBroadcast` -&gt; `TeamStatusPayload`)</a:t>
+            </a:r>
+          </a:p>
+          <a:p>
+            <a:r>
+              <a:t>- 각 도메인 서비스 내 Member 검증 중복 코드를 `getManagedMember` 등 헬퍼 메서드로 추출 및 알림 페이로드(roomPayload 등) 규격화</a:t>
+            </a:r>
+          </a:p>
+          <a:p>
+            <a:r>
+              <a:t>SHA: 2d0efae</a:t>
             </a:r>
           </a:p>
         </p:txBody>
@@ -8798,27 +8833,17 @@
           </a:p>
           <a:p>
             <a:r>
-              <a:t>작성자: 원종우</a:t>
-            </a:r>
-          </a:p>
-          <a:p>
-            <a:r>
-              <a:t>요약: SecurityConfig.java</a:t>
-            </a:r>
-          </a:p>
-          <a:p>
-            <a:r>
-              <a:t>스프링 시큐리티 필터 체인설정</a:t>
-            </a:r>
-          </a:p>
-          <a:p>
-            <a:r>
-              <a:t>CSRF 비활성화, CORS허용, H2 콘솔 접근 및 API 경로별 권한 정의</a:t>
-            </a:r>
-          </a:p>
-          <a:p>
-            <a:r>
-              <a:t>SHA: 99108a8</a:t>
+              <a:t>작성자: dldnwls07</a:t>
+            </a:r>
+          </a:p>
+          <a:p>
+            <a:r>
+              <a:t>요약: 잘못올라간 이미지 삭제</a:t>
+            </a:r>
+          </a:p>
+          <a:p>
+            <a:r>
+              <a:t>SHA: 2167919</a:t>
             </a:r>
           </a:p>
         </p:txBody>
@@ -8857,7 +8882,7 @@
           <a:lstStyle/>
           <a:p>
             <a:r>
-              <a:t>기능 개발</a:t>
+              <a:t>문서 작업</a:t>
             </a:r>
           </a:p>
         </p:txBody>
@@ -8888,12 +8913,12 @@
           </a:p>
           <a:p>
             <a:r>
-              <a:t>요약: import worksight-api from backend branch</a:t>
-            </a:r>
-          </a:p>
-          <a:p>
-            <a:r>
-              <a:t>SHA: 39b1196</a:t>
+              <a:t>요약: 프론트엔드 작업 현황 리포트 추가 (코드 제외)</a:t>
+            </a:r>
+          </a:p>
+          <a:p>
+            <a:r>
+              <a:t>SHA: 7d3faf0</a:t>
             </a:r>
           </a:p>
         </p:txBody>
@@ -8932,7 +8957,7 @@
           <a:lstStyle/>
           <a:p>
             <a:r>
-              <a:t>기타</a:t>
+              <a:t>기능 개발</a:t>
             </a:r>
           </a:p>
         </p:txBody>
@@ -8958,17 +8983,17 @@
           </a:p>
           <a:p>
             <a:r>
-              <a:t>작성자: 원종우</a:t>
-            </a:r>
-          </a:p>
-          <a:p>
-            <a:r>
-              <a:t>요약: add backend basic logic</a:t>
-            </a:r>
-          </a:p>
-          <a:p>
-            <a:r>
-              <a:t>SHA: d347752</a:t>
+              <a:t>작성자: dldnwls07</a:t>
+            </a:r>
+          </a:p>
+          <a:p>
+            <a:r>
+              <a:t>요약: 실제 백엔드 인증 시스템 연동 및 API 프록시 설정 추가</a:t>
+            </a:r>
+          </a:p>
+          <a:p>
+            <a:r>
+              <a:t>SHA: c200bba</a:t>
             </a:r>
           </a:p>
         </p:txBody>
@@ -9007,7 +9032,7 @@
           <a:lstStyle/>
           <a:p>
             <a:r>
-              <a:t>기타</a:t>
+              <a:t>버그 수정</a:t>
             </a:r>
           </a:p>
         </p:txBody>
@@ -9033,17 +9058,17 @@
           </a:p>
           <a:p>
             <a:r>
-              <a:t>작성자: 원종우</a:t>
-            </a:r>
-          </a:p>
-          <a:p>
-            <a:r>
-              <a:t>요약: gitattributes 업로드</a:t>
-            </a:r>
-          </a:p>
-          <a:p>
-            <a:r>
-              <a:t>SHA: 1aece09</a:t>
+              <a:t>작성자: dldnwls07</a:t>
+            </a:r>
+          </a:p>
+          <a:p>
+            <a:r>
+              <a:t>요약: Vite 웹소켓 호환성 해결 및 DashboardStats 타입 에러 수정</a:t>
+            </a:r>
+          </a:p>
+          <a:p>
+            <a:r>
+              <a:t>SHA: dd57ad5</a:t>
             </a:r>
           </a:p>
         </p:txBody>
@@ -9082,7 +9107,7 @@
           <a:lstStyle/>
           <a:p>
             <a:r>
-              <a:t>기타</a:t>
+              <a:t>기능 개발</a:t>
             </a:r>
           </a:p>
         </p:txBody>
@@ -9108,17 +9133,17 @@
           </a:p>
           <a:p>
             <a:r>
-              <a:t>작성자: 원종우</a:t>
-            </a:r>
-          </a:p>
-          <a:p>
-            <a:r>
-              <a:t>요약: 백엔드 폴더 내 gitignore 업로드</a:t>
-            </a:r>
-          </a:p>
-          <a:p>
-            <a:r>
-              <a:t>SHA: 2e9b813</a:t>
+              <a:t>작성자: dldnwls07</a:t>
+            </a:r>
+          </a:p>
+          <a:p>
+            <a:r>
+              <a:t>요약: 백엔드 API 연동 및 웹소켓 실시간 알림 기능 구현</a:t>
+            </a:r>
+          </a:p>
+          <a:p>
+            <a:r>
+              <a:t>SHA: ca7d14d</a:t>
             </a:r>
           </a:p>
         </p:txBody>
@@ -9183,17 +9208,17 @@
           </a:p>
           <a:p>
             <a:r>
-              <a:t>작성자: 원종우</a:t>
-            </a:r>
-          </a:p>
-          <a:p>
-            <a:r>
-              <a:t>요약: edit plan.txt</a:t>
-            </a:r>
-          </a:p>
-          <a:p>
-            <a:r>
-              <a:t>SHA: eca21fa</a:t>
+              <a:t>작성자: dldnwls07</a:t>
+            </a:r>
+          </a:p>
+          <a:p>
+            <a:r>
+              <a:t>요약: style: 레이아웃 텍스트 겹침 수정 및 불필요한 에셋 정리</a:t>
+            </a:r>
+          </a:p>
+          <a:p>
+            <a:r>
+              <a:t>SHA: 4ae07b7</a:t>
             </a:r>
           </a:p>
         </p:txBody>
@@ -9232,7 +9257,7 @@
           <a:lstStyle/>
           <a:p>
             <a:r>
-              <a:t>기타</a:t>
+              <a:t>기능 개발</a:t>
             </a:r>
           </a:p>
         </p:txBody>
@@ -9258,17 +9283,17 @@
           </a:p>
           <a:p>
             <a:r>
-              <a:t>작성자: 원종우</a:t>
-            </a:r>
-          </a:p>
-          <a:p>
-            <a:r>
-              <a:t>요약: dir test</a:t>
-            </a:r>
-          </a:p>
-          <a:p>
-            <a:r>
-              <a:t>SHA: 1f9e427</a:t>
+              <a:t>작성자: dldnwls07</a:t>
+            </a:r>
+          </a:p>
+          <a:p>
+            <a:r>
+              <a:t>요약: 프론트엔드 뼈대 구축 완료 (Home, Login, EmployeeView, Dashboard) 및 Mock 데이터 연결</a:t>
+            </a:r>
+          </a:p>
+          <a:p>
+            <a:r>
+              <a:t>SHA: 1d45732</a:t>
             </a:r>
           </a:p>
         </p:txBody>
@@ -9338,12 +9363,12 @@
           </a:p>
           <a:p>
             <a:r>
-              <a:t>요약: edit gitignore</a:t>
-            </a:r>
-          </a:p>
-          <a:p>
-            <a:r>
-              <a:t>SHA: d97fecd</a:t>
+              <a:t>요약: 폴더명 재정의</a:t>
+            </a:r>
+          </a:p>
+          <a:p>
+            <a:r>
+              <a:t>SHA: 7b05593</a:t>
             </a:r>
           </a:p>
         </p:txBody>
@@ -9382,7 +9407,7 @@
           <a:lstStyle/>
           <a:p>
             <a:r>
-              <a:t>기타</a:t>
+              <a:t>테스트</a:t>
             </a:r>
           </a:p>
         </p:txBody>
@@ -9413,12 +9438,12 @@
           </a:p>
           <a:p>
             <a:r>
-              <a:t>요약: delete test.txt</a:t>
-            </a:r>
-          </a:p>
-          <a:p>
-            <a:r>
-              <a:t>SHA: 988d4f2</a:t>
+              <a:t>요약: test-api.http: 회원가입, 로그인 더미데이터로 테스트하기</a:t>
+            </a:r>
+          </a:p>
+          <a:p>
+            <a:r>
+              <a:t>SHA: 496a9f0</a:t>
             </a:r>
           </a:p>
         </p:txBody>
@@ -9457,7 +9482,7 @@
           <a:lstStyle/>
           <a:p>
             <a:r>
-              <a:t>기타</a:t>
+              <a:t>테스트</a:t>
             </a:r>
           </a:p>
         </p:txBody>
@@ -9488,12 +9513,12 @@
           </a:p>
           <a:p>
             <a:r>
-              <a:t>요약: add gitignore</a:t>
-            </a:r>
-          </a:p>
-          <a:p>
-            <a:r>
-              <a:t>SHA: 32c467a</a:t>
+              <a:t>요약: test.html: 회원가입, 로그인 api 테스트</a:t>
+            </a:r>
+          </a:p>
+          <a:p>
+            <a:r>
+              <a:t>SHA: 658a53f</a:t>
             </a:r>
           </a:p>
         </p:txBody>
@@ -9532,28 +9557,28 @@
           <a:lstStyle/>
           <a:p>
             <a:r>
-              <a:t>구조 개선</a:t>
-            </a:r>
-          </a:p>
-        </p:txBody>
-      </p:sp>
-      <p:sp>
-        <p:nvSpPr>
-          <p:cNvPr id="3" name="Content Placeholder 2"/>
-          <p:cNvSpPr>
-            <a:spLocks noGrp="1"/>
-          </p:cNvSpPr>
-          <p:nvPr>
-            <p:ph idx="1"/>
-          </p:nvPr>
-        </p:nvSpPr>
-        <p:spPr/>
-        <p:txBody>
-          <a:bodyPr/>
-          <a:lstStyle/>
-          <a:p>
-            <a:r>
-              <a:t>날짜: 2026-05-21</a:t>
+              <a:t>문서 작업</a:t>
+            </a:r>
+          </a:p>
+        </p:txBody>
+      </p:sp>
+      <p:sp>
+        <p:nvSpPr>
+          <p:cNvPr id="3" name="Content Placeholder 2"/>
+          <p:cNvSpPr>
+            <a:spLocks noGrp="1"/>
+          </p:cNvSpPr>
+          <p:nvPr>
+            <p:ph idx="1"/>
+          </p:nvPr>
+        </p:nvSpPr>
+        <p:spPr/>
+        <p:txBody>
+          <a:bodyPr/>
+          <a:lstStyle/>
+          <a:p>
+            <a:r>
+              <a:t>날짜: 2026-05-22</a:t>
             </a:r>
           </a:p>
           <a:p>
@@ -9563,12 +9588,12 @@
           </a:p>
           <a:p>
             <a:r>
-              <a:t>요약: centralize status UI settings and update dashboard WebSocket event handling</a:t>
-            </a:r>
-          </a:p>
-          <a:p>
-            <a:r>
-              <a:t>SHA: 0814df8</a:t>
+              <a:t>요약: add audit specification for hardcoding structure mitigation</a:t>
+            </a:r>
+          </a:p>
+          <a:p>
+            <a:r>
+              <a:t>SHA: 46d4465</a:t>
             </a:r>
           </a:p>
         </p:txBody>
@@ -9638,12 +9663,12 @@
           </a:p>
           <a:p>
             <a:r>
-              <a:t>요약: Member.java: 회원 정보(id, pw, role, 잔액)를 담은 jpa 엔티티 정의</a:t>
-            </a:r>
-          </a:p>
-          <a:p>
-            <a:r>
-              <a:t>SHA: cc3bcf8</a:t>
+              <a:t>요약: h2 콘솔 대소문자 관련 설정 해제</a:t>
+            </a:r>
+          </a:p>
+          <a:p>
+            <a:r>
+              <a:t>SHA: 7ae3f6c</a:t>
             </a:r>
           </a:p>
         </p:txBody>
@@ -9708,17 +9733,17 @@
           </a:p>
           <a:p>
             <a:r>
-              <a:t>작성자: 원종우</a:t>
-            </a:r>
-          </a:p>
-          <a:p>
-            <a:r>
-              <a:t>요약: edit ai-team-standards.md</a:t>
-            </a:r>
-          </a:p>
-          <a:p>
-            <a:r>
-              <a:t>SHA: 5d1cefe</a:t>
+              <a:t>작성자: dldnwls07</a:t>
+            </a:r>
+          </a:p>
+          <a:p>
+            <a:r>
+              <a:t>요약: 프론트앤드개발계획서 및, 개발방향계획수정</a:t>
+            </a:r>
+          </a:p>
+          <a:p>
+            <a:r>
+              <a:t>SHA: ef101d2</a:t>
             </a:r>
           </a:p>
         </p:txBody>
@@ -9757,7 +9782,7 @@
           <a:lstStyle/>
           <a:p>
             <a:r>
-              <a:t>기타</a:t>
+              <a:t>기능 개발</a:t>
             </a:r>
           </a:p>
         </p:txBody>
@@ -9788,12 +9813,32 @@
           </a:p>
           <a:p>
             <a:r>
-              <a:t>요약: Restore test.txt</a:t>
-            </a:r>
-          </a:p>
-          <a:p>
-            <a:r>
-              <a:t>SHA: e4112db</a:t>
+              <a:t>요약: 프론트엔드 초기 아키텍처 설계 및 개발 환경 구축</a:t>
+            </a:r>
+          </a:p>
+          <a:p>
+            <a:r>
+              <a:t>- React + Vite + TypeScript 기반 프로젝트 초기화</a:t>
+            </a:r>
+          </a:p>
+          <a:p>
+            <a:r>
+              <a:t>- 주요 라이브러리 설치 (TailwindCSS, Zustand, React Router)</a:t>
+            </a:r>
+          </a:p>
+          <a:p>
+            <a:r>
+              <a:t>- 페이지별 빈 파일 및 폴더 구조(pages, components, store, lib) 생성</a:t>
+            </a:r>
+          </a:p>
+          <a:p>
+            <a:r>
+              <a:t>- 프론트엔드 개발 가이드라인(frontend_PipLine.md) 작성</a:t>
+            </a:r>
+          </a:p>
+          <a:p>
+            <a:r>
+              <a:t>SHA: 2aa9134</a:t>
             </a:r>
           </a:p>
         </p:txBody>
@@ -9858,17 +9903,17 @@
           </a:p>
           <a:p>
             <a:r>
-              <a:t>작성자: dldnwls07</a:t>
-            </a:r>
-          </a:p>
-          <a:p>
-            <a:r>
-              <a:t>요약: Merge remote-tracking branch 'origin/Jongwoo0101' into Jongwoo0101</a:t>
-            </a:r>
-          </a:p>
-          <a:p>
-            <a:r>
-              <a:t>SHA: 2aeb3fd</a:t>
+              <a:t>작성자: 원종우</a:t>
+            </a:r>
+          </a:p>
+          <a:p>
+            <a:r>
+              <a:t>요약: Role.java: 사용자 권한을 정의한 Enum (EMPLOYEE, MANAGER).</a:t>
+            </a:r>
+          </a:p>
+          <a:p>
+            <a:r>
+              <a:t>SHA: 3b64822</a:t>
             </a:r>
           </a:p>
         </p:txBody>
@@ -9933,17 +9978,17 @@
           </a:p>
           <a:p>
             <a:r>
-              <a:t>작성자: dldnwls07</a:t>
-            </a:r>
-          </a:p>
-          <a:p>
-            <a:r>
-              <a:t>요약: skills세팅 확인필요</a:t>
-            </a:r>
-          </a:p>
-          <a:p>
-            <a:r>
-              <a:t>SHA: 3f7a79f</a:t>
+              <a:t>작성자: 원종우</a:t>
+            </a:r>
+          </a:p>
+          <a:p>
+            <a:r>
+              <a:t>요약: MonitoringController.java: 실시간 업무 상태 전송 및 기록을 위한 컨트롤러.</a:t>
+            </a:r>
+          </a:p>
+          <a:p>
+            <a:r>
+              <a:t>SHA: 8f71819</a:t>
             </a:r>
           </a:p>
         </p:txBody>
@@ -10013,12 +10058,12 @@
           </a:p>
           <a:p>
             <a:r>
-              <a:t>요약: edit plan.txt</a:t>
-            </a:r>
-          </a:p>
-          <a:p>
-            <a:r>
-              <a:t>SHA: c7dc9db</a:t>
+              <a:t>요약: MonitoringService.java: 업무 상태 기록 및 분석 로직.</a:t>
+            </a:r>
+          </a:p>
+          <a:p>
+            <a:r>
+              <a:t>SHA: 87b6241</a:t>
             </a:r>
           </a:p>
         </p:txBody>
@@ -10088,12 +10133,12 @@
           </a:p>
           <a:p>
             <a:r>
-              <a:t>요약: delete test.txt</a:t>
-            </a:r>
-          </a:p>
-          <a:p>
-            <a:r>
-              <a:t>SHA: 927d5b1</a:t>
+              <a:t>요약: WorkEventRepository.java: 업무 이벤트 데이터 접근을 위한 인터페이스.</a:t>
+            </a:r>
+          </a:p>
+          <a:p>
+            <a:r>
+              <a:t>SHA: d0ea172</a:t>
             </a:r>
           </a:p>
         </p:txBody>
@@ -10163,12 +10208,12 @@
           </a:p>
           <a:p>
             <a:r>
-              <a:t>요약: add plan.txt</a:t>
-            </a:r>
-          </a:p>
-          <a:p>
-            <a:r>
-              <a:t>SHA: c6ab9fa</a:t>
+              <a:t>요약: MonitoringDto.java: 모니터링 데이터 전송을 위한 DTO.</a:t>
+            </a:r>
+          </a:p>
+          <a:p>
+            <a:r>
+              <a:t>SHA: 007cec6</a:t>
             </a:r>
           </a:p>
         </p:txBody>
@@ -10207,7 +10252,7 @@
           <a:lstStyle/>
           <a:p>
             <a:r>
-              <a:t>테스트</a:t>
+              <a:t>기타</a:t>
             </a:r>
           </a:p>
         </p:txBody>
@@ -10233,17 +10278,17 @@
           </a:p>
           <a:p>
             <a:r>
-              <a:t>작성자: dldnwls07</a:t>
-            </a:r>
-          </a:p>
-          <a:p>
-            <a:r>
-              <a:t>요약: test2</a:t>
-            </a:r>
-          </a:p>
-          <a:p>
-            <a:r>
-              <a:t>SHA: 9d0bcd5</a:t>
+              <a:t>작성자: 원종우</a:t>
+            </a:r>
+          </a:p>
+          <a:p>
+            <a:r>
+              <a:t>요약: EventType.java: 이벤트 종류를 정의한 Enum (NORMAL, AWAY, SLEEP 등).</a:t>
+            </a:r>
+          </a:p>
+          <a:p>
+            <a:r>
+              <a:t>SHA: b5fe1a1</a:t>
             </a:r>
           </a:p>
         </p:txBody>
@@ -10282,7 +10327,7 @@
           <a:lstStyle/>
           <a:p>
             <a:r>
-              <a:t>테스트</a:t>
+              <a:t>기타</a:t>
             </a:r>
           </a:p>
         </p:txBody>
@@ -10308,17 +10353,17 @@
           </a:p>
           <a:p>
             <a:r>
-              <a:t>작성자: dldnwls07</a:t>
-            </a:r>
-          </a:p>
-          <a:p>
-            <a:r>
-              <a:t>요약: test commit</a:t>
-            </a:r>
-          </a:p>
-          <a:p>
-            <a:r>
-              <a:t>SHA: 180a8d5</a:t>
+              <a:t>작성자: 원종우</a:t>
+            </a:r>
+          </a:p>
+          <a:p>
+            <a:r>
+              <a:t>요약: WorkEvent.java: 업무 중 발생하는 이벤트(상태 변경 등)를 기록하는 JPA 엔티티.</a:t>
+            </a:r>
+          </a:p>
+          <a:p>
+            <a:r>
+              <a:t>SHA: 6fff1f2</a:t>
             </a:r>
           </a:p>
         </p:txBody>
@@ -10378,7 +10423,7 @@
           <a:lstStyle/>
           <a:p>
             <a:r>
-              <a:t>날짜: 2026-05-21</a:t>
+              <a:t>날짜: 2026-05-22</a:t>
             </a:r>
           </a:p>
           <a:p>
@@ -10388,12 +10433,38 @@
           </a:p>
           <a:p>
             <a:r>
-              <a:t>요약: simplify joinRoom signature and optimize media stream management in video calls</a:t>
-            </a:r>
-          </a:p>
-          <a:p>
-            <a:r>
-              <a:t>SHA: 4ca0b48</a:t>
+              <a:t>요약: resolve frontend spec issues and fix shared state bug</a:t>
+            </a:r>
+          </a:p>
+          <a:p/>
+          <a:p>
+            <a:r>
+              <a:t>- Segregated Zustand commute store context per employee (fixed shared session bug)</a:t>
+            </a:r>
+          </a:p>
+          <a:p>
+            <a:r>
+              <a:t>- Standardized WebSocket message handling with WS envelope parser</a:t>
+            </a:r>
+          </a:p>
+          <a:p>
+            <a:r>
+              <a:t>- Unified time data sorting with epoch milliseconds</a:t>
+            </a:r>
+          </a:p>
+          <a:p>
+            <a:r>
+              <a:t>- Removed 'any' types for stronger type safety</a:t>
+            </a:r>
+          </a:p>
+          <a:p>
+            <a:r>
+              <a:t>- Separated router pages and content view files</a:t>
+            </a:r>
+          </a:p>
+          <a:p>
+            <a:r>
+              <a:t>SHA: 10b1c19</a:t>
             </a:r>
           </a:p>
         </p:txBody>
@@ -10432,6 +10503,231 @@
           <a:lstStyle/>
           <a:p>
             <a:r>
+              <a:t>기타</a:t>
+            </a:r>
+          </a:p>
+        </p:txBody>
+      </p:sp>
+      <p:sp>
+        <p:nvSpPr>
+          <p:cNvPr id="3" name="Content Placeholder 2"/>
+          <p:cNvSpPr>
+            <a:spLocks noGrp="1"/>
+          </p:cNvSpPr>
+          <p:nvPr>
+            <p:ph idx="1"/>
+          </p:nvPr>
+        </p:nvSpPr>
+        <p:spPr/>
+        <p:txBody>
+          <a:bodyPr/>
+          <a:lstStyle/>
+          <a:p>
+            <a:r>
+              <a:t>날짜: 2026-04-29</a:t>
+            </a:r>
+          </a:p>
+          <a:p>
+            <a:r>
+              <a:t>작성자: 원종우</a:t>
+            </a:r>
+          </a:p>
+          <a:p>
+            <a:r>
+              <a:t>요약: MemberController.java: 회원 관련 REST API 엔드포인트 구현.</a:t>
+            </a:r>
+          </a:p>
+          <a:p>
+            <a:r>
+              <a:t>SHA: 6ae8113</a:t>
+            </a:r>
+          </a:p>
+        </p:txBody>
+      </p:sp>
+    </p:spTree>
+  </p:cSld>
+  <p:clrMapOvr>
+    <a:masterClrMapping/>
+  </p:clrMapOvr>
+</p:sld>
+</file>
+
+<file path=ppt/slides/slide181.xml><?xml version="1.0" encoding="utf-8"?>
+<p:sld xmlns:a="http://schemas.openxmlformats.org/drawingml/2006/main" xmlns:p="http://schemas.openxmlformats.org/presentationml/2006/main" xmlns:r="http://schemas.openxmlformats.org/officeDocument/2006/relationships">
+  <p:cSld>
+    <p:spTree>
+      <p:nvGrpSpPr>
+        <p:cNvPr id="1" name=""/>
+        <p:cNvGrpSpPr/>
+        <p:nvPr/>
+      </p:nvGrpSpPr>
+      <p:grpSpPr/>
+      <p:sp>
+        <p:nvSpPr>
+          <p:cNvPr id="2" name="Title 1"/>
+          <p:cNvSpPr>
+            <a:spLocks noGrp="1"/>
+          </p:cNvSpPr>
+          <p:nvPr>
+            <p:ph type="title"/>
+          </p:nvPr>
+        </p:nvSpPr>
+        <p:spPr/>
+        <p:txBody>
+          <a:bodyPr/>
+          <a:lstStyle/>
+          <a:p>
+            <a:r>
+              <a:t>기타</a:t>
+            </a:r>
+          </a:p>
+        </p:txBody>
+      </p:sp>
+      <p:sp>
+        <p:nvSpPr>
+          <p:cNvPr id="3" name="Content Placeholder 2"/>
+          <p:cNvSpPr>
+            <a:spLocks noGrp="1"/>
+          </p:cNvSpPr>
+          <p:nvPr>
+            <p:ph idx="1"/>
+          </p:nvPr>
+        </p:nvSpPr>
+        <p:spPr/>
+        <p:txBody>
+          <a:bodyPr/>
+          <a:lstStyle/>
+          <a:p>
+            <a:r>
+              <a:t>날짜: 2026-04-29</a:t>
+            </a:r>
+          </a:p>
+          <a:p>
+            <a:r>
+              <a:t>작성자: 원종우</a:t>
+            </a:r>
+          </a:p>
+          <a:p>
+            <a:r>
+              <a:t>요약: MembersService.java: 회원 가입, 조회 등 핵심 비즈니스 로직 구현.</a:t>
+            </a:r>
+          </a:p>
+          <a:p>
+            <a:r>
+              <a:t>SHA: a67c5e2</a:t>
+            </a:r>
+          </a:p>
+        </p:txBody>
+      </p:sp>
+    </p:spTree>
+  </p:cSld>
+  <p:clrMapOvr>
+    <a:masterClrMapping/>
+  </p:clrMapOvr>
+</p:sld>
+</file>
+
+<file path=ppt/slides/slide182.xml><?xml version="1.0" encoding="utf-8"?>
+<p:sld xmlns:a="http://schemas.openxmlformats.org/drawingml/2006/main" xmlns:p="http://schemas.openxmlformats.org/presentationml/2006/main" xmlns:r="http://schemas.openxmlformats.org/officeDocument/2006/relationships">
+  <p:cSld>
+    <p:spTree>
+      <p:nvGrpSpPr>
+        <p:cNvPr id="1" name=""/>
+        <p:cNvGrpSpPr/>
+        <p:nvPr/>
+      </p:nvGrpSpPr>
+      <p:grpSpPr/>
+      <p:sp>
+        <p:nvSpPr>
+          <p:cNvPr id="2" name="Title 1"/>
+          <p:cNvSpPr>
+            <a:spLocks noGrp="1"/>
+          </p:cNvSpPr>
+          <p:nvPr>
+            <p:ph type="title"/>
+          </p:nvPr>
+        </p:nvSpPr>
+        <p:spPr/>
+        <p:txBody>
+          <a:bodyPr/>
+          <a:lstStyle/>
+          <a:p>
+            <a:r>
+              <a:t>기타</a:t>
+            </a:r>
+          </a:p>
+        </p:txBody>
+      </p:sp>
+      <p:sp>
+        <p:nvSpPr>
+          <p:cNvPr id="3" name="Content Placeholder 2"/>
+          <p:cNvSpPr>
+            <a:spLocks noGrp="1"/>
+          </p:cNvSpPr>
+          <p:nvPr>
+            <p:ph idx="1"/>
+          </p:nvPr>
+        </p:nvSpPr>
+        <p:spPr/>
+        <p:txBody>
+          <a:bodyPr/>
+          <a:lstStyle/>
+          <a:p>
+            <a:r>
+              <a:t>날짜: 2026-04-29</a:t>
+            </a:r>
+          </a:p>
+          <a:p>
+            <a:r>
+              <a:t>작성자: 원종우</a:t>
+            </a:r>
+          </a:p>
+          <a:p>
+            <a:r>
+              <a:t>요약: MemberRepository.java: DB 접근을 위한 Spring Data JPA 인터페이스.</a:t>
+            </a:r>
+          </a:p>
+          <a:p>
+            <a:r>
+              <a:t>SHA: cbaefd2</a:t>
+            </a:r>
+          </a:p>
+        </p:txBody>
+      </p:sp>
+    </p:spTree>
+  </p:cSld>
+  <p:clrMapOvr>
+    <a:masterClrMapping/>
+  </p:clrMapOvr>
+</p:sld>
+</file>
+
+<file path=ppt/slides/slide183.xml><?xml version="1.0" encoding="utf-8"?>
+<p:sld xmlns:a="http://schemas.openxmlformats.org/drawingml/2006/main" xmlns:p="http://schemas.openxmlformats.org/presentationml/2006/main" xmlns:r="http://schemas.openxmlformats.org/officeDocument/2006/relationships">
+  <p:cSld>
+    <p:spTree>
+      <p:nvGrpSpPr>
+        <p:cNvPr id="1" name=""/>
+        <p:cNvGrpSpPr/>
+        <p:nvPr/>
+      </p:nvGrpSpPr>
+      <p:grpSpPr/>
+      <p:sp>
+        <p:nvSpPr>
+          <p:cNvPr id="2" name="Title 1"/>
+          <p:cNvSpPr>
+            <a:spLocks noGrp="1"/>
+          </p:cNvSpPr>
+          <p:nvPr>
+            <p:ph type="title"/>
+          </p:nvPr>
+        </p:nvSpPr>
+        <p:spPr/>
+        <p:txBody>
+          <a:bodyPr/>
+          <a:lstStyle/>
+          <a:p>
+            <a:r>
               <a:t>테스트</a:t>
             </a:r>
           </a:p>
@@ -10507,69 +10803,43 @@
           <a:lstStyle/>
           <a:p>
             <a:r>
-              <a:t>기능 개발</a:t>
-            </a:r>
-          </a:p>
-        </p:txBody>
-      </p:sp>
-      <p:sp>
-        <p:nvSpPr>
-          <p:cNvPr id="3" name="Content Placeholder 2"/>
-          <p:cNvSpPr>
-            <a:spLocks noGrp="1"/>
-          </p:cNvSpPr>
-          <p:nvPr>
-            <p:ph idx="1"/>
-          </p:nvPr>
-        </p:nvSpPr>
-        <p:spPr/>
-        <p:txBody>
-          <a:bodyPr/>
-          <a:lstStyle/>
-          <a:p>
-            <a:r>
-              <a:t>날짜: 2026-05-20</a:t>
-            </a:r>
-          </a:p>
-          <a:p>
-            <a:r>
-              <a:t>작성자: 원종우</a:t>
-            </a:r>
-          </a:p>
-          <a:p>
-            <a:r>
-              <a:t>요약: 알림(Notification) 기능 구현 및 실시간 웹소켓 푸시 추가</a:t>
-            </a:r>
-          </a:p>
-          <a:p/>
-          <a:p>
-            <a:r>
-              <a:t>- 일반 알림(GENERAL) 및 중요 알림(IMPORTANT) 도메인 설계</a:t>
-            </a:r>
-          </a:p>
-          <a:p>
-            <a:r>
-              <a:t>- 중요 알림은 수신자가 WORKING/MEETING 상태일 때만 발송 가능하도록 유효성 검증 추가</a:t>
-            </a:r>
-          </a:p>
-          <a:p>
-            <a:r>
-              <a:t>- 트랜잭션 커밋 후 SimpMessagingTemplate을 활용한 WebSocket 실시간 푸시 발송</a:t>
-            </a:r>
-          </a:p>
-          <a:p>
-            <a:r>
-              <a:t>- 알림 전체/단건 조회, 읽지 않은 알림 수(Badge용) 및 읽음 처리 API 구현</a:t>
-            </a:r>
-          </a:p>
-          <a:p>
-            <a:r>
-              <a:t>- API 검증을 위한 HTTP 테스트 스크립트(.http) 작성</a:t>
-            </a:r>
-          </a:p>
-          <a:p>
-            <a:r>
-              <a:t>SHA: d386bf7</a:t>
+              <a:t>기타</a:t>
+            </a:r>
+          </a:p>
+        </p:txBody>
+      </p:sp>
+      <p:sp>
+        <p:nvSpPr>
+          <p:cNvPr id="3" name="Content Placeholder 2"/>
+          <p:cNvSpPr>
+            <a:spLocks noGrp="1"/>
+          </p:cNvSpPr>
+          <p:nvPr>
+            <p:ph idx="1"/>
+          </p:nvPr>
+        </p:nvSpPr>
+        <p:spPr/>
+        <p:txBody>
+          <a:bodyPr/>
+          <a:lstStyle/>
+          <a:p>
+            <a:r>
+              <a:t>날짜: 2026-05-21</a:t>
+            </a:r>
+          </a:p>
+          <a:p>
+            <a:r>
+              <a:t>작성자: dldnwls07</a:t>
+            </a:r>
+          </a:p>
+          <a:p>
+            <a:r>
+              <a:t>요약: chore: enable strict mode in frontend TypeScript configuration</a:t>
+            </a:r>
+          </a:p>
+          <a:p>
+            <a:r>
+              <a:t>SHA: 7206c4f</a:t>
             </a:r>
           </a:p>
         </p:txBody>
@@ -10629,7 +10899,7 @@
           <a:lstStyle/>
           <a:p>
             <a:r>
-              <a:t>원종우: 1 commits</a:t>
+              <a:t>070128o: 3 commits</a:t>
             </a:r>
           </a:p>
           <a:p/>
@@ -10669,28 +10939,28 @@
           <a:lstStyle/>
           <a:p>
             <a:r>
-              <a:t>문서 작업</a:t>
-            </a:r>
-          </a:p>
-        </p:txBody>
-      </p:sp>
-      <p:sp>
-        <p:nvSpPr>
-          <p:cNvPr id="3" name="Content Placeholder 2"/>
-          <p:cNvSpPr>
-            <a:spLocks noGrp="1"/>
-          </p:cNvSpPr>
-          <p:nvPr>
-            <p:ph idx="1"/>
-          </p:nvPr>
-        </p:nvSpPr>
-        <p:spPr/>
-        <p:txBody>
-          <a:bodyPr/>
-          <a:lstStyle/>
-          <a:p>
-            <a:r>
-              <a:t>날짜: 2026-05-20</a:t>
+              <a:t>구조 개선</a:t>
+            </a:r>
+          </a:p>
+        </p:txBody>
+      </p:sp>
+      <p:sp>
+        <p:nvSpPr>
+          <p:cNvPr id="3" name="Content Placeholder 2"/>
+          <p:cNvSpPr>
+            <a:spLocks noGrp="1"/>
+          </p:cNvSpPr>
+          <p:nvPr>
+            <p:ph idx="1"/>
+          </p:nvPr>
+        </p:nvSpPr>
+        <p:spPr/>
+        <p:txBody>
+          <a:bodyPr/>
+          <a:lstStyle/>
+          <a:p>
+            <a:r>
+              <a:t>날짜: 2026-05-21</a:t>
             </a:r>
           </a:p>
           <a:p>
@@ -10700,12 +10970,12 @@
           </a:p>
           <a:p>
             <a:r>
-              <a:t>요약: TODO.md 갱신 (Jongwoo0101 브랜치 병합 내역 추가)</a:t>
-            </a:r>
-          </a:p>
-          <a:p>
-            <a:r>
-              <a:t>SHA: e98baf7</a:t>
+              <a:t>요약: centralize status UI settings and update dashboard WebSocket event handling</a:t>
+            </a:r>
+          </a:p>
+          <a:p>
+            <a:r>
+              <a:t>SHA: 0814df8</a:t>
             </a:r>
           </a:p>
         </p:txBody>
@@ -10744,43 +11014,43 @@
           <a:lstStyle/>
           <a:p>
             <a:r>
-              <a:t>기타</a:t>
-            </a:r>
-          </a:p>
-        </p:txBody>
-      </p:sp>
-      <p:sp>
-        <p:nvSpPr>
-          <p:cNvPr id="3" name="Content Placeholder 2"/>
-          <p:cNvSpPr>
-            <a:spLocks noGrp="1"/>
-          </p:cNvSpPr>
-          <p:nvPr>
-            <p:ph idx="1"/>
-          </p:nvPr>
-        </p:nvSpPr>
-        <p:spPr/>
-        <p:txBody>
-          <a:bodyPr/>
-          <a:lstStyle/>
-          <a:p>
-            <a:r>
-              <a:t>날짜: 2026-05-20</a:t>
-            </a:r>
-          </a:p>
-          <a:p>
-            <a:r>
-              <a:t>작성자: 원종우</a:t>
-            </a:r>
-          </a:p>
-          <a:p>
-            <a:r>
-              <a:t>요약: chore: package-lock.json 수정</a:t>
-            </a:r>
-          </a:p>
-          <a:p>
-            <a:r>
-              <a:t>SHA: 4e67038</a:t>
+              <a:t>구조 개선</a:t>
+            </a:r>
+          </a:p>
+        </p:txBody>
+      </p:sp>
+      <p:sp>
+        <p:nvSpPr>
+          <p:cNvPr id="3" name="Content Placeholder 2"/>
+          <p:cNvSpPr>
+            <a:spLocks noGrp="1"/>
+          </p:cNvSpPr>
+          <p:nvPr>
+            <p:ph idx="1"/>
+          </p:nvPr>
+        </p:nvSpPr>
+        <p:spPr/>
+        <p:txBody>
+          <a:bodyPr/>
+          <a:lstStyle/>
+          <a:p>
+            <a:r>
+              <a:t>날짜: 2026-05-21</a:t>
+            </a:r>
+          </a:p>
+          <a:p>
+            <a:r>
+              <a:t>작성자: dldnwls07</a:t>
+            </a:r>
+          </a:p>
+          <a:p>
+            <a:r>
+              <a:t>요약: simplify joinRoom signature and optimize media stream management in video calls</a:t>
+            </a:r>
+          </a:p>
+          <a:p>
+            <a:r>
+              <a:t>SHA: 4ca0b48</a:t>
             </a:r>
           </a:p>
         </p:txBody>
@@ -10819,7 +11089,7 @@
           <a:lstStyle/>
           <a:p>
             <a:r>
-              <a:t>문서 작업</a:t>
+              <a:t>기타</a:t>
             </a:r>
           </a:p>
         </p:txBody>
@@ -10845,17 +11115,17 @@
           </a:p>
           <a:p>
             <a:r>
-              <a:t>작성자: 원종우</a:t>
-            </a:r>
-          </a:p>
-          <a:p>
-            <a:r>
-              <a:t>요약: api 명세서 수정</a:t>
-            </a:r>
-          </a:p>
-          <a:p>
-            <a:r>
-              <a:t>SHA: 8c72b97</a:t>
+              <a:t>작성자: 070128o</a:t>
+            </a:r>
+          </a:p>
+          <a:p>
+            <a:r>
+              <a:t>요약: Merge branch 'Jongwoo0101' of https://github.com/Jongwoo0101/genai-team-project into Jongwoo0101</a:t>
+            </a:r>
+          </a:p>
+          <a:p>
+            <a:r>
+              <a:t>SHA: 69eba90</a:t>
             </a:r>
           </a:p>
         </p:txBody>
@@ -10894,7 +11164,7 @@
           <a:lstStyle/>
           <a:p>
             <a:r>
-              <a:t>구조 개선</a:t>
+              <a:t>문서 작업</a:t>
             </a:r>
           </a:p>
         </p:txBody>
@@ -10925,12 +11195,12 @@
           </a:p>
           <a:p>
             <a:r>
-              <a:t>요약: status-api-test.http 경로 변경</a:t>
-            </a:r>
-          </a:p>
-          <a:p>
-            <a:r>
-              <a:t>SHA: 3180609</a:t>
+              <a:t>요약: 명세서 수정</a:t>
+            </a:r>
+          </a:p>
+          <a:p>
+            <a:r>
+              <a:t>SHA: 209a4f5</a:t>
             </a:r>
           </a:p>
         </p:txBody>
@@ -11000,43 +11270,33 @@
           </a:p>
           <a:p>
             <a:r>
-              <a:t>요약: 미팅룸 생성, 초대/참가 요청 및 실시간 이벤트 연동 기능 구현</a:t>
+              <a:t>요약: 상태 관리 API 구현 (StatusController, StatusService)</a:t>
             </a:r>
           </a:p>
           <a:p/>
           <a:p>
             <a:r>
-              <a:t>- MeetingRoom 및 MeetingParticipant 엔티티 설계 (초대 및 참여 요청 일원화 관리)</a:t>
-            </a:r>
-          </a:p>
-          <a:p>
-            <a:r>
-              <a:t>- 미팅룸 생성 및 참여(수락) 시 해당 회원의 상태를 MEETING으로 자동 변경하는 로직 구현</a:t>
-            </a:r>
-          </a:p>
-          <a:p>
-            <a:r>
-              <a:t>- 미팅룸 종료 및 퇴장 시 회원의 상태를 WORKING으로 복귀 처리</a:t>
-            </a:r>
-          </a:p>
-          <a:p>
-            <a:r>
-              <a:t>- 중복 참여 요청 방지 및 주최자 권한 검증 등 도메인 유효성 로직 추가</a:t>
-            </a:r>
-          </a:p>
-          <a:p>
-            <a:r>
-              <a:t>- 팀 전체 브로드캐스트 및 개인별 WebSocket 실시간 알림 기능 적용</a:t>
-            </a:r>
-          </a:p>
-          <a:p>
-            <a:r>
-              <a:t>- 미팅룸 생성/상세조회/참가/초대/종료/퇴장 관련 REST API 구현</a:t>
-            </a:r>
-          </a:p>
-          <a:p>
-            <a:r>
-              <a:t>SHA: 65b3319</a:t>
+              <a:t>- PUT /api/status/ai: AI 판별 상태 업데이트 (WORKING/MEETING/BREAK)</a:t>
+            </a:r>
+          </a:p>
+          <a:p>
+            <a:r>
+              <a:t>- PUT /api/status/manual: 사용자 수동 FOCUS 설정</a:t>
+            </a:r>
+          </a:p>
+          <a:p>
+            <a:r>
+              <a:t>- GET /api/status/team/{managerId}: 팀 전체 상태 조회</a:t>
+            </a:r>
+          </a:p>
+          <a:p>
+            <a:r>
+              <a:t>- 상태 변경 시 WebSocket 브로드캐스트 포함</a:t>
+            </a:r>
+          </a:p>
+          <a:p>
+            <a:r>
+              <a:t>SHA: 077973c</a:t>
             </a:r>
           </a:p>
         </p:txBody>
@@ -11106,12 +11366,12 @@
           </a:p>
           <a:p>
             <a:r>
-              <a:t>요약: chore: StatusType.java 주석 수정</a:t>
-            </a:r>
-          </a:p>
-          <a:p>
-            <a:r>
-              <a:t>SHA: eeea85e</a:t>
+              <a:t>요약: Merge remote-tracking branch 'origin/Jongwoo0101' into Jongwoo0101</a:t>
+            </a:r>
+          </a:p>
+          <a:p>
+            <a:r>
+              <a:t>SHA: 2dcfa89</a:t>
             </a:r>
           </a:p>
         </p:txBody>
@@ -11150,7 +11410,7 @@
           <a:lstStyle/>
           <a:p>
             <a:r>
-              <a:t>기타</a:t>
+              <a:t>테스트</a:t>
             </a:r>
           </a:p>
         </p:txBody>
@@ -11181,12 +11441,12 @@
           </a:p>
           <a:p>
             <a:r>
-              <a:t>요약: chore: StatusService.java 주석 수정</a:t>
-            </a:r>
-          </a:p>
-          <a:p>
-            <a:r>
-              <a:t>SHA: 09192c4</a:t>
+              <a:t>요약: api test 코드 수정</a:t>
+            </a:r>
+          </a:p>
+          <a:p>
+            <a:r>
+              <a:t>SHA: 1a35a0a</a:t>
             </a:r>
           </a:p>
         </p:txBody>
@@ -11256,12 +11516,12 @@
           </a:p>
           <a:p>
             <a:r>
-              <a:t>요약: chore: MemberStatusDto.java 주석 수정</a:t>
-            </a:r>
-          </a:p>
-          <a:p>
-            <a:r>
-              <a:t>SHA: fc82f2f</a:t>
+              <a:t>요약: chore: WorksightApiApplicationTests.java 삭제</a:t>
+            </a:r>
+          </a:p>
+          <a:p>
+            <a:r>
+              <a:t>SHA: 2464818</a:t>
             </a:r>
           </a:p>
         </p:txBody>
@@ -11300,7 +11560,7 @@
           <a:lstStyle/>
           <a:p>
             <a:r>
-              <a:t>기능 개발</a:t>
+              <a:t>구조 개선</a:t>
             </a:r>
           </a:p>
         </p:txBody>
@@ -11326,17 +11586,38 @@
           </a:p>
           <a:p>
             <a:r>
-              <a:t>작성자: dldnwls07</a:t>
-            </a:r>
-          </a:p>
-          <a:p>
-            <a:r>
-              <a:t>요약: initialize project dependencies and add smart-away system plan documentation</a:t>
-            </a:r>
-          </a:p>
-          <a:p>
-            <a:r>
-              <a:t>SHA: fae9c84</a:t>
+              <a:t>작성자: 원종우</a:t>
+            </a:r>
+          </a:p>
+          <a:p>
+            <a:r>
+              <a:t>요약: 모니터링 기반 근태 시스템 제거</a:t>
+            </a:r>
+          </a:p>
+          <a:p/>
+          <a:p>
+            <a:r>
+              <a:t>- EventType, WorkEvent, WorkEventRepository 삭제</a:t>
+            </a:r>
+          </a:p>
+          <a:p>
+            <a:r>
+              <a:t>- MonitoringController, MonitoringService, MonitoringDto 삭제</a:t>
+            </a:r>
+          </a:p>
+          <a:p>
+            <a:r>
+              <a:t>- MonitoringServiceTest 삭제</a:t>
+            </a:r>
+          </a:p>
+          <a:p>
+            <a:r>
+              <a:t>- 비대면 근무 솔루션 기획 변경에 따른 정리</a:t>
+            </a:r>
+          </a:p>
+          <a:p>
+            <a:r>
+              <a:t>SHA: 2f71617</a:t>
             </a:r>
           </a:p>
         </p:txBody>
@@ -11375,7 +11656,7 @@
           <a:lstStyle/>
           <a:p>
             <a:r>
-              <a:t>기능 개발</a:t>
+              <a:t>구조 개선</a:t>
             </a:r>
           </a:p>
         </p:txBody>
@@ -11401,17 +11682,38 @@
           </a:p>
           <a:p>
             <a:r>
-              <a:t>작성자: dldnwls07</a:t>
-            </a:r>
-          </a:p>
-          <a:p>
-            <a:r>
-              <a:t>요약: align AI model and frontend with backend StatusType (WORKING/MEETING/BREAK) and remove SMARTPHONE/SLEEP</a:t>
-            </a:r>
-          </a:p>
-          <a:p>
-            <a:r>
-              <a:t>SHA: 36133d1</a:t>
+              <a:t>작성자: 원종우</a:t>
+            </a:r>
+          </a:p>
+          <a:p>
+            <a:r>
+              <a:t>요약: 모니터링 기반 근태 시스템 제거</a:t>
+            </a:r>
+          </a:p>
+          <a:p/>
+          <a:p>
+            <a:r>
+              <a:t>- EventType, WorkEvent, WorkEventRepository 삭제</a:t>
+            </a:r>
+          </a:p>
+          <a:p>
+            <a:r>
+              <a:t>- MonitoringController, MonitoringService, MonitoringDto 삭제</a:t>
+            </a:r>
+          </a:p>
+          <a:p>
+            <a:r>
+              <a:t>- MonitoringServiceTest 삭제</a:t>
+            </a:r>
+          </a:p>
+          <a:p>
+            <a:r>
+              <a:t>- 비대면 근무 솔루션 기획 변경에 따른 정리</a:t>
+            </a:r>
+          </a:p>
+          <a:p>
+            <a:r>
+              <a:t>SHA: bd3f72e</a:t>
             </a:r>
           </a:p>
         </p:txBody>
@@ -11471,12 +11773,12 @@
           <a:lstStyle/>
           <a:p>
             <a:r>
-              <a:t>2026-05-24</a:t>
-            </a:r>
-          </a:p>
-          <a:p>
-            <a:r>
-              <a:t>- just for commit bot test. ignore this commit 22</a:t>
+              <a:t>2026-05-27</a:t>
+            </a:r>
+          </a:p>
+          <a:p>
+            <a:r>
+              <a:t>- work woojin!! hurry up</a:t>
             </a:r>
           </a:p>
           <a:p/>
@@ -11548,12 +11850,12 @@
           </a:p>
           <a:p>
             <a:r>
-              <a:t>요약: it will mabye...last..commit??</a:t>
-            </a:r>
-          </a:p>
-          <a:p>
-            <a:r>
-              <a:t>SHA: 256c63b</a:t>
+              <a:t>요약: 찐찐찐막입니다..</a:t>
+            </a:r>
+          </a:p>
+          <a:p>
+            <a:r>
+              <a:t>SHA: 10379e7</a:t>
             </a:r>
           </a:p>
         </p:txBody>
@@ -11592,7 +11894,7 @@
           <a:lstStyle/>
           <a:p>
             <a:r>
-              <a:t>기타</a:t>
+              <a:t>테스트</a:t>
             </a:r>
           </a:p>
         </p:txBody>
@@ -11618,17 +11920,17 @@
           </a:p>
           <a:p>
             <a:r>
-              <a:t>작성자: 070128o</a:t>
-            </a:r>
-          </a:p>
-          <a:p>
-            <a:r>
-              <a:t>요약: &lt;기획&gt;commit im sorry</a:t>
-            </a:r>
-          </a:p>
-          <a:p>
-            <a:r>
-              <a:t>SHA: f2cba2c</a:t>
+              <a:t>작성자: 원종우</a:t>
+            </a:r>
+          </a:p>
+          <a:p>
+            <a:r>
+              <a:t>요약: 테스트 코드 수정</a:t>
+            </a:r>
+          </a:p>
+          <a:p>
+            <a:r>
+              <a:t>SHA: be0679d</a:t>
             </a:r>
           </a:p>
         </p:txBody>
@@ -11693,17 +11995,17 @@
           </a:p>
           <a:p>
             <a:r>
-              <a:t>작성자: dldnwls07</a:t>
-            </a:r>
-          </a:p>
-          <a:p>
-            <a:r>
-              <a:t>요약: chore: origin/Jongwoo0101 브랜치의 test.css, test.html, test.js 파일 복원</a:t>
-            </a:r>
-          </a:p>
-          <a:p>
-            <a:r>
-              <a:t>SHA: ec2f075</a:t>
+              <a:t>작성자: 070128o</a:t>
+            </a:r>
+          </a:p>
+          <a:p>
+            <a:r>
+              <a:t>요약: 찐찐막?</a:t>
+            </a:r>
+          </a:p>
+          <a:p>
+            <a:r>
+              <a:t>SHA: 1f86775</a:t>
             </a:r>
           </a:p>
         </p:txBody>
@@ -11768,17 +12070,17 @@
           </a:p>
           <a:p>
             <a:r>
-              <a:t>작성자: 원종우</a:t>
-            </a:r>
-          </a:p>
-          <a:p>
-            <a:r>
-              <a:t>요약: chore: status-api-test.http 내에 오타 수정</a:t>
-            </a:r>
-          </a:p>
-          <a:p>
-            <a:r>
-              <a:t>SHA: 426131e</a:t>
+              <a:t>작성자: 070128o</a:t>
+            </a:r>
+          </a:p>
+          <a:p>
+            <a:r>
+              <a:t>요약: 진짜레전드완벽이다이거</a:t>
+            </a:r>
+          </a:p>
+          <a:p>
+            <a:r>
+              <a:t>SHA: dbff053</a:t>
             </a:r>
           </a:p>
         </p:txBody>
@@ -11843,17 +12145,17 @@
           </a:p>
           <a:p>
             <a:r>
-              <a:t>작성자: 070128o</a:t>
-            </a:r>
-          </a:p>
-          <a:p>
-            <a:r>
-              <a:t>요약: Merge branch 'Jongwoo0101' of https://github.com/Jongwoo0101/genai-team-project into Jongwoo0101</a:t>
-            </a:r>
-          </a:p>
-          <a:p>
-            <a:r>
-              <a:t>SHA: b571a15</a:t>
+              <a:t>작성자: dldnwls07</a:t>
+            </a:r>
+          </a:p>
+          <a:p>
+            <a:r>
+              <a:t>요약: Merge branch 'frontend' into Jongwoo0101</a:t>
+            </a:r>
+          </a:p>
+          <a:p>
+            <a:r>
+              <a:t>SHA: deb9562</a:t>
             </a:r>
           </a:p>
         </p:txBody>
@@ -11923,12 +12225,12 @@
           </a:p>
           <a:p>
             <a:r>
-              <a:t>요약: &lt;기획&gt;보완</a:t>
-            </a:r>
-          </a:p>
-          <a:p>
-            <a:r>
-              <a:t>SHA: 31323a2</a:t>
+              <a:t>요약: 다듬기 호호</a:t>
+            </a:r>
+          </a:p>
+          <a:p>
+            <a:r>
+              <a:t>SHA: 3f20abd</a:t>
             </a:r>
           </a:p>
         </p:txBody>
@@ -11967,7 +12269,7 @@
           <a:lstStyle/>
           <a:p>
             <a:r>
-              <a:t>기타</a:t>
+              <a:t>기능 개발</a:t>
             </a:r>
           </a:p>
         </p:txBody>
@@ -11998,12 +12300,12 @@
           </a:p>
           <a:p>
             <a:r>
-              <a:t>요약: merge: origin/Jongwoo0101 브랜치의 신규 백엔드 상태 관리 API 연동 반영</a:t>
-            </a:r>
-          </a:p>
-          <a:p>
-            <a:r>
-              <a:t>SHA: f9834bd</a:t>
+              <a:t>요약: feat(frontend): fix commute check-in bug, enable strict mode, and add stores</a:t>
+            </a:r>
+          </a:p>
+          <a:p>
+            <a:r>
+              <a:t>SHA: 185c1f1</a:t>
             </a:r>
           </a:p>
         </p:txBody>
@@ -12042,7 +12344,7 @@
           <a:lstStyle/>
           <a:p>
             <a:r>
-              <a:t>기타</a:t>
+              <a:t>기능 개발</a:t>
             </a:r>
           </a:p>
         </p:txBody>
@@ -12073,12 +12375,12 @@
           </a:p>
           <a:p>
             <a:r>
-              <a:t>요약: chore: 참조 끊어진 MonitoringServiceTest.java 삭제 및 테스트 빌드 정상화</a:t>
-            </a:r>
-          </a:p>
-          <a:p>
-            <a:r>
-              <a:t>SHA: e5978d3</a:t>
+              <a:t>요약: v2.0 API 연동 및 Option B Fallback 탑재 완료</a:t>
+            </a:r>
+          </a:p>
+          <a:p>
+            <a:r>
+              <a:t>SHA: 2fad780</a:t>
             </a:r>
           </a:p>
         </p:txBody>
@@ -12117,7 +12419,7 @@
           <a:lstStyle/>
           <a:p>
             <a:r>
-              <a:t>구조 개선</a:t>
+              <a:t>기타</a:t>
             </a:r>
           </a:p>
         </p:txBody>
@@ -12143,17 +12445,17 @@
           </a:p>
           <a:p>
             <a:r>
-              <a:t>작성자: 원종우</a:t>
-            </a:r>
-          </a:p>
-          <a:p>
-            <a:r>
-              <a:t>요약: Role.java 경로를 enums 패키지로 이동</a:t>
-            </a:r>
-          </a:p>
-          <a:p>
-            <a:r>
-              <a:t>SHA: 7f2e18c</a:t>
+              <a:t>작성자: 070128o</a:t>
+            </a:r>
+          </a:p>
+          <a:p>
+            <a:r>
+              <a:t>요약: Merge branch 'Jongwoo0101' of https://github.com/Jongwoo0101/genai-team-project into Jongwoo0101</a:t>
+            </a:r>
+          </a:p>
+          <a:p>
+            <a:r>
+              <a:t>SHA: 822e9ed</a:t>
             </a:r>
           </a:p>
         </p:txBody>
@@ -12192,7 +12494,7 @@
           <a:lstStyle/>
           <a:p>
             <a:r>
-              <a:t>기능 개발</a:t>
+              <a:t>기타</a:t>
             </a:r>
           </a:p>
         </p:txBody>
@@ -12218,48 +12520,17 @@
           </a:p>
           <a:p>
             <a:r>
-              <a:t>작성자: 원종우</a:t>
-            </a:r>
-          </a:p>
-          <a:p>
-            <a:r>
-              <a:t>요약: 데일리 스탠드업(목표/결과 작성) 기능 구현 및 실시간 연동</a:t>
-            </a:r>
-          </a:p>
-          <a:p/>
-          <a:p>
-            <a:r>
-              <a:t>- DailyStandup 엔티티 설계 (member_id + standupDate 유니크 제약 적용)</a:t>
-            </a:r>
-          </a:p>
-          <a:p>
-            <a:r>
-              <a:t>- 하루 시작 시 '오늘의 목표(Goal)' 생성 및 재호출 시 수정 기능 구현</a:t>
-            </a:r>
-          </a:p>
-          <a:p>
-            <a:r>
-              <a:t>- 하루 종료 시 '오늘의 결과(Result)' 작성 기능 구현 및 목표 선작성 유효성 체크 추가</a:t>
-            </a:r>
-          </a:p>
-          <a:p>
-            <a:r>
-              <a:t>- 내 오늘 스탠드업 조회 및 팀 전체 특정 날짜 스탠드업 조회 API 구현</a:t>
-            </a:r>
-          </a:p>
-          <a:p>
-            <a:r>
-              <a:t>- TransactionSynchronization을 활용한 목표/결과 업데이트 시 팀별 웹소켓 실시간 브로드캐스트 적용</a:t>
-            </a:r>
-          </a:p>
-          <a:p>
-            <a:r>
-              <a:t>- 기능 검증용 HTTP API 테스트 스크립트(.http) 작성</a:t>
-            </a:r>
-          </a:p>
-          <a:p>
-            <a:r>
-              <a:t>SHA: e35c560</a:t>
+              <a:t>작성자: 070128o</a:t>
+            </a:r>
+          </a:p>
+          <a:p>
+            <a:r>
+              <a:t>요약: plan.txt 파일 수정</a:t>
+            </a:r>
+          </a:p>
+          <a:p>
+            <a:r>
+              <a:t>SHA: c421ea3</a:t>
             </a:r>
           </a:p>
         </p:txBody>
@@ -12298,43 +12569,43 @@
           <a:lstStyle/>
           <a:p>
             <a:r>
-              <a:t>테스트</a:t>
-            </a:r>
-          </a:p>
-        </p:txBody>
-      </p:sp>
-      <p:sp>
-        <p:nvSpPr>
-          <p:cNvPr id="3" name="Content Placeholder 2"/>
-          <p:cNvSpPr>
-            <a:spLocks noGrp="1"/>
-          </p:cNvSpPr>
-          <p:nvPr>
-            <p:ph idx="1"/>
-          </p:nvPr>
-        </p:nvSpPr>
-        <p:spPr/>
-        <p:txBody>
-          <a:bodyPr/>
-          <a:lstStyle/>
-          <a:p>
-            <a:r>
-              <a:t>날짜: 2026-05-24</a:t>
-            </a:r>
-          </a:p>
-          <a:p>
-            <a:r>
-              <a:t>작성자: 원종우</a:t>
-            </a:r>
-          </a:p>
-          <a:p>
-            <a:r>
-              <a:t>요약: just for commit bot test. ignore this commit 22</a:t>
-            </a:r>
-          </a:p>
-          <a:p>
-            <a:r>
-              <a:t>SHA: 5f60a31</a:t>
+              <a:t>기타</a:t>
+            </a:r>
+          </a:p>
+        </p:txBody>
+      </p:sp>
+      <p:sp>
+        <p:nvSpPr>
+          <p:cNvPr id="3" name="Content Placeholder 2"/>
+          <p:cNvSpPr>
+            <a:spLocks noGrp="1"/>
+          </p:cNvSpPr>
+          <p:nvPr>
+            <p:ph idx="1"/>
+          </p:nvPr>
+        </p:nvSpPr>
+        <p:spPr/>
+        <p:txBody>
+          <a:bodyPr/>
+          <a:lstStyle/>
+          <a:p>
+            <a:r>
+              <a:t>날짜: 2026-05-27</a:t>
+            </a:r>
+          </a:p>
+          <a:p>
+            <a:r>
+              <a:t>작성자: 070128o</a:t>
+            </a:r>
+          </a:p>
+          <a:p>
+            <a:r>
+              <a:t>요약: work woojin!! hurry up</a:t>
+            </a:r>
+          </a:p>
+          <a:p>
+            <a:r>
+              <a:t>SHA: 734943d</a:t>
             </a:r>
           </a:p>
         </p:txBody>
@@ -12523,7 +12794,7 @@
           <a:lstStyle/>
           <a:p>
             <a:r>
-              <a:t>문서 작업</a:t>
+              <a:t>기능 개발</a:t>
             </a:r>
           </a:p>
         </p:txBody>
@@ -12554,12 +12825,17 @@
           </a:p>
           <a:p>
             <a:r>
-              <a:t>요약: 명세서 수정</a:t>
-            </a:r>
-          </a:p>
-          <a:p>
-            <a:r>
-              <a:t>SHA: 209a4f5</a:t>
+              <a:t>요약: 신규 엔드포인트 반영</a:t>
+            </a:r>
+          </a:p>
+          <a:p>
+            <a:r>
+              <a:t>WebSocketConfig.java</a:t>
+            </a:r>
+          </a:p>
+          <a:p>
+            <a:r>
+              <a:t>SHA: 37c1f34</a:t>
             </a:r>
           </a:p>
         </p:txBody>
@@ -12629,33 +12905,43 @@
           </a:p>
           <a:p>
             <a:r>
-              <a:t>요약: 상태 관리 API 구현 (StatusController, StatusService)</a:t>
+              <a:t>요약: 데일리 스탠드업(목표/결과 작성) 기능 구현 및 실시간 연동</a:t>
             </a:r>
           </a:p>
           <a:p/>
           <a:p>
             <a:r>
-              <a:t>- PUT /api/status/ai: AI 판별 상태 업데이트 (WORKING/MEETING/BREAK)</a:t>
-            </a:r>
-          </a:p>
-          <a:p>
-            <a:r>
-              <a:t>- PUT /api/status/manual: 사용자 수동 FOCUS 설정</a:t>
-            </a:r>
-          </a:p>
-          <a:p>
-            <a:r>
-              <a:t>- GET /api/status/team/{managerId}: 팀 전체 상태 조회</a:t>
-            </a:r>
-          </a:p>
-          <a:p>
-            <a:r>
-              <a:t>- 상태 변경 시 WebSocket 브로드캐스트 포함</a:t>
-            </a:r>
-          </a:p>
-          <a:p>
-            <a:r>
-              <a:t>SHA: 077973c</a:t>
+              <a:t>- DailyStandup 엔티티 설계 (member_id + standupDate 유니크 제약 적용)</a:t>
+            </a:r>
+          </a:p>
+          <a:p>
+            <a:r>
+              <a:t>- 하루 시작 시 '오늘의 목표(Goal)' 생성 및 재호출 시 수정 기능 구현</a:t>
+            </a:r>
+          </a:p>
+          <a:p>
+            <a:r>
+              <a:t>- 하루 종료 시 '오늘의 결과(Result)' 작성 기능 구현 및 목표 선작성 유효성 체크 추가</a:t>
+            </a:r>
+          </a:p>
+          <a:p>
+            <a:r>
+              <a:t>- 내 오늘 스탠드업 조회 및 팀 전체 특정 날짜 스탠드업 조회 API 구현</a:t>
+            </a:r>
+          </a:p>
+          <a:p>
+            <a:r>
+              <a:t>- TransactionSynchronization을 활용한 목표/결과 업데이트 시 팀별 웹소켓 실시간 브로드캐스트 적용</a:t>
+            </a:r>
+          </a:p>
+          <a:p>
+            <a:r>
+              <a:t>- 기능 검증용 HTTP API 테스트 스크립트(.http) 작성</a:t>
+            </a:r>
+          </a:p>
+          <a:p>
+            <a:r>
+              <a:t>SHA: e35c560</a:t>
             </a:r>
           </a:p>
         </p:txBody>
@@ -12694,7 +12980,7 @@
           <a:lstStyle/>
           <a:p>
             <a:r>
-              <a:t>기타</a:t>
+              <a:t>기능 개발</a:t>
             </a:r>
           </a:p>
         </p:txBody>
@@ -12720,17 +13006,17 @@
           </a:p>
           <a:p>
             <a:r>
-              <a:t>작성자: 원종우</a:t>
-            </a:r>
-          </a:p>
-          <a:p>
-            <a:r>
-              <a:t>요약: Merge remote-tracking branch 'origin/Jongwoo0101' into Jongwoo0101</a:t>
-            </a:r>
-          </a:p>
-          <a:p>
-            <a:r>
-              <a:t>SHA: 2dcfa89</a:t>
+              <a:t>작성자: dldnwls07</a:t>
+            </a:r>
+          </a:p>
+          <a:p>
+            <a:r>
+              <a:t>요약: initialize project dependencies and add smart-away system plan documentation</a:t>
+            </a:r>
+          </a:p>
+          <a:p>
+            <a:r>
+              <a:t>SHA: fae9c84</a:t>
             </a:r>
           </a:p>
         </p:txBody>
@@ -12769,7 +13055,7 @@
           <a:lstStyle/>
           <a:p>
             <a:r>
-              <a:t>기능 개발</a:t>
+              <a:t>문서 작업</a:t>
             </a:r>
           </a:p>
         </p:txBody>
@@ -12795,22 +13081,17 @@
           </a:p>
           <a:p>
             <a:r>
-              <a:t>작성자: 원종우</a:t>
-            </a:r>
-          </a:p>
-          <a:p>
-            <a:r>
-              <a:t>요약: 신규 엔드포인트 반영</a:t>
-            </a:r>
-          </a:p>
-          <a:p>
-            <a:r>
-              <a:t>WebSocketConfig.java</a:t>
-            </a:r>
-          </a:p>
-          <a:p>
-            <a:r>
-              <a:t>SHA: 37c1f34</a:t>
+              <a:t>작성자: dldnwls07</a:t>
+            </a:r>
+          </a:p>
+          <a:p>
+            <a:r>
+              <a:t>요약: TODO.md 갱신 (Jongwoo0101 브랜치 병합 내역 추가)</a:t>
+            </a:r>
+          </a:p>
+          <a:p>
+            <a:r>
+              <a:t>SHA: e98baf7</a:t>
             </a:r>
           </a:p>
         </p:txBody>
@@ -12849,7 +13130,7 @@
           <a:lstStyle/>
           <a:p>
             <a:r>
-              <a:t>테스트</a:t>
+              <a:t>기타</a:t>
             </a:r>
           </a:p>
         </p:txBody>
@@ -12880,12 +13161,12 @@
           </a:p>
           <a:p>
             <a:r>
-              <a:t>요약: api test 코드 수정</a:t>
-            </a:r>
-          </a:p>
-          <a:p>
-            <a:r>
-              <a:t>SHA: 1a35a0a</a:t>
+              <a:t>요약: chore: package-lock.json 수정</a:t>
+            </a:r>
+          </a:p>
+          <a:p>
+            <a:r>
+              <a:t>SHA: 4e67038</a:t>
             </a:r>
           </a:p>
         </p:txBody>
@@ -12924,7 +13205,7 @@
           <a:lstStyle/>
           <a:p>
             <a:r>
-              <a:t>기타</a:t>
+              <a:t>문서 작업</a:t>
             </a:r>
           </a:p>
         </p:txBody>
@@ -12955,12 +13236,12 @@
           </a:p>
           <a:p>
             <a:r>
-              <a:t>요약: chore: WorksightApiApplicationTests.java 삭제</a:t>
-            </a:r>
-          </a:p>
-          <a:p>
-            <a:r>
-              <a:t>SHA: 2464818</a:t>
+              <a:t>요약: api 명세서 수정</a:t>
+            </a:r>
+          </a:p>
+          <a:p>
+            <a:r>
+              <a:t>SHA: 8c72b97</a:t>
             </a:r>
           </a:p>
         </p:txBody>
@@ -13030,33 +13311,12 @@
           </a:p>
           <a:p>
             <a:r>
-              <a:t>요약: 모니터링 기반 근태 시스템 제거</a:t>
-            </a:r>
-          </a:p>
-          <a:p/>
-          <a:p>
-            <a:r>
-              <a:t>- EventType, WorkEvent, WorkEventRepository 삭제</a:t>
-            </a:r>
-          </a:p>
-          <a:p>
-            <a:r>
-              <a:t>- MonitoringController, MonitoringService, MonitoringDto 삭제</a:t>
-            </a:r>
-          </a:p>
-          <a:p>
-            <a:r>
-              <a:t>- MonitoringServiceTest 삭제</a:t>
-            </a:r>
-          </a:p>
-          <a:p>
-            <a:r>
-              <a:t>- 비대면 근무 솔루션 기획 변경에 따른 정리</a:t>
-            </a:r>
-          </a:p>
-          <a:p>
-            <a:r>
-              <a:t>SHA: 2f71617</a:t>
+              <a:t>요약: status-api-test.http 경로 변경</a:t>
+            </a:r>
+          </a:p>
+          <a:p>
+            <a:r>
+              <a:t>SHA: 3180609</a:t>
             </a:r>
           </a:p>
         </p:txBody>
@@ -13095,7 +13355,7 @@
           <a:lstStyle/>
           <a:p>
             <a:r>
-              <a:t>구조 개선</a:t>
+              <a:t>기능 개발</a:t>
             </a:r>
           </a:p>
         </p:txBody>
@@ -13126,33 +13386,43 @@
           </a:p>
           <a:p>
             <a:r>
-              <a:t>요약: 모니터링 기반 근태 시스템 제거</a:t>
+              <a:t>요약: 미팅룸 생성, 초대/참가 요청 및 실시간 이벤트 연동 기능 구현</a:t>
             </a:r>
           </a:p>
           <a:p/>
           <a:p>
             <a:r>
-              <a:t>- EventType, WorkEvent, WorkEventRepository 삭제</a:t>
-            </a:r>
-          </a:p>
-          <a:p>
-            <a:r>
-              <a:t>- MonitoringController, MonitoringService, MonitoringDto 삭제</a:t>
-            </a:r>
-          </a:p>
-          <a:p>
-            <a:r>
-              <a:t>- MonitoringServiceTest 삭제</a:t>
-            </a:r>
-          </a:p>
-          <a:p>
-            <a:r>
-              <a:t>- 비대면 근무 솔루션 기획 변경에 따른 정리</a:t>
-            </a:r>
-          </a:p>
-          <a:p>
-            <a:r>
-              <a:t>SHA: bd3f72e</a:t>
+              <a:t>- MeetingRoom 및 MeetingParticipant 엔티티 설계 (초대 및 참여 요청 일원화 관리)</a:t>
+            </a:r>
+          </a:p>
+          <a:p>
+            <a:r>
+              <a:t>- 미팅룸 생성 및 참여(수락) 시 해당 회원의 상태를 MEETING으로 자동 변경하는 로직 구현</a:t>
+            </a:r>
+          </a:p>
+          <a:p>
+            <a:r>
+              <a:t>- 미팅룸 종료 및 퇴장 시 회원의 상태를 WORKING으로 복귀 처리</a:t>
+            </a:r>
+          </a:p>
+          <a:p>
+            <a:r>
+              <a:t>- 중복 참여 요청 방지 및 주최자 권한 검증 등 도메인 유효성 로직 추가</a:t>
+            </a:r>
+          </a:p>
+          <a:p>
+            <a:r>
+              <a:t>- 팀 전체 브로드캐스트 및 개인별 WebSocket 실시간 알림 기능 적용</a:t>
+            </a:r>
+          </a:p>
+          <a:p>
+            <a:r>
+              <a:t>- 미팅룸 생성/상세조회/참가/초대/종료/퇴장 관련 REST API 구현</a:t>
+            </a:r>
+          </a:p>
+          <a:p>
+            <a:r>
+              <a:t>SHA: 65b3319</a:t>
             </a:r>
           </a:p>
         </p:txBody>
@@ -13191,49 +13461,43 @@
           <a:lstStyle/>
           <a:p>
             <a:r>
-              <a:t>기타 (PR Merge)</a:t>
-            </a:r>
-          </a:p>
-        </p:txBody>
-      </p:sp>
-      <p:sp>
-        <p:nvSpPr>
-          <p:cNvPr id="3" name="Content Placeholder 2"/>
-          <p:cNvSpPr>
-            <a:spLocks noGrp="1"/>
-          </p:cNvSpPr>
-          <p:nvPr>
-            <p:ph idx="1"/>
-          </p:nvPr>
-        </p:nvSpPr>
-        <p:spPr/>
-        <p:txBody>
-          <a:bodyPr/>
-          <a:lstStyle/>
-          <a:p>
-            <a:r>
-              <a:t>날짜: 2026-05-24</a:t>
-            </a:r>
-          </a:p>
-          <a:p>
-            <a:r>
-              <a:t>작성자: 원종우</a:t>
-            </a:r>
-          </a:p>
-          <a:p>
-            <a:r>
-              <a:t>요약: Merge pull request #6 from Jongwoo0101/feature/frontend-refactor-and-bugfix</a:t>
-            </a:r>
-          </a:p>
-          <a:p/>
-          <a:p>
-            <a:r>
-              <a:t> resolve frontend spec issues and fix shared state bug</a:t>
-            </a:r>
-          </a:p>
-          <a:p>
-            <a:r>
-              <a:t>SHA: 223e97a</a:t>
+              <a:t>기타</a:t>
+            </a:r>
+          </a:p>
+        </p:txBody>
+      </p:sp>
+      <p:sp>
+        <p:nvSpPr>
+          <p:cNvPr id="3" name="Content Placeholder 2"/>
+          <p:cNvSpPr>
+            <a:spLocks noGrp="1"/>
+          </p:cNvSpPr>
+          <p:nvPr>
+            <p:ph idx="1"/>
+          </p:nvPr>
+        </p:nvSpPr>
+        <p:spPr/>
+        <p:txBody>
+          <a:bodyPr/>
+          <a:lstStyle/>
+          <a:p>
+            <a:r>
+              <a:t>날짜: 2026-05-27</a:t>
+            </a:r>
+          </a:p>
+          <a:p>
+            <a:r>
+              <a:t>작성자: 070128o</a:t>
+            </a:r>
+          </a:p>
+          <a:p>
+            <a:r>
+              <a:t>요약: work woojin!!</a:t>
+            </a:r>
+          </a:p>
+          <a:p>
+            <a:r>
+              <a:t>SHA: 65fcc69</a:t>
             </a:r>
           </a:p>
         </p:txBody>
@@ -13298,17 +13562,17 @@
           </a:p>
           <a:p>
             <a:r>
-              <a:t>작성자: 070128o</a:t>
-            </a:r>
-          </a:p>
-          <a:p>
-            <a:r>
-              <a:t>요약: 찐찐찐막입니다..</a:t>
-            </a:r>
-          </a:p>
-          <a:p>
-            <a:r>
-              <a:t>SHA: 10379e7</a:t>
+              <a:t>작성자: 원종우</a:t>
+            </a:r>
+          </a:p>
+          <a:p>
+            <a:r>
+              <a:t>요약: chore: StatusType.java 주석 수정</a:t>
+            </a:r>
+          </a:p>
+          <a:p>
+            <a:r>
+              <a:t>SHA: eeea85e</a:t>
             </a:r>
           </a:p>
         </p:txBody>
@@ -13373,17 +13637,17 @@
           </a:p>
           <a:p>
             <a:r>
-              <a:t>작성자: 070128o</a:t>
-            </a:r>
-          </a:p>
-          <a:p>
-            <a:r>
-              <a:t>요약: Merge branch 'Jongwoo0101' of https://github.com/Jongwoo0101/genai-team-project into Jongwoo0101</a:t>
-            </a:r>
-          </a:p>
-          <a:p>
-            <a:r>
-              <a:t>SHA: 69eba90</a:t>
+              <a:t>작성자: 원종우</a:t>
+            </a:r>
+          </a:p>
+          <a:p>
+            <a:r>
+              <a:t>요약: chore: StatusService.java 주석 수정</a:t>
+            </a:r>
+          </a:p>
+          <a:p>
+            <a:r>
+              <a:t>SHA: 09192c4</a:t>
             </a:r>
           </a:p>
         </p:txBody>
@@ -13448,17 +13712,17 @@
           </a:p>
           <a:p>
             <a:r>
-              <a:t>작성자: 070128o</a:t>
-            </a:r>
-          </a:p>
-          <a:p>
-            <a:r>
-              <a:t>요약: 찐찐막?</a:t>
-            </a:r>
-          </a:p>
-          <a:p>
-            <a:r>
-              <a:t>SHA: 1f86775</a:t>
+              <a:t>작성자: 원종우</a:t>
+            </a:r>
+          </a:p>
+          <a:p>
+            <a:r>
+              <a:t>요약: chore: MemberStatusDto.java 주석 수정</a:t>
+            </a:r>
+          </a:p>
+          <a:p>
+            <a:r>
+              <a:t>SHA: fc82f2f</a:t>
             </a:r>
           </a:p>
         </p:txBody>
@@ -13497,7 +13761,7 @@
           <a:lstStyle/>
           <a:p>
             <a:r>
-              <a:t>기타</a:t>
+              <a:t>기능 개발</a:t>
             </a:r>
           </a:p>
         </p:txBody>
@@ -13523,17 +13787,17 @@
           </a:p>
           <a:p>
             <a:r>
-              <a:t>작성자: 070128o</a:t>
-            </a:r>
-          </a:p>
-          <a:p>
-            <a:r>
-              <a:t>요약: 진짜레전드완벽이다이거</a:t>
-            </a:r>
-          </a:p>
-          <a:p>
-            <a:r>
-              <a:t>SHA: dbff053</a:t>
+              <a:t>작성자: dldnwls07</a:t>
+            </a:r>
+          </a:p>
+          <a:p>
+            <a:r>
+              <a:t>요약: align AI model and frontend with backend StatusType (WORKING/MEETING/BREAK) and remove SMARTPHONE/SLEEP</a:t>
+            </a:r>
+          </a:p>
+          <a:p>
+            <a:r>
+              <a:t>SHA: 36133d1</a:t>
             </a:r>
           </a:p>
         </p:txBody>
@@ -13598,17 +13862,17 @@
           </a:p>
           <a:p>
             <a:r>
-              <a:t>작성자: dldnwls07</a:t>
-            </a:r>
-          </a:p>
-          <a:p>
-            <a:r>
-              <a:t>요약: Merge branch 'frontend' into Jongwoo0101</a:t>
-            </a:r>
-          </a:p>
-          <a:p>
-            <a:r>
-              <a:t>SHA: deb9562</a:t>
+              <a:t>작성자: 070128o</a:t>
+            </a:r>
+          </a:p>
+          <a:p>
+            <a:r>
+              <a:t>요약: it will mabye...last..commit??</a:t>
+            </a:r>
+          </a:p>
+          <a:p>
+            <a:r>
+              <a:t>SHA: 256c63b</a:t>
             </a:r>
           </a:p>
         </p:txBody>
@@ -13678,12 +13942,12 @@
           </a:p>
           <a:p>
             <a:r>
-              <a:t>요약: 다듬기 호호</a:t>
-            </a:r>
-          </a:p>
-          <a:p>
-            <a:r>
-              <a:t>SHA: 3f20abd</a:t>
+              <a:t>요약: &lt;기획&gt;commit im sorry</a:t>
+            </a:r>
+          </a:p>
+          <a:p>
+            <a:r>
+              <a:t>SHA: f2cba2c</a:t>
             </a:r>
           </a:p>
         </p:txBody>
@@ -13722,7 +13986,7 @@
           <a:lstStyle/>
           <a:p>
             <a:r>
-              <a:t>기능 개발</a:t>
+              <a:t>기타</a:t>
             </a:r>
           </a:p>
         </p:txBody>
@@ -13753,12 +14017,12 @@
           </a:p>
           <a:p>
             <a:r>
-              <a:t>요약: feat(frontend): fix commute check-in bug, enable strict mode, and add stores</a:t>
-            </a:r>
-          </a:p>
-          <a:p>
-            <a:r>
-              <a:t>SHA: 185c1f1</a:t>
+              <a:t>요약: chore: origin/Jongwoo0101 브랜치의 test.css, test.html, test.js 파일 복원</a:t>
+            </a:r>
+          </a:p>
+          <a:p>
+            <a:r>
+              <a:t>SHA: ec2f075</a:t>
             </a:r>
           </a:p>
         </p:txBody>
@@ -13797,7 +14061,7 @@
           <a:lstStyle/>
           <a:p>
             <a:r>
-              <a:t>기능 개발</a:t>
+              <a:t>기타</a:t>
             </a:r>
           </a:p>
         </p:txBody>
@@ -13823,17 +14087,17 @@
           </a:p>
           <a:p>
             <a:r>
-              <a:t>작성자: dldnwls07</a:t>
-            </a:r>
-          </a:p>
-          <a:p>
-            <a:r>
-              <a:t>요약: v2.0 API 연동 및 Option B Fallback 탑재 완료</a:t>
-            </a:r>
-          </a:p>
-          <a:p>
-            <a:r>
-              <a:t>SHA: 2fad780</a:t>
+              <a:t>작성자: 원종우</a:t>
+            </a:r>
+          </a:p>
+          <a:p>
+            <a:r>
+              <a:t>요약: chore: status-api-test.http 내에 오타 수정</a:t>
+            </a:r>
+          </a:p>
+          <a:p>
+            <a:r>
+              <a:t>SHA: 426131e</a:t>
             </a:r>
           </a:p>
         </p:txBody>
@@ -13908,7 +14172,7 @@
           </a:p>
           <a:p>
             <a:r>
-              <a:t>SHA: 822e9ed</a:t>
+              <a:t>SHA: b571a15</a:t>
             </a:r>
           </a:p>
         </p:txBody>
@@ -13947,7 +14211,7 @@
           <a:lstStyle/>
           <a:p>
             <a:r>
-              <a:t>기타</a:t>
+              <a:t>기능 개발</a:t>
             </a:r>
           </a:p>
         </p:txBody>
@@ -13973,17 +14237,43 @@
           </a:p>
           <a:p>
             <a:r>
-              <a:t>작성자: 070128o</a:t>
-            </a:r>
-          </a:p>
-          <a:p>
-            <a:r>
-              <a:t>요약: plan.txt 파일 수정</a:t>
-            </a:r>
-          </a:p>
-          <a:p>
-            <a:r>
-              <a:t>SHA: c421ea3</a:t>
+              <a:t>작성자: 원종우</a:t>
+            </a:r>
+          </a:p>
+          <a:p>
+            <a:r>
+              <a:t>요약: 알림(Notification) 기능 구현 및 실시간 웹소켓 푸시 추가</a:t>
+            </a:r>
+          </a:p>
+          <a:p/>
+          <a:p>
+            <a:r>
+              <a:t>- 일반 알림(GENERAL) 및 중요 알림(IMPORTANT) 도메인 설계</a:t>
+            </a:r>
+          </a:p>
+          <a:p>
+            <a:r>
+              <a:t>- 중요 알림은 수신자가 WORKING/MEETING 상태일 때만 발송 가능하도록 유효성 검증 추가</a:t>
+            </a:r>
+          </a:p>
+          <a:p>
+            <a:r>
+              <a:t>- 트랜잭션 커밋 후 SimpMessagingTemplate을 활용한 WebSocket 실시간 푸시 발송</a:t>
+            </a:r>
+          </a:p>
+          <a:p>
+            <a:r>
+              <a:t>- 알림 전체/단건 조회, 읽지 않은 알림 수(Badge용) 및 읽음 처리 API 구현</a:t>
+            </a:r>
+          </a:p>
+          <a:p>
+            <a:r>
+              <a:t>- API 검증을 위한 HTTP 테스트 스크립트(.http) 작성</a:t>
+            </a:r>
+          </a:p>
+          <a:p>
+            <a:r>
+              <a:t>SHA: d386bf7</a:t>
             </a:r>
           </a:p>
         </p:txBody>
@@ -14022,43 +14312,43 @@
           <a:lstStyle/>
           <a:p>
             <a:r>
-              <a:t>테스트</a:t>
-            </a:r>
-          </a:p>
-        </p:txBody>
-      </p:sp>
-      <p:sp>
-        <p:nvSpPr>
-          <p:cNvPr id="3" name="Content Placeholder 2"/>
-          <p:cNvSpPr>
-            <a:spLocks noGrp="1"/>
-          </p:cNvSpPr>
-          <p:nvPr>
-            <p:ph idx="1"/>
-          </p:nvPr>
-        </p:nvSpPr>
-        <p:spPr/>
-        <p:txBody>
-          <a:bodyPr/>
-          <a:lstStyle/>
-          <a:p>
-            <a:r>
-              <a:t>날짜: 2026-05-24</a:t>
-            </a:r>
-          </a:p>
-          <a:p>
-            <a:r>
-              <a:t>작성자: 원종우</a:t>
-            </a:r>
-          </a:p>
-          <a:p>
-            <a:r>
-              <a:t>요약: just for commit bot test. ignore this commit</a:t>
-            </a:r>
-          </a:p>
-          <a:p>
-            <a:r>
-              <a:t>SHA: 67f2b12</a:t>
+              <a:t>기타</a:t>
+            </a:r>
+          </a:p>
+        </p:txBody>
+      </p:sp>
+      <p:sp>
+        <p:nvSpPr>
+          <p:cNvPr id="3" name="Content Placeholder 2"/>
+          <p:cNvSpPr>
+            <a:spLocks noGrp="1"/>
+          </p:cNvSpPr>
+          <p:nvPr>
+            <p:ph idx="1"/>
+          </p:nvPr>
+        </p:nvSpPr>
+        <p:spPr/>
+        <p:txBody>
+          <a:bodyPr/>
+          <a:lstStyle/>
+          <a:p>
+            <a:r>
+              <a:t>날짜: 2026-05-27</a:t>
+            </a:r>
+          </a:p>
+          <a:p>
+            <a:r>
+              <a:t>작성자: 070128o</a:t>
+            </a:r>
+          </a:p>
+          <a:p>
+            <a:r>
+              <a:t>요약: Merge branch 'Jongwoo0101' of https://github.com/Jongwoo0101/genai-team-project into Jongwoo0101</a:t>
+            </a:r>
+          </a:p>
+          <a:p>
+            <a:r>
+              <a:t>SHA: 2231f0b</a:t>
             </a:r>
           </a:p>
         </p:txBody>
@@ -14097,7 +14387,7 @@
           <a:lstStyle/>
           <a:p>
             <a:r>
-              <a:t>테스트</a:t>
+              <a:t>기타</a:t>
             </a:r>
           </a:p>
         </p:txBody>
@@ -14123,17 +14413,17 @@
           </a:p>
           <a:p>
             <a:r>
-              <a:t>작성자: 원종우</a:t>
-            </a:r>
-          </a:p>
-          <a:p>
-            <a:r>
-              <a:t>요약: 테스트 코드 수정</a:t>
-            </a:r>
-          </a:p>
-          <a:p>
-            <a:r>
-              <a:t>SHA: be0679d</a:t>
+              <a:t>작성자: 070128o</a:t>
+            </a:r>
+          </a:p>
+          <a:p>
+            <a:r>
+              <a:t>요약: &lt;기획&gt;보완</a:t>
+            </a:r>
+          </a:p>
+          <a:p>
+            <a:r>
+              <a:t>SHA: 31323a2</a:t>
             </a:r>
           </a:p>
         </p:txBody>
@@ -14172,48 +14462,43 @@
           <a:lstStyle/>
           <a:p>
             <a:r>
-              <a:t>문서 작업</a:t>
-            </a:r>
-          </a:p>
-        </p:txBody>
-      </p:sp>
-      <p:sp>
-        <p:nvSpPr>
-          <p:cNvPr id="3" name="Content Placeholder 2"/>
-          <p:cNvSpPr>
-            <a:spLocks noGrp="1"/>
-          </p:cNvSpPr>
-          <p:nvPr>
-            <p:ph idx="1"/>
-          </p:nvPr>
-        </p:nvSpPr>
-        <p:spPr/>
-        <p:txBody>
-          <a:bodyPr/>
-          <a:lstStyle/>
-          <a:p>
-            <a:r>
-              <a:t>날짜: 2026-05-15</a:t>
-            </a:r>
-          </a:p>
-          <a:p>
-            <a:r>
-              <a:t>작성자: 070128o</a:t>
-            </a:r>
-          </a:p>
-          <a:p>
-            <a:r>
-              <a:t>요약: plan.txt 수정</a:t>
-            </a:r>
-          </a:p>
-          <a:p>
-            <a:r>
-              <a:t>기획완료</a:t>
-            </a:r>
-          </a:p>
-          <a:p>
-            <a:r>
-              <a:t>SHA: 46c1fd8</a:t>
+              <a:t>기타</a:t>
+            </a:r>
+          </a:p>
+        </p:txBody>
+      </p:sp>
+      <p:sp>
+        <p:nvSpPr>
+          <p:cNvPr id="3" name="Content Placeholder 2"/>
+          <p:cNvSpPr>
+            <a:spLocks noGrp="1"/>
+          </p:cNvSpPr>
+          <p:nvPr>
+            <p:ph idx="1"/>
+          </p:nvPr>
+        </p:nvSpPr>
+        <p:spPr/>
+        <p:txBody>
+          <a:bodyPr/>
+          <a:lstStyle/>
+          <a:p>
+            <a:r>
+              <a:t>날짜: 2026-05-20</a:t>
+            </a:r>
+          </a:p>
+          <a:p>
+            <a:r>
+              <a:t>작성자: dldnwls07</a:t>
+            </a:r>
+          </a:p>
+          <a:p>
+            <a:r>
+              <a:t>요약: merge: origin/Jongwoo0101 브랜치의 신규 백엔드 상태 관리 API 연동 반영</a:t>
+            </a:r>
+          </a:p>
+          <a:p>
+            <a:r>
+              <a:t>SHA: f9834bd</a:t>
             </a:r>
           </a:p>
         </p:txBody>
@@ -14273,22 +14558,22 @@
           <a:lstStyle/>
           <a:p>
             <a:r>
-              <a:t>날짜: 2026-05-14</a:t>
-            </a:r>
-          </a:p>
-          <a:p>
-            <a:r>
-              <a:t>작성자: 원종우</a:t>
-            </a:r>
-          </a:p>
-          <a:p>
-            <a:r>
-              <a:t>요약: Merge branch 'Jongwoo0101' of https://github.com/Jongwoo0101/genai-team-project into Jongwoo0101</a:t>
-            </a:r>
-          </a:p>
-          <a:p>
-            <a:r>
-              <a:t>SHA: 301de3d</a:t>
+              <a:t>날짜: 2026-05-20</a:t>
+            </a:r>
+          </a:p>
+          <a:p>
+            <a:r>
+              <a:t>작성자: dldnwls07</a:t>
+            </a:r>
+          </a:p>
+          <a:p>
+            <a:r>
+              <a:t>요약: chore: 참조 끊어진 MonitoringServiceTest.java 삭제 및 테스트 빌드 정상화</a:t>
+            </a:r>
+          </a:p>
+          <a:p>
+            <a:r>
+              <a:t>SHA: e5978d3</a:t>
             </a:r>
           </a:p>
         </p:txBody>
@@ -14327,43 +14612,43 @@
           <a:lstStyle/>
           <a:p>
             <a:r>
-              <a:t>문서 작업</a:t>
-            </a:r>
-          </a:p>
-        </p:txBody>
-      </p:sp>
-      <p:sp>
-        <p:nvSpPr>
-          <p:cNvPr id="3" name="Content Placeholder 2"/>
-          <p:cNvSpPr>
-            <a:spLocks noGrp="1"/>
-          </p:cNvSpPr>
-          <p:nvPr>
-            <p:ph idx="1"/>
-          </p:nvPr>
-        </p:nvSpPr>
-        <p:spPr/>
-        <p:txBody>
-          <a:bodyPr/>
-          <a:lstStyle/>
-          <a:p>
-            <a:r>
-              <a:t>날짜: 2026-05-14</a:t>
-            </a:r>
-          </a:p>
-          <a:p>
-            <a:r>
-              <a:t>작성자: 070128o</a:t>
-            </a:r>
-          </a:p>
-          <a:p>
-            <a:r>
-              <a:t>요약: plan.txt 수정</a:t>
-            </a:r>
-          </a:p>
-          <a:p>
-            <a:r>
-              <a:t>SHA: 39a1def</a:t>
+              <a:t>구조 개선</a:t>
+            </a:r>
+          </a:p>
+        </p:txBody>
+      </p:sp>
+      <p:sp>
+        <p:nvSpPr>
+          <p:cNvPr id="3" name="Content Placeholder 2"/>
+          <p:cNvSpPr>
+            <a:spLocks noGrp="1"/>
+          </p:cNvSpPr>
+          <p:nvPr>
+            <p:ph idx="1"/>
+          </p:nvPr>
+        </p:nvSpPr>
+        <p:spPr/>
+        <p:txBody>
+          <a:bodyPr/>
+          <a:lstStyle/>
+          <a:p>
+            <a:r>
+              <a:t>날짜: 2026-05-20</a:t>
+            </a:r>
+          </a:p>
+          <a:p>
+            <a:r>
+              <a:t>작성자: 원종우</a:t>
+            </a:r>
+          </a:p>
+          <a:p>
+            <a:r>
+              <a:t>요약: Role.java 경로를 enums 패키지로 이동</a:t>
+            </a:r>
+          </a:p>
+          <a:p>
+            <a:r>
+              <a:t>SHA: 7f2e18c</a:t>
             </a:r>
           </a:p>
         </p:txBody>
@@ -14402,76 +14687,48 @@
           <a:lstStyle/>
           <a:p>
             <a:r>
-              <a:t>구조 개선</a:t>
-            </a:r>
-          </a:p>
-        </p:txBody>
-      </p:sp>
-      <p:sp>
-        <p:nvSpPr>
-          <p:cNvPr id="3" name="Content Placeholder 2"/>
-          <p:cNvSpPr>
-            <a:spLocks noGrp="1"/>
-          </p:cNvSpPr>
-          <p:nvPr>
-            <p:ph idx="1"/>
-          </p:nvPr>
-        </p:nvSpPr>
-        <p:spPr/>
-        <p:txBody>
-          <a:bodyPr/>
-          <a:lstStyle/>
-          <a:p>
-            <a:r>
-              <a:t>날짜: 2026-05-14</a:t>
-            </a:r>
-          </a:p>
-          <a:p>
-            <a:r>
-              <a:t>작성자: 원종우</a:t>
-            </a:r>
-          </a:p>
-          <a:p>
-            <a:r>
-              <a:t>요약: refactor(MonitoringService): 트랜잭션 안전성 및 null 처리 개선</a:t>
-            </a:r>
-          </a:p>
-          <a:p/>
-          <a:p>
-            <a:r>
-              <a:t>- WebSocket 브로드캐스팅을 afterCommit() 훅으로 이동</a:t>
-            </a:r>
-          </a:p>
-          <a:p>
-            <a:r>
-              <a:t>  DB 롤백 시 유령 알림 발생 방지</a:t>
-            </a:r>
-          </a:p>
-          <a:p/>
-          <a:p>
-            <a:r>
-              <a:t>- confidence null 처리 개선</a:t>
-            </a:r>
-          </a:p>
-          <a:p>
-            <a:r>
-              <a:t>  Integer nullable 반환 제거, 기본값 0 반환으로 NPE 방지</a:t>
-            </a:r>
-          </a:p>
-          <a:p/>
-          <a:p>
-            <a:r>
-              <a:t>- alert 생성 시 confidence 일관성 확보</a:t>
-            </a:r>
-          </a:p>
-          <a:p>
-            <a:r>
-              <a:t>  event.getConfidence() 대신 normalizeConfidence() 재사용</a:t>
-            </a:r>
-          </a:p>
-          <a:p>
-            <a:r>
-              <a:t>SHA: fc6a569</a:t>
+              <a:t>문서 작업</a:t>
+            </a:r>
+          </a:p>
+        </p:txBody>
+      </p:sp>
+      <p:sp>
+        <p:nvSpPr>
+          <p:cNvPr id="3" name="Content Placeholder 2"/>
+          <p:cNvSpPr>
+            <a:spLocks noGrp="1"/>
+          </p:cNvSpPr>
+          <p:nvPr>
+            <p:ph idx="1"/>
+          </p:nvPr>
+        </p:nvSpPr>
+        <p:spPr/>
+        <p:txBody>
+          <a:bodyPr/>
+          <a:lstStyle/>
+          <a:p>
+            <a:r>
+              <a:t>날짜: 2026-05-15</a:t>
+            </a:r>
+          </a:p>
+          <a:p>
+            <a:r>
+              <a:t>작성자: 070128o</a:t>
+            </a:r>
+          </a:p>
+          <a:p>
+            <a:r>
+              <a:t>요약: plan.txt 수정</a:t>
+            </a:r>
+          </a:p>
+          <a:p>
+            <a:r>
+              <a:t>기획완료</a:t>
+            </a:r>
+          </a:p>
+          <a:p>
+            <a:r>
+              <a:t>SHA: 46c1fd8</a:t>
             </a:r>
           </a:p>
         </p:txBody>
@@ -14510,43 +14767,43 @@
           <a:lstStyle/>
           <a:p>
             <a:r>
-              <a:t>기능 개발</a:t>
-            </a:r>
-          </a:p>
-        </p:txBody>
-      </p:sp>
-      <p:sp>
-        <p:nvSpPr>
-          <p:cNvPr id="3" name="Content Placeholder 2"/>
-          <p:cNvSpPr>
-            <a:spLocks noGrp="1"/>
-          </p:cNvSpPr>
-          <p:nvPr>
-            <p:ph idx="1"/>
-          </p:nvPr>
-        </p:nvSpPr>
-        <p:spPr/>
-        <p:txBody>
-          <a:bodyPr/>
-          <a:lstStyle/>
-          <a:p>
-            <a:r>
-              <a:t>날짜: 2026-05-13</a:t>
-            </a:r>
-          </a:p>
-          <a:p>
-            <a:r>
-              <a:t>작성자: dldnwls07</a:t>
-            </a:r>
-          </a:p>
-          <a:p>
-            <a:r>
-              <a:t>요약: integrate AI monitoring with WebSocket</a:t>
-            </a:r>
-          </a:p>
-          <a:p>
-            <a:r>
-              <a:t>SHA: 255a879</a:t>
+              <a:t>문서 작업</a:t>
+            </a:r>
+          </a:p>
+        </p:txBody>
+      </p:sp>
+      <p:sp>
+        <p:nvSpPr>
+          <p:cNvPr id="3" name="Content Placeholder 2"/>
+          <p:cNvSpPr>
+            <a:spLocks noGrp="1"/>
+          </p:cNvSpPr>
+          <p:nvPr>
+            <p:ph idx="1"/>
+          </p:nvPr>
+        </p:nvSpPr>
+        <p:spPr/>
+        <p:txBody>
+          <a:bodyPr/>
+          <a:lstStyle/>
+          <a:p>
+            <a:r>
+              <a:t>날짜: 2026-05-14</a:t>
+            </a:r>
+          </a:p>
+          <a:p>
+            <a:r>
+              <a:t>작성자: 070128o</a:t>
+            </a:r>
+          </a:p>
+          <a:p>
+            <a:r>
+              <a:t>요약: plan.txt 수정</a:t>
+            </a:r>
+          </a:p>
+          <a:p>
+            <a:r>
+              <a:t>SHA: 39a1def</a:t>
             </a:r>
           </a:p>
         </p:txBody>
@@ -14585,43 +14842,76 @@
           <a:lstStyle/>
           <a:p>
             <a:r>
-              <a:t>기타</a:t>
-            </a:r>
-          </a:p>
-        </p:txBody>
-      </p:sp>
-      <p:sp>
-        <p:nvSpPr>
-          <p:cNvPr id="3" name="Content Placeholder 2"/>
-          <p:cNvSpPr>
-            <a:spLocks noGrp="1"/>
-          </p:cNvSpPr>
-          <p:nvPr>
-            <p:ph idx="1"/>
-          </p:nvPr>
-        </p:nvSpPr>
-        <p:spPr/>
-        <p:txBody>
-          <a:bodyPr/>
-          <a:lstStyle/>
-          <a:p>
-            <a:r>
-              <a:t>날짜: 2026-05-13</a:t>
-            </a:r>
-          </a:p>
-          <a:p>
-            <a:r>
-              <a:t>작성자: dldnwls07</a:t>
-            </a:r>
-          </a:p>
-          <a:p>
-            <a:r>
-              <a:t>요약: branch-test</a:t>
-            </a:r>
-          </a:p>
-          <a:p>
-            <a:r>
-              <a:t>SHA: 93899c6</a:t>
+              <a:t>구조 개선</a:t>
+            </a:r>
+          </a:p>
+        </p:txBody>
+      </p:sp>
+      <p:sp>
+        <p:nvSpPr>
+          <p:cNvPr id="3" name="Content Placeholder 2"/>
+          <p:cNvSpPr>
+            <a:spLocks noGrp="1"/>
+          </p:cNvSpPr>
+          <p:nvPr>
+            <p:ph idx="1"/>
+          </p:nvPr>
+        </p:nvSpPr>
+        <p:spPr/>
+        <p:txBody>
+          <a:bodyPr/>
+          <a:lstStyle/>
+          <a:p>
+            <a:r>
+              <a:t>날짜: 2026-05-14</a:t>
+            </a:r>
+          </a:p>
+          <a:p>
+            <a:r>
+              <a:t>작성자: 원종우</a:t>
+            </a:r>
+          </a:p>
+          <a:p>
+            <a:r>
+              <a:t>요약: refactor(MonitoringService): 트랜잭션 안전성 및 null 처리 개선</a:t>
+            </a:r>
+          </a:p>
+          <a:p/>
+          <a:p>
+            <a:r>
+              <a:t>- WebSocket 브로드캐스팅을 afterCommit() 훅으로 이동</a:t>
+            </a:r>
+          </a:p>
+          <a:p>
+            <a:r>
+              <a:t>  DB 롤백 시 유령 알림 발생 방지</a:t>
+            </a:r>
+          </a:p>
+          <a:p/>
+          <a:p>
+            <a:r>
+              <a:t>- confidence null 처리 개선</a:t>
+            </a:r>
+          </a:p>
+          <a:p>
+            <a:r>
+              <a:t>  Integer nullable 반환 제거, 기본값 0 반환으로 NPE 방지</a:t>
+            </a:r>
+          </a:p>
+          <a:p/>
+          <a:p>
+            <a:r>
+              <a:t>- alert 생성 시 confidence 일관성 확보</a:t>
+            </a:r>
+          </a:p>
+          <a:p>
+            <a:r>
+              <a:t>  event.getConfidence() 대신 normalizeConfidence() 재사용</a:t>
+            </a:r>
+          </a:p>
+          <a:p>
+            <a:r>
+              <a:t>SHA: fc6a569</a:t>
             </a:r>
           </a:p>
         </p:txBody>
@@ -14660,43 +14950,43 @@
           <a:lstStyle/>
           <a:p>
             <a:r>
-              <a:t>버그 수정</a:t>
-            </a:r>
-          </a:p>
-        </p:txBody>
-      </p:sp>
-      <p:sp>
-        <p:nvSpPr>
-          <p:cNvPr id="3" name="Content Placeholder 2"/>
-          <p:cNvSpPr>
-            <a:spLocks noGrp="1"/>
-          </p:cNvSpPr>
-          <p:nvPr>
-            <p:ph idx="1"/>
-          </p:nvPr>
-        </p:nvSpPr>
-        <p:spPr/>
-        <p:txBody>
-          <a:bodyPr/>
-          <a:lstStyle/>
-          <a:p>
-            <a:r>
-              <a:t>날짜: 2026-05-13</a:t>
-            </a:r>
-          </a:p>
-          <a:p>
-            <a:r>
-              <a:t>작성자: dldnwls07</a:t>
-            </a:r>
-          </a:p>
-          <a:p>
-            <a:r>
-              <a:t>요약: fix(ai_model): lock mediapipe version and create server</a:t>
-            </a:r>
-          </a:p>
-          <a:p>
-            <a:r>
-              <a:t>SHA: bcab1ef</a:t>
+              <a:t>기타</a:t>
+            </a:r>
+          </a:p>
+        </p:txBody>
+      </p:sp>
+      <p:sp>
+        <p:nvSpPr>
+          <p:cNvPr id="3" name="Content Placeholder 2"/>
+          <p:cNvSpPr>
+            <a:spLocks noGrp="1"/>
+          </p:cNvSpPr>
+          <p:nvPr>
+            <p:ph idx="1"/>
+          </p:nvPr>
+        </p:nvSpPr>
+        <p:spPr/>
+        <p:txBody>
+          <a:bodyPr/>
+          <a:lstStyle/>
+          <a:p>
+            <a:r>
+              <a:t>날짜: 2026-05-14</a:t>
+            </a:r>
+          </a:p>
+          <a:p>
+            <a:r>
+              <a:t>작성자: 원종우</a:t>
+            </a:r>
+          </a:p>
+          <a:p>
+            <a:r>
+              <a:t>요약: Merge branch 'Jongwoo0101' of https://github.com/Jongwoo0101/genai-team-project into Jongwoo0101</a:t>
+            </a:r>
+          </a:p>
+          <a:p>
+            <a:r>
+              <a:t>SHA: 301de3d</a:t>
             </a:r>
           </a:p>
         </p:txBody>
@@ -14766,12 +15056,12 @@
           </a:p>
           <a:p>
             <a:r>
-              <a:t>요약: fix(frontend): use type-only import in useMonitorWS</a:t>
-            </a:r>
-          </a:p>
-          <a:p>
-            <a:r>
-              <a:t>SHA: 06db34f</a:t>
+              <a:t>요약: fix(frontend): resolve useEffect dependency cycle in EmployeeView</a:t>
+            </a:r>
+          </a:p>
+          <a:p>
+            <a:r>
+              <a:t>SHA: 0a5ad10</a:t>
             </a:r>
           </a:p>
         </p:txBody>
@@ -14810,7 +15100,7 @@
           <a:lstStyle/>
           <a:p>
             <a:r>
-              <a:t>구조 개선</a:t>
+              <a:t>기능 개발</a:t>
             </a:r>
           </a:p>
         </p:txBody>
@@ -14841,12 +15131,12 @@
           </a:p>
           <a:p>
             <a:r>
-              <a:t>요약: refactor(frontend): clean up useMonitorWS hook and remove redundant stop logic</a:t>
-            </a:r>
-          </a:p>
-          <a:p>
-            <a:r>
-              <a:t>SHA: c115c7c</a:t>
+              <a:t>요약: integrate AI monitoring with WebSocket</a:t>
+            </a:r>
+          </a:p>
+          <a:p>
+            <a:r>
+              <a:t>SHA: 255a879</a:t>
             </a:r>
           </a:p>
         </p:txBody>
@@ -14885,43 +15175,43 @@
           <a:lstStyle/>
           <a:p>
             <a:r>
-              <a:t>버그 수정</a:t>
-            </a:r>
-          </a:p>
-        </p:txBody>
-      </p:sp>
-      <p:sp>
-        <p:nvSpPr>
-          <p:cNvPr id="3" name="Content Placeholder 2"/>
-          <p:cNvSpPr>
-            <a:spLocks noGrp="1"/>
-          </p:cNvSpPr>
-          <p:nvPr>
-            <p:ph idx="1"/>
-          </p:nvPr>
-        </p:nvSpPr>
-        <p:spPr/>
-        <p:txBody>
-          <a:bodyPr/>
-          <a:lstStyle/>
-          <a:p>
-            <a:r>
-              <a:t>날짜: 2026-05-23</a:t>
-            </a:r>
-          </a:p>
-          <a:p>
-            <a:r>
-              <a:t>작성자: dldnwls07</a:t>
-            </a:r>
-          </a:p>
-          <a:p>
-            <a:r>
-              <a:t>요약: recover commute state drift when backend worklog is reset</a:t>
-            </a:r>
-          </a:p>
-          <a:p>
-            <a:r>
-              <a:t>SHA: 2771b01</a:t>
+              <a:t>테스트</a:t>
+            </a:r>
+          </a:p>
+        </p:txBody>
+      </p:sp>
+      <p:sp>
+        <p:nvSpPr>
+          <p:cNvPr id="3" name="Content Placeholder 2"/>
+          <p:cNvSpPr>
+            <a:spLocks noGrp="1"/>
+          </p:cNvSpPr>
+          <p:nvPr>
+            <p:ph idx="1"/>
+          </p:nvPr>
+        </p:nvSpPr>
+        <p:spPr/>
+        <p:txBody>
+          <a:bodyPr/>
+          <a:lstStyle/>
+          <a:p>
+            <a:r>
+              <a:t>날짜: 2026-05-24</a:t>
+            </a:r>
+          </a:p>
+          <a:p>
+            <a:r>
+              <a:t>작성자: 원종우</a:t>
+            </a:r>
+          </a:p>
+          <a:p>
+            <a:r>
+              <a:t>요약: just for commit bot test. ignore this commit 22</a:t>
+            </a:r>
+          </a:p>
+          <a:p>
+            <a:r>
+              <a:t>SHA: 5f60a31</a:t>
             </a:r>
           </a:p>
         </p:txBody>
@@ -14960,7 +15250,7 @@
           <a:lstStyle/>
           <a:p>
             <a:r>
-              <a:t>버그 수정</a:t>
+              <a:t>기타</a:t>
             </a:r>
           </a:p>
         </p:txBody>
@@ -14986,17 +15276,17 @@
           </a:p>
           <a:p>
             <a:r>
-              <a:t>작성자: dldnwls07</a:t>
-            </a:r>
-          </a:p>
-          <a:p>
-            <a:r>
-              <a:t>요약: fix(frontend): add token to authStore to fix EmployeeView hook</a:t>
-            </a:r>
-          </a:p>
-          <a:p>
-            <a:r>
-              <a:t>SHA: d08cc5c</a:t>
+              <a:t>작성자: 원종우</a:t>
+            </a:r>
+          </a:p>
+          <a:p>
+            <a:r>
+              <a:t>요약: chore: application.yaml 오타수정, api명세서 재정의</a:t>
+            </a:r>
+          </a:p>
+          <a:p>
+            <a:r>
+              <a:t>SHA: f013b7e</a:t>
             </a:r>
           </a:p>
         </p:txBody>
@@ -15035,7 +15325,7 @@
           <a:lstStyle/>
           <a:p>
             <a:r>
-              <a:t>버그 수정</a:t>
+              <a:t>기타</a:t>
             </a:r>
           </a:p>
         </p:txBody>
@@ -15061,17 +15351,17 @@
           </a:p>
           <a:p>
             <a:r>
-              <a:t>작성자: dldnwls07</a:t>
-            </a:r>
-          </a:p>
-          <a:p>
-            <a:r>
-              <a:t>요약: fix(frontend): resolve useEffect dependency cycle in EmployeeView</a:t>
-            </a:r>
-          </a:p>
-          <a:p>
-            <a:r>
-              <a:t>SHA: 0a5ad10</a:t>
+              <a:t>작성자: 원종우</a:t>
+            </a:r>
+          </a:p>
+          <a:p>
+            <a:r>
+              <a:t>요약: chore: application.yaml 오타수정</a:t>
+            </a:r>
+          </a:p>
+          <a:p>
+            <a:r>
+              <a:t>SHA: 6560364</a:t>
             </a:r>
           </a:p>
         </p:txBody>
@@ -15110,7 +15400,7 @@
           <a:lstStyle/>
           <a:p>
             <a:r>
-              <a:t>기능 개발</a:t>
+              <a:t>문서 작업</a:t>
             </a:r>
           </a:p>
         </p:txBody>
@@ -15136,17 +15426,17 @@
           </a:p>
           <a:p>
             <a:r>
-              <a:t>작성자: dldnwls07</a:t>
-            </a:r>
-          </a:p>
-          <a:p>
-            <a:r>
-              <a:t>요약: 팀 스토리지 유틸리티 구현, 모니터링 서비스 유닛 테스트 추가, AI 모델 환경 문제 해결</a:t>
-            </a:r>
-          </a:p>
-          <a:p>
-            <a:r>
-              <a:t>SHA: 7fd2ee8</a:t>
+              <a:t>작성자: 070128o</a:t>
+            </a:r>
+          </a:p>
+          <a:p>
+            <a:r>
+              <a:t>요약: 계획서 수정</a:t>
+            </a:r>
+          </a:p>
+          <a:p>
+            <a:r>
+              <a:t>SHA: 8e50acb</a:t>
             </a:r>
           </a:p>
         </p:txBody>
@@ -15185,7 +15475,7 @@
           <a:lstStyle/>
           <a:p>
             <a:r>
-              <a:t>문서 작업</a:t>
+              <a:t>기능 개발</a:t>
             </a:r>
           </a:p>
         </p:txBody>
@@ -15211,17 +15501,17 @@
           </a:p>
           <a:p>
             <a:r>
-              <a:t>작성자: 070128o</a:t>
-            </a:r>
-          </a:p>
-          <a:p>
-            <a:r>
-              <a:t>요약: 계획서 수정</a:t>
-            </a:r>
-          </a:p>
-          <a:p>
-            <a:r>
-              <a:t>SHA: 8e50acb</a:t>
+              <a:t>작성자: dldnwls07</a:t>
+            </a:r>
+          </a:p>
+          <a:p>
+            <a:r>
+              <a:t>요약: 팀 스토리지 유틸리티 구현, 모니터링 서비스 유닛 테스트 추가, AI 모델 환경 문제 해결</a:t>
+            </a:r>
+          </a:p>
+          <a:p>
+            <a:r>
+              <a:t>SHA: 7fd2ee8</a:t>
             </a:r>
           </a:p>
         </p:txBody>
@@ -15260,7 +15550,7 @@
           <a:lstStyle/>
           <a:p>
             <a:r>
-              <a:t>기타</a:t>
+              <a:t>문서 작업</a:t>
             </a:r>
           </a:p>
         </p:txBody>
@@ -15286,17 +15576,22 @@
           </a:p>
           <a:p>
             <a:r>
-              <a:t>작성자: 원종우</a:t>
-            </a:r>
-          </a:p>
-          <a:p>
-            <a:r>
-              <a:t>요약: chore: application.yaml 오타수정</a:t>
-            </a:r>
-          </a:p>
-          <a:p>
-            <a:r>
-              <a:t>SHA: 6560364</a:t>
+              <a:t>작성자: 070128o</a:t>
+            </a:r>
+          </a:p>
+          <a:p>
+            <a:r>
+              <a:t>요약: plan.txt 수정</a:t>
+            </a:r>
+          </a:p>
+          <a:p>
+            <a:r>
+              <a:t>&lt;수정중&gt;수정중</a:t>
+            </a:r>
+          </a:p>
+          <a:p>
+            <a:r>
+              <a:t>SHA: b9eacf6</a:t>
             </a:r>
           </a:p>
         </p:txBody>
@@ -15335,7 +15630,7 @@
           <a:lstStyle/>
           <a:p>
             <a:r>
-              <a:t>기타</a:t>
+              <a:t>버그 수정</a:t>
             </a:r>
           </a:p>
         </p:txBody>
@@ -15361,17 +15656,17 @@
           </a:p>
           <a:p>
             <a:r>
-              <a:t>작성자: 원종우</a:t>
-            </a:r>
-          </a:p>
-          <a:p>
-            <a:r>
-              <a:t>요약: chore: application.yaml 오타수정, api명세서 재정의</a:t>
-            </a:r>
-          </a:p>
-          <a:p>
-            <a:r>
-              <a:t>SHA: f013b7e</a:t>
+              <a:t>작성자: dldnwls07</a:t>
+            </a:r>
+          </a:p>
+          <a:p>
+            <a:r>
+              <a:t>요약: fix(frontend): add token to authStore to fix EmployeeView hook</a:t>
+            </a:r>
+          </a:p>
+          <a:p>
+            <a:r>
+              <a:t>SHA: d08cc5c</a:t>
             </a:r>
           </a:p>
         </p:txBody>
@@ -15410,7 +15705,7 @@
           <a:lstStyle/>
           <a:p>
             <a:r>
-              <a:t>문서 작업</a:t>
+              <a:t>버그 수정</a:t>
             </a:r>
           </a:p>
         </p:txBody>
@@ -15436,22 +15731,17 @@
           </a:p>
           <a:p>
             <a:r>
-              <a:t>작성자: 070128o</a:t>
-            </a:r>
-          </a:p>
-          <a:p>
-            <a:r>
-              <a:t>요약: plan.txt 수정</a:t>
-            </a:r>
-          </a:p>
-          <a:p>
-            <a:r>
-              <a:t>&lt;수정중&gt;수정중</a:t>
-            </a:r>
-          </a:p>
-          <a:p>
-            <a:r>
-              <a:t>SHA: b9eacf6</a:t>
+              <a:t>작성자: dldnwls07</a:t>
+            </a:r>
+          </a:p>
+          <a:p>
+            <a:r>
+              <a:t>요약: fix(frontend): use type-only import in useMonitorWS</a:t>
+            </a:r>
+          </a:p>
+          <a:p>
+            <a:r>
+              <a:t>SHA: 06db34f</a:t>
             </a:r>
           </a:p>
         </p:txBody>
@@ -15490,49 +15780,43 @@
           <a:lstStyle/>
           <a:p>
             <a:r>
-              <a:t>기타 (PR Merge)</a:t>
-            </a:r>
-          </a:p>
-        </p:txBody>
-      </p:sp>
-      <p:sp>
-        <p:nvSpPr>
-          <p:cNvPr id="3" name="Content Placeholder 2"/>
-          <p:cNvSpPr>
-            <a:spLocks noGrp="1"/>
-          </p:cNvSpPr>
-          <p:nvPr>
-            <p:ph idx="1"/>
-          </p:nvPr>
-        </p:nvSpPr>
-        <p:spPr/>
-        <p:txBody>
-          <a:bodyPr/>
-          <a:lstStyle/>
-          <a:p>
-            <a:r>
-              <a:t>날짜: 2026-05-12</a:t>
-            </a:r>
-          </a:p>
-          <a:p>
-            <a:r>
-              <a:t>작성자: 원종우</a:t>
-            </a:r>
-          </a:p>
-          <a:p>
-            <a:r>
-              <a:t>요약: Merge pull request #5 from Jongwoo0101/frontend</a:t>
-            </a:r>
-          </a:p>
-          <a:p/>
-          <a:p>
-            <a:r>
-              <a:t> 백엔드 보안 설정 수정 및 프론트엔드 실시간 DB 연동 고도화</a:t>
-            </a:r>
-          </a:p>
-          <a:p>
-            <a:r>
-              <a:t>SHA: 461e7b7</a:t>
+              <a:t>버그 수정</a:t>
+            </a:r>
+          </a:p>
+        </p:txBody>
+      </p:sp>
+      <p:sp>
+        <p:nvSpPr>
+          <p:cNvPr id="3" name="Content Placeholder 2"/>
+          <p:cNvSpPr>
+            <a:spLocks noGrp="1"/>
+          </p:cNvSpPr>
+          <p:nvPr>
+            <p:ph idx="1"/>
+          </p:nvPr>
+        </p:nvSpPr>
+        <p:spPr/>
+        <p:txBody>
+          <a:bodyPr/>
+          <a:lstStyle/>
+          <a:p>
+            <a:r>
+              <a:t>날짜: 2026-05-13</a:t>
+            </a:r>
+          </a:p>
+          <a:p>
+            <a:r>
+              <a:t>작성자: dldnwls07</a:t>
+            </a:r>
+          </a:p>
+          <a:p>
+            <a:r>
+              <a:t>요약: fix(ai_model): lock mediapipe version and create server</a:t>
+            </a:r>
+          </a:p>
+          <a:p>
+            <a:r>
+              <a:t>SHA: bcab1ef</a:t>
             </a:r>
           </a:p>
         </p:txBody>
@@ -15571,28 +15855,28 @@
           <a:lstStyle/>
           <a:p>
             <a:r>
-              <a:t>버그 수정</a:t>
-            </a:r>
-          </a:p>
-        </p:txBody>
-      </p:sp>
-      <p:sp>
-        <p:nvSpPr>
-          <p:cNvPr id="3" name="Content Placeholder 2"/>
-          <p:cNvSpPr>
-            <a:spLocks noGrp="1"/>
-          </p:cNvSpPr>
-          <p:nvPr>
-            <p:ph idx="1"/>
-          </p:nvPr>
-        </p:nvSpPr>
-        <p:spPr/>
-        <p:txBody>
-          <a:bodyPr/>
-          <a:lstStyle/>
-          <a:p>
-            <a:r>
-              <a:t>날짜: 2026-05-10</a:t>
+              <a:t>기타</a:t>
+            </a:r>
+          </a:p>
+        </p:txBody>
+      </p:sp>
+      <p:sp>
+        <p:nvSpPr>
+          <p:cNvPr id="3" name="Content Placeholder 2"/>
+          <p:cNvSpPr>
+            <a:spLocks noGrp="1"/>
+          </p:cNvSpPr>
+          <p:nvPr>
+            <p:ph idx="1"/>
+          </p:nvPr>
+        </p:nvSpPr>
+        <p:spPr/>
+        <p:txBody>
+          <a:bodyPr/>
+          <a:lstStyle/>
+          <a:p>
+            <a:r>
+              <a:t>날짜: 2026-05-13</a:t>
             </a:r>
           </a:p>
           <a:p>
@@ -15602,12 +15886,12 @@
           </a:p>
           <a:p>
             <a:r>
-              <a:t>요약: 백엔드 보안 설정 수정 및 프론트엔드 실시간 DB 연동 고도화</a:t>
-            </a:r>
-          </a:p>
-          <a:p>
-            <a:r>
-              <a:t>SHA: e14c53d</a:t>
+              <a:t>요약: branch-test</a:t>
+            </a:r>
+          </a:p>
+          <a:p>
+            <a:r>
+              <a:t>SHA: 93899c6</a:t>
             </a:r>
           </a:p>
         </p:txBody>
@@ -15646,43 +15930,43 @@
           <a:lstStyle/>
           <a:p>
             <a:r>
-              <a:t>기타</a:t>
-            </a:r>
-          </a:p>
-        </p:txBody>
-      </p:sp>
-      <p:sp>
-        <p:nvSpPr>
-          <p:cNvPr id="3" name="Content Placeholder 2"/>
-          <p:cNvSpPr>
-            <a:spLocks noGrp="1"/>
-          </p:cNvSpPr>
-          <p:nvPr>
-            <p:ph idx="1"/>
-          </p:nvPr>
-        </p:nvSpPr>
-        <p:spPr/>
-        <p:txBody>
-          <a:bodyPr/>
-          <a:lstStyle/>
-          <a:p>
-            <a:r>
-              <a:t>날짜: 2026-05-10</a:t>
-            </a:r>
-          </a:p>
-          <a:p>
-            <a:r>
-              <a:t>작성자: 원종우</a:t>
-            </a:r>
-          </a:p>
-          <a:p>
-            <a:r>
-              <a:t>요약: chore: Spring Security 및 Hibernate 로그 설정 수정</a:t>
-            </a:r>
-          </a:p>
-          <a:p>
-            <a:r>
-              <a:t>SHA: e688cea</a:t>
+              <a:t>구조 개선</a:t>
+            </a:r>
+          </a:p>
+        </p:txBody>
+      </p:sp>
+      <p:sp>
+        <p:nvSpPr>
+          <p:cNvPr id="3" name="Content Placeholder 2"/>
+          <p:cNvSpPr>
+            <a:spLocks noGrp="1"/>
+          </p:cNvSpPr>
+          <p:nvPr>
+            <p:ph idx="1"/>
+          </p:nvPr>
+        </p:nvSpPr>
+        <p:spPr/>
+        <p:txBody>
+          <a:bodyPr/>
+          <a:lstStyle/>
+          <a:p>
+            <a:r>
+              <a:t>날짜: 2026-05-13</a:t>
+            </a:r>
+          </a:p>
+          <a:p>
+            <a:r>
+              <a:t>작성자: dldnwls07</a:t>
+            </a:r>
+          </a:p>
+          <a:p>
+            <a:r>
+              <a:t>요약: refactor(frontend): clean up useMonitorWS hook and remove redundant stop logic</a:t>
+            </a:r>
+          </a:p>
+          <a:p>
+            <a:r>
+              <a:t>SHA: c115c7c</a:t>
             </a:r>
           </a:p>
         </p:txBody>
@@ -15721,43 +16005,49 @@
           <a:lstStyle/>
           <a:p>
             <a:r>
-              <a:t>기능 개발</a:t>
-            </a:r>
-          </a:p>
-        </p:txBody>
-      </p:sp>
-      <p:sp>
-        <p:nvSpPr>
-          <p:cNvPr id="3" name="Content Placeholder 2"/>
-          <p:cNvSpPr>
-            <a:spLocks noGrp="1"/>
-          </p:cNvSpPr>
-          <p:nvPr>
-            <p:ph idx="1"/>
-          </p:nvPr>
-        </p:nvSpPr>
-        <p:spPr/>
-        <p:txBody>
-          <a:bodyPr/>
-          <a:lstStyle/>
-          <a:p>
-            <a:r>
-              <a:t>날짜: 2026-05-23</a:t>
-            </a:r>
-          </a:p>
-          <a:p>
-            <a:r>
-              <a:t>작성자: dldnwls07</a:t>
-            </a:r>
-          </a:p>
-          <a:p>
-            <a:r>
-              <a:t>요약: include participantId in meeting notifications and refactor team store selectors for improved reactivity</a:t>
-            </a:r>
-          </a:p>
-          <a:p>
-            <a:r>
-              <a:t>SHA: ffd89bd</a:t>
+              <a:t>기타 (PR Merge)</a:t>
+            </a:r>
+          </a:p>
+        </p:txBody>
+      </p:sp>
+      <p:sp>
+        <p:nvSpPr>
+          <p:cNvPr id="3" name="Content Placeholder 2"/>
+          <p:cNvSpPr>
+            <a:spLocks noGrp="1"/>
+          </p:cNvSpPr>
+          <p:nvPr>
+            <p:ph idx="1"/>
+          </p:nvPr>
+        </p:nvSpPr>
+        <p:spPr/>
+        <p:txBody>
+          <a:bodyPr/>
+          <a:lstStyle/>
+          <a:p>
+            <a:r>
+              <a:t>날짜: 2026-05-24</a:t>
+            </a:r>
+          </a:p>
+          <a:p>
+            <a:r>
+              <a:t>작성자: 원종우</a:t>
+            </a:r>
+          </a:p>
+          <a:p>
+            <a:r>
+              <a:t>요약: Merge pull request #6 from Jongwoo0101/feature/frontend-refactor-and-bugfix</a:t>
+            </a:r>
+          </a:p>
+          <a:p/>
+          <a:p>
+            <a:r>
+              <a:t> resolve frontend spec issues and fix shared state bug</a:t>
+            </a:r>
+          </a:p>
+          <a:p>
+            <a:r>
+              <a:t>SHA: 223e97a</a:t>
             </a:r>
           </a:p>
         </p:txBody>
@@ -15796,28 +16086,28 @@
           <a:lstStyle/>
           <a:p>
             <a:r>
-              <a:t>기타</a:t>
-            </a:r>
-          </a:p>
-        </p:txBody>
-      </p:sp>
-      <p:sp>
-        <p:nvSpPr>
-          <p:cNvPr id="3" name="Content Placeholder 2"/>
-          <p:cNvSpPr>
-            <a:spLocks noGrp="1"/>
-          </p:cNvSpPr>
-          <p:nvPr>
-            <p:ph idx="1"/>
-          </p:nvPr>
-        </p:nvSpPr>
-        <p:spPr/>
-        <p:txBody>
-          <a:bodyPr/>
-          <a:lstStyle/>
-          <a:p>
-            <a:r>
-              <a:t>날짜: 2026-05-08</a:t>
+              <a:t>기타 (PR Merge)</a:t>
+            </a:r>
+          </a:p>
+        </p:txBody>
+      </p:sp>
+      <p:sp>
+        <p:nvSpPr>
+          <p:cNvPr id="3" name="Content Placeholder 2"/>
+          <p:cNvSpPr>
+            <a:spLocks noGrp="1"/>
+          </p:cNvSpPr>
+          <p:nvPr>
+            <p:ph idx="1"/>
+          </p:nvPr>
+        </p:nvSpPr>
+        <p:spPr/>
+        <p:txBody>
+          <a:bodyPr/>
+          <a:lstStyle/>
+          <a:p>
+            <a:r>
+              <a:t>날짜: 2026-05-12</a:t>
             </a:r>
           </a:p>
           <a:p>
@@ -15827,23 +16117,18 @@
           </a:p>
           <a:p>
             <a:r>
-              <a:t>요약: chore: JWT 만료 시간 연장 및 테스트 API 파일 업데이트</a:t>
+              <a:t>요약: Merge pull request #5 from Jongwoo0101/frontend</a:t>
             </a:r>
           </a:p>
           <a:p/>
           <a:p>
             <a:r>
-              <a:t>- application.yaml: jwt.expiration 24시간으로 변경 (개발 편의)</a:t>
-            </a:r>
-          </a:p>
-          <a:p>
-            <a:r>
-              <a:t>- test-api.http: 초대 코드 플로우, 팀 조회, 에러 케이스 테스트 추가</a:t>
-            </a:r>
-          </a:p>
-          <a:p>
-            <a:r>
-              <a:t>SHA: 734d54c</a:t>
+              <a:t> 백엔드 보안 설정 수정 및 프론트엔드 실시간 DB 연동 고도화</a:t>
+            </a:r>
+          </a:p>
+          <a:p>
+            <a:r>
+              <a:t>SHA: 461e7b7</a:t>
             </a:r>
           </a:p>
         </p:txBody>
@@ -15882,79 +16167,43 @@
           <a:lstStyle/>
           <a:p>
             <a:r>
-              <a:t>기능 개발</a:t>
-            </a:r>
-          </a:p>
-        </p:txBody>
-      </p:sp>
-      <p:sp>
-        <p:nvSpPr>
-          <p:cNvPr id="3" name="Content Placeholder 2"/>
-          <p:cNvSpPr>
-            <a:spLocks noGrp="1"/>
-          </p:cNvSpPr>
-          <p:nvPr>
-            <p:ph idx="1"/>
-          </p:nvPr>
-        </p:nvSpPr>
-        <p:spPr/>
-        <p:txBody>
-          <a:bodyPr/>
-          <a:lstStyle/>
-          <a:p>
-            <a:r>
-              <a:t>날짜: 2026-05-08</a:t>
-            </a:r>
-          </a:p>
-          <a:p>
-            <a:r>
-              <a:t>작성자: 원종우</a:t>
-            </a:r>
-          </a:p>
-          <a:p>
-            <a:r>
-              <a:t>요약: 초대 코드 기반 팀 매핑 API 구현</a:t>
-            </a:r>
-          </a:p>
-          <a:p/>
-          <a:p>
-            <a:r>
-              <a:t>- MemberDto: LoginResponse token 필드명 수정 (accessToken → token),</a:t>
-            </a:r>
-          </a:p>
-          <a:p>
-            <a:r>
-              <a:t>  InviteCodeResponse · JoinTeamRequest 레코드 추가</a:t>
-            </a:r>
-          </a:p>
-          <a:p>
-            <a:r>
-              <a:t>- MemberService: 초대 코드 생성/검증/무효화 로직 구현</a:t>
-            </a:r>
-          </a:p>
-          <a:p>
-            <a:r>
-              <a:t>  (ConcurrentHashMap in-memory 저장, 5분 만료, 일회성)</a:t>
-            </a:r>
-          </a:p>
-          <a:p>
-            <a:r>
-              <a:t>  팀 매핑 완료 후 WebSocket TEAM_LINKED 이벤트 전송</a:t>
-            </a:r>
-          </a:p>
-          <a:p>
-            <a:r>
-              <a:t>  joinTeam()에서 영속성 컨텍스트 보장을 위해 DB 재조회 처리</a:t>
-            </a:r>
-          </a:p>
-          <a:p>
-            <a:r>
-              <a:t>- MemberController: POST /invite-code (MANAGER), POST /join-team (EMPLOYEE) 추가</a:t>
-            </a:r>
-          </a:p>
-          <a:p>
-            <a:r>
-              <a:t>SHA: 26f546a</a:t>
+              <a:t>버그 수정</a:t>
+            </a:r>
+          </a:p>
+        </p:txBody>
+      </p:sp>
+      <p:sp>
+        <p:nvSpPr>
+          <p:cNvPr id="3" name="Content Placeholder 2"/>
+          <p:cNvSpPr>
+            <a:spLocks noGrp="1"/>
+          </p:cNvSpPr>
+          <p:nvPr>
+            <p:ph idx="1"/>
+          </p:nvPr>
+        </p:nvSpPr>
+        <p:spPr/>
+        <p:txBody>
+          <a:bodyPr/>
+          <a:lstStyle/>
+          <a:p>
+            <a:r>
+              <a:t>날짜: 2026-05-10</a:t>
+            </a:r>
+          </a:p>
+          <a:p>
+            <a:r>
+              <a:t>작성자: dldnwls07</a:t>
+            </a:r>
+          </a:p>
+          <a:p>
+            <a:r>
+              <a:t>요약: 백엔드 보안 설정 수정 및 프론트엔드 실시간 DB 연동 고도화</a:t>
+            </a:r>
+          </a:p>
+          <a:p>
+            <a:r>
+              <a:t>SHA: e14c53d</a:t>
             </a:r>
           </a:p>
         </p:txBody>
@@ -15993,43 +16242,43 @@
           <a:lstStyle/>
           <a:p>
             <a:r>
-              <a:t>기능 개발</a:t>
-            </a:r>
-          </a:p>
-        </p:txBody>
-      </p:sp>
-      <p:sp>
-        <p:nvSpPr>
-          <p:cNvPr id="3" name="Content Placeholder 2"/>
-          <p:cNvSpPr>
-            <a:spLocks noGrp="1"/>
-          </p:cNvSpPr>
-          <p:nvPr>
-            <p:ph idx="1"/>
-          </p:nvPr>
-        </p:nvSpPr>
-        <p:spPr/>
-        <p:txBody>
-          <a:bodyPr/>
-          <a:lstStyle/>
-          <a:p>
-            <a:r>
-              <a:t>날짜: 2026-05-08</a:t>
-            </a:r>
-          </a:p>
-          <a:p>
-            <a:r>
-              <a:t>작성자: dldnwls07</a:t>
-            </a:r>
-          </a:p>
-          <a:p>
-            <a:r>
-              <a:t>요약: 개발 편의를 위한 데이터 초기화 버튼 추가 (백엔드 재시작 시 동기화 용도)</a:t>
-            </a:r>
-          </a:p>
-          <a:p>
-            <a:r>
-              <a:t>SHA: fc03f79</a:t>
+              <a:t>기타</a:t>
+            </a:r>
+          </a:p>
+        </p:txBody>
+      </p:sp>
+      <p:sp>
+        <p:nvSpPr>
+          <p:cNvPr id="3" name="Content Placeholder 2"/>
+          <p:cNvSpPr>
+            <a:spLocks noGrp="1"/>
+          </p:cNvSpPr>
+          <p:nvPr>
+            <p:ph idx="1"/>
+          </p:nvPr>
+        </p:nvSpPr>
+        <p:spPr/>
+        <p:txBody>
+          <a:bodyPr/>
+          <a:lstStyle/>
+          <a:p>
+            <a:r>
+              <a:t>날짜: 2026-05-10</a:t>
+            </a:r>
+          </a:p>
+          <a:p>
+            <a:r>
+              <a:t>작성자: 원종우</a:t>
+            </a:r>
+          </a:p>
+          <a:p>
+            <a:r>
+              <a:t>요약: chore: Spring Security 및 Hibernate 로그 설정 수정</a:t>
+            </a:r>
+          </a:p>
+          <a:p>
+            <a:r>
+              <a:t>SHA: e688cea</a:t>
             </a:r>
           </a:p>
         </p:txBody>
@@ -16068,7 +16317,7 @@
           <a:lstStyle/>
           <a:p>
             <a:r>
-              <a:t>버그 수정</a:t>
+              <a:t>기능 개발</a:t>
             </a:r>
           </a:p>
         </p:txBody>
@@ -16099,23 +16348,38 @@
           </a:p>
           <a:p>
             <a:r>
-              <a:t>요약: MonitoringService 존재하지 않는 직원 조회 시 404 반환하도록 수정</a:t>
+              <a:t>요약: SecurityConfig 401/403 응답 분리 및 인증 경로 명시</a:t>
             </a:r>
           </a:p>
           <a:p/>
           <a:p>
             <a:r>
-              <a:t>- IllegalArgumentException → NoSuchElementException으로 변경</a:t>
-            </a:r>
-          </a:p>
-          <a:p>
-            <a:r>
-              <a:t>- GlobalExceptionHandler의 404 핸들러와 연동</a:t>
-            </a:r>
-          </a:p>
-          <a:p>
-            <a:r>
-              <a:t>SHA: b04984c</a:t>
+              <a:t>- authenticationEntryPoint 추가로 미인증 요청 → 401 반환</a:t>
+            </a:r>
+          </a:p>
+          <a:p>
+            <a:r>
+              <a:t>- accessDeniedHandler 추가로 권한 부족 요청 → 403 반환</a:t>
+            </a:r>
+          </a:p>
+          <a:p>
+            <a:r>
+              <a:t>- invite-code, join-team 경로 authenticated() 명시로 미인증 시 401 보장</a:t>
+            </a:r>
+          </a:p>
+          <a:p>
+            <a:r>
+              <a:t>- UserDetailsService → MemberRepository 주입으로 변경</a:t>
+            </a:r>
+          </a:p>
+          <a:p>
+            <a:r>
+              <a:t>- @EnableMethodSecurity 추가</a:t>
+            </a:r>
+          </a:p>
+          <a:p>
+            <a:r>
+              <a:t>SHA: 83dd30a</a:t>
             </a:r>
           </a:p>
         </p:txBody>
@@ -16185,33 +16449,43 @@
           </a:p>
           <a:p>
             <a:r>
-              <a:t>요약: Member에 managerId 필드 및 팀 매핑 메서드 추가</a:t>
+              <a:t>요약: 팀 조회 API 구현 (TeamController, TeamService, TeamDto)</a:t>
             </a:r>
           </a:p>
           <a:p/>
           <a:p>
             <a:r>
-              <a:t>- managerId 필드 추가 (팀 매핑용)</a:t>
-            </a:r>
-          </a:p>
-          <a:p>
-            <a:r>
-              <a:t>- linkManager(Long managerId) 메서드 추가</a:t>
-            </a:r>
-          </a:p>
-          <a:p>
-            <a:r>
-              <a:t>- getManagerId() 명시적 getter 추가 (UserDetails 충돌 방지)</a:t>
-            </a:r>
-          </a:p>
-          <a:p>
-            <a:r>
-              <a:t>- MemberRepository에 findAllByManagerId() 쿼리 메서드 추가</a:t>
-            </a:r>
-          </a:p>
-          <a:p>
-            <a:r>
-              <a:t>SHA: 301661f</a:t>
+              <a:t>- TeamDto: MyTeamResponse, TeamMemberResponse 레코드 추가</a:t>
+            </a:r>
+          </a:p>
+          <a:p>
+            <a:r>
+              <a:t>- TeamService: getMyTeam() - EMPLOYEE 소속 팀(관리자 정보) 조회</a:t>
+            </a:r>
+          </a:p>
+          <a:p>
+            <a:r>
+              <a:t>              getTeamMembers() - MANAGER 팀 소속 직원 목록 조회</a:t>
+            </a:r>
+          </a:p>
+          <a:p>
+            <a:r>
+              <a:t>              본인 팀 외 조회 시도 시 400 반환</a:t>
+            </a:r>
+          </a:p>
+          <a:p>
+            <a:r>
+              <a:t>- TeamController: GET /teams/my-team (EMPLOYEE)</a:t>
+            </a:r>
+          </a:p>
+          <a:p>
+            <a:r>
+              <a:t>                  GET /teams/{managerId}/members (MANAGER) 추가</a:t>
+            </a:r>
+          </a:p>
+          <a:p>
+            <a:r>
+              <a:t>SHA: aadefbc</a:t>
             </a:r>
           </a:p>
         </p:txBody>
@@ -16250,7 +16524,7 @@
           <a:lstStyle/>
           <a:p>
             <a:r>
-              <a:t>문서 작업</a:t>
+              <a:t>버그 수정</a:t>
             </a:r>
           </a:p>
         </p:txBody>
@@ -16276,38 +16550,17 @@
           </a:p>
           <a:p>
             <a:r>
-              <a:t>작성자: 원종우</a:t>
-            </a:r>
-          </a:p>
-          <a:p>
-            <a:r>
-              <a:t>요약: API 명세서 최신화</a:t>
-            </a:r>
-          </a:p>
-          <a:p/>
-          <a:p>
-            <a:r>
-              <a:t>- 팀 API, 초대 코드 API, 토큰 재발급 API 추가</a:t>
-            </a:r>
-          </a:p>
-          <a:p>
-            <a:r>
-              <a:t>- 공통 에러 응답 형식 추가</a:t>
-            </a:r>
-          </a:p>
-          <a:p>
-            <a:r>
-              <a:t>- WebSocket 구독 경로 및 TEAM_LINKED 이벤트 명세 추가</a:t>
-            </a:r>
-          </a:p>
-          <a:p>
-            <a:r>
-              <a:t>- 보안 설정 및 전체 흐름 업데이트</a:t>
-            </a:r>
-          </a:p>
-          <a:p>
-            <a:r>
-              <a:t>SHA: 76fdacf</a:t>
+              <a:t>작성자: dldnwls07</a:t>
+            </a:r>
+          </a:p>
+          <a:p>
+            <a:r>
+              <a:t>요약: 팀 참여 시 서버 에러 메시지가 로컬 폴백 메시지에 가려지는 문제 수정</a:t>
+            </a:r>
+          </a:p>
+          <a:p>
+            <a:r>
+              <a:t>SHA: 3f21eaa</a:t>
             </a:r>
           </a:p>
         </p:txBody>
@@ -16346,7 +16599,7 @@
           <a:lstStyle/>
           <a:p>
             <a:r>
-              <a:t>기타</a:t>
+              <a:t>기능 개발</a:t>
             </a:r>
           </a:p>
         </p:txBody>
@@ -16377,12 +16630,68 @@
           </a:p>
           <a:p>
             <a:r>
-              <a:t>요약: push rebase</a:t>
-            </a:r>
-          </a:p>
-          <a:p>
-            <a:r>
-              <a:t>SHA: ab12b59</a:t>
+              <a:t>요약: 초대 코드 기반 팀 매핑 API 구현 및 인증/예외 처리 개선</a:t>
+            </a:r>
+          </a:p>
+          <a:p/>
+          <a:p>
+            <a:r>
+              <a:t>- Member: managerId 필드 및 linkManager() 메서드 추가</a:t>
+            </a:r>
+          </a:p>
+          <a:p>
+            <a:r>
+              <a:t>- MemberDto: LoginResponse 토큰 필드명 수정 (accessToken → token),</a:t>
+            </a:r>
+          </a:p>
+          <a:p>
+            <a:r>
+              <a:t>  InviteCodeResponse · JoinTeamRequest 레코드 추가</a:t>
+            </a:r>
+          </a:p>
+          <a:p>
+            <a:r>
+              <a:t>- MemberController: POST /invite-code (MANAGER), POST /join-team (EMPLOYEE) 엔드포인트 추가</a:t>
+            </a:r>
+          </a:p>
+          <a:p>
+            <a:r>
+              <a:t>- MemberService: 초대 코드 생성/검증/무효화 로직 구현 (ConcurrentHashMap, 5분 만료),</a:t>
+            </a:r>
+          </a:p>
+          <a:p>
+            <a:r>
+              <a:t>  팀 매핑 후 WebSocket TEAM_LINKED 이벤트 전송</a:t>
+            </a:r>
+          </a:p>
+          <a:p>
+            <a:r>
+              <a:t>- MonitoringService: 존재하지 않는 직원 조회 시 NoSuchElementException으로 변경</a:t>
+            </a:r>
+          </a:p>
+          <a:p>
+            <a:r>
+              <a:t>- GlobalExceptionHandler: 404 (NoSuchElementException) 핸들러 추가</a:t>
+            </a:r>
+          </a:p>
+          <a:p>
+            <a:r>
+              <a:t>- SecurityConfig: 401/403 응답 핸들러 명시적 분리,</a:t>
+            </a:r>
+          </a:p>
+          <a:p>
+            <a:r>
+              <a:t>  invite-code · join-team 경로 authenticated() 추가로 미인증 시 401 보장</a:t>
+            </a:r>
+          </a:p>
+          <a:p>
+            <a:r>
+              <a:t>- test-api.http: 초대 코드 플로우 및 에러 케이스 테스트 추가</a:t>
+            </a:r>
+          </a:p>
+          <a:p>
+            <a:r>
+              <a:t>SHA: fee7784</a:t>
             </a:r>
           </a:p>
         </p:txBody>
@@ -16421,7 +16730,7 @@
           <a:lstStyle/>
           <a:p>
             <a:r>
-              <a:t>기타 (PR Merge)</a:t>
+              <a:t>문서 작업</a:t>
             </a:r>
           </a:p>
         </p:txBody>
@@ -16452,33 +16761,12 @@
           </a:p>
           <a:p>
             <a:r>
-              <a:t>요약: Merge pull request #4 from Jongwoo0101/frontend</a:t>
-            </a:r>
-          </a:p>
-          <a:p/>
-          <a:p>
-            <a:r>
-              <a:t>아래 3개 모두 완료</a:t>
-            </a:r>
-          </a:p>
-          <a:p>
-            <a:r>
-              <a:t>POST /api/teams : 실제 팀(Team) 테이블 Entity 생성</a:t>
-            </a:r>
-          </a:p>
-          <a:p>
-            <a:r>
-              <a:t>GET /api/teams/my-team : 직원이 로그인 시 자신이 소속된 팀 조회</a:t>
-            </a:r>
-          </a:p>
-          <a:p>
-            <a:r>
-              <a:t>GET /api/teams/{id}/members : 관리자가 자신의 팀에 소속된 직원 목록 조회</a:t>
-            </a:r>
-          </a:p>
-          <a:p>
-            <a:r>
-              <a:t>SHA: d4e9af5</a:t>
+              <a:t>요약: api 명세서 수정</a:t>
+            </a:r>
+          </a:p>
+          <a:p>
+            <a:r>
+              <a:t>SHA: 2f31a96</a:t>
             </a:r>
           </a:p>
         </p:txBody>
@@ -16517,7 +16805,7 @@
           <a:lstStyle/>
           <a:p>
             <a:r>
-              <a:t>기능 개발</a:t>
+              <a:t>기타</a:t>
             </a:r>
           </a:p>
         </p:txBody>
@@ -16543,33 +16831,17 @@
           </a:p>
           <a:p>
             <a:r>
-              <a:t>작성자: 원종우</a:t>
-            </a:r>
-          </a:p>
-          <a:p>
-            <a:r>
-              <a:t>요약: GlobalExceptionHandler에 404, 409 예외 핸들러 추가</a:t>
-            </a:r>
-          </a:p>
-          <a:p/>
-          <a:p>
-            <a:r>
-              <a:t>- NoSuchElementException → 404 NOT_FOUND 처리 (존재하지 않는 직원 ID)</a:t>
-            </a:r>
-          </a:p>
-          <a:p>
-            <a:r>
-              <a:t>- IllegalStateException → 409 INVALID_STATE 처리 (팀 미소속 상태)</a:t>
-            </a:r>
-          </a:p>
-          <a:p>
-            <a:r>
-              <a:t>- AccessDeniedException → 403 ACCESS_DENIED 처리</a:t>
-            </a:r>
-          </a:p>
-          <a:p>
-            <a:r>
-              <a:t>SHA: 239e7dc</a:t>
+              <a:t>작성자: dldnwls07</a:t>
+            </a:r>
+          </a:p>
+          <a:p>
+            <a:r>
+              <a:t>요약: chore: add debug logs for 403 analysis and fix frontend login UX/fallback</a:t>
+            </a:r>
+          </a:p>
+          <a:p>
+            <a:r>
+              <a:t>SHA: 227cec9</a:t>
             </a:r>
           </a:p>
         </p:txBody>
@@ -16634,48 +16906,17 @@
           </a:p>
           <a:p>
             <a:r>
-              <a:t>작성자: 원종우</a:t>
-            </a:r>
-          </a:p>
-          <a:p>
-            <a:r>
-              <a:t>요약: 팀 조회 API 구현 (TeamController, TeamService, TeamDto)</a:t>
-            </a:r>
-          </a:p>
-          <a:p/>
-          <a:p>
-            <a:r>
-              <a:t>- TeamDto: MyTeamResponse, TeamMemberResponse 레코드 추가</a:t>
-            </a:r>
-          </a:p>
-          <a:p>
-            <a:r>
-              <a:t>- TeamService: getMyTeam() - EMPLOYEE 소속 팀(관리자 정보) 조회</a:t>
-            </a:r>
-          </a:p>
-          <a:p>
-            <a:r>
-              <a:t>              getTeamMembers() - MANAGER 팀 소속 직원 목록 조회</a:t>
-            </a:r>
-          </a:p>
-          <a:p>
-            <a:r>
-              <a:t>              본인 팀 외 조회 시도 시 400 반환</a:t>
-            </a:r>
-          </a:p>
-          <a:p>
-            <a:r>
-              <a:t>- TeamController: GET /teams/my-team (EMPLOYEE)</a:t>
-            </a:r>
-          </a:p>
-          <a:p>
-            <a:r>
-              <a:t>                  GET /teams/{managerId}/members (MANAGER) 추가</a:t>
-            </a:r>
-          </a:p>
-          <a:p>
-            <a:r>
-              <a:t>SHA: aadefbc</a:t>
+              <a:t>작성자: dldnwls07</a:t>
+            </a:r>
+          </a:p>
+          <a:p>
+            <a:r>
+              <a:t>요약: fix team join sync bug and add real-time cross-tab sync</a:t>
+            </a:r>
+          </a:p>
+          <a:p>
+            <a:r>
+              <a:t>SHA: 45b8558</a:t>
             </a:r>
           </a:p>
         </p:txBody>
@@ -16714,28 +16955,28 @@
           <a:lstStyle/>
           <a:p>
             <a:r>
-              <a:t>버그 수정</a:t>
-            </a:r>
-          </a:p>
-        </p:txBody>
-      </p:sp>
-      <p:sp>
-        <p:nvSpPr>
-          <p:cNvPr id="3" name="Content Placeholder 2"/>
-          <p:cNvSpPr>
-            <a:spLocks noGrp="1"/>
-          </p:cNvSpPr>
-          <p:nvPr>
-            <p:ph idx="1"/>
-          </p:nvPr>
-        </p:nvSpPr>
-        <p:spPr/>
-        <p:txBody>
-          <a:bodyPr/>
-          <a:lstStyle/>
-          <a:p>
-            <a:r>
-              <a:t>날짜: 2026-05-23</a:t>
+              <a:t>테스트</a:t>
+            </a:r>
+          </a:p>
+        </p:txBody>
+      </p:sp>
+      <p:sp>
+        <p:nvSpPr>
+          <p:cNvPr id="3" name="Content Placeholder 2"/>
+          <p:cNvSpPr>
+            <a:spLocks noGrp="1"/>
+          </p:cNvSpPr>
+          <p:nvPr>
+            <p:ph idx="1"/>
+          </p:nvPr>
+        </p:nvSpPr>
+        <p:spPr/>
+        <p:txBody>
+          <a:bodyPr/>
+          <a:lstStyle/>
+          <a:p>
+            <a:r>
+              <a:t>날짜: 2026-05-24</a:t>
             </a:r>
           </a:p>
           <a:p>
@@ -16745,12 +16986,12 @@
           </a:p>
           <a:p>
             <a:r>
-              <a:t>요약: 화상회의 방 재입장 시 호스트/참가자 상태 동기화 및 모달 미표시 버그 수정</a:t>
-            </a:r>
-          </a:p>
-          <a:p>
-            <a:r>
-              <a:t>SHA: 9cc00cd</a:t>
+              <a:t>요약: just for commit bot test. ignore this commit</a:t>
+            </a:r>
+          </a:p>
+          <a:p>
+            <a:r>
+              <a:t>SHA: 67f2b12</a:t>
             </a:r>
           </a:p>
         </p:txBody>
@@ -16789,7 +17030,7 @@
           <a:lstStyle/>
           <a:p>
             <a:r>
-              <a:t>구조 개선</a:t>
+              <a:t>버그 수정</a:t>
             </a:r>
           </a:p>
         </p:txBody>
@@ -16815,33 +17056,76 @@
           </a:p>
           <a:p>
             <a:r>
-              <a:t>작성자: 원종우</a:t>
-            </a:r>
-          </a:p>
-          <a:p>
-            <a:r>
-              <a:t>요약: JwtAuthenticationFilter에서 UserDetailsService 제거 및 MemberRepository 직접 주입</a:t>
+              <a:t>작성자: dldnwls07</a:t>
+            </a:r>
+          </a:p>
+          <a:p>
+            <a:r>
+              <a:t>요약: 팀 참여 및 생성 시 프론트엔드의 사파리 호환성 및 조용한 에러 처리(Silent Failure) 문제 해결</a:t>
             </a:r>
           </a:p>
           <a:p/>
           <a:p>
             <a:r>
-              <a:t>- 만료/무효 토큰이 헤더에 포함된 요청도 예외 없이 안전하게 통과하도록 수정</a:t>
-            </a:r>
-          </a:p>
-          <a:p>
-            <a:r>
-              <a:t>- loadUserByUsername 대신 memberRepository.findById().ifPresent()로 변경</a:t>
-            </a:r>
-          </a:p>
-          <a:p>
-            <a:r>
-              <a:t>- 회원가입 시 기존 토큰이 헤더에 있어도 500 에러 발생하지 않도록 픽스</a:t>
-            </a:r>
-          </a:p>
-          <a:p>
-            <a:r>
-              <a:t>SHA: 6ccbfcd</a:t>
+              <a:t>1. api.ts:</a:t>
+            </a:r>
+          </a:p>
+          <a:p>
+            <a:r>
+              <a:t>   - Safari 등 일부 브라우저에서 Content-Type이 누락되어 빈 응답으로 처리되는 문제 해결</a:t>
+            </a:r>
+          </a:p>
+          <a:p>
+            <a:r>
+              <a:t>   - status 204가 아닌 이상 항상 JSON 파싱을 시도하도록 변경</a:t>
+            </a:r>
+          </a:p>
+          <a:p/>
+          <a:p>
+            <a:r>
+              <a:t>2. CreateTeamModal.tsx:</a:t>
+            </a:r>
+          </a:p>
+          <a:p>
+            <a:r>
+              <a:t>   - 백엔드가 에러를 반환했을 때(예: 서버 재시작으로 인한 토큰 만료 등) 조용히 로컬 폴백 코드를 생성하던 버그 수정</a:t>
+            </a:r>
+          </a:p>
+          <a:p>
+            <a:r>
+              <a:t>   - 백엔드의 응답 코드가 존재하는 경우에만 처리하도록 명시적 분기 추가</a:t>
+            </a:r>
+          </a:p>
+          <a:p/>
+          <a:p>
+            <a:r>
+              <a:t>3. JoinTeam.tsx:</a:t>
+            </a:r>
+          </a:p>
+          <a:p>
+            <a:r>
+              <a:t>   - 서버의 비즈니스 에러 메시지(400, 401 등)를 무시하고 일괄적으로 로컬 폴백 에러로 덮어씌우던 문제 해결</a:t>
+            </a:r>
+          </a:p>
+          <a:p>
+            <a:r>
+              <a:t>   - 실제 서버에서 보낸 에러 메시지(예: '만료된 코드')를 사용자에게 정확히 노출</a:t>
+            </a:r>
+          </a:p>
+          <a:p/>
+          <a:p>
+            <a:r>
+              <a:t>4. MemberService.java:</a:t>
+            </a:r>
+          </a:p>
+          <a:p>
+            <a:r>
+              <a:t>   - joinTeam 시 메모리에만 저장하고 DB에 반영하지 않던 치명적 버그 수정 (memberRepository.save 누락 추가)</a:t>
+            </a:r>
+          </a:p>
+          <a:p>
+            <a:r>
+              <a:t>SHA: 6608319</a:t>
             </a:r>
           </a:p>
         </p:txBody>
@@ -16880,7 +17164,7 @@
           <a:lstStyle/>
           <a:p>
             <a:r>
-              <a:t>기능 개발</a:t>
+              <a:t>구조 개선</a:t>
             </a:r>
           </a:p>
         </p:txBody>
@@ -16906,43 +17190,33 @@
           </a:p>
           <a:p>
             <a:r>
-              <a:t>작성자: dldnwls07</a:t>
-            </a:r>
-          </a:p>
-          <a:p>
-            <a:r>
-              <a:t>요약: 백엔드 API 규격 동기화 (토큰 필드명 및 초대 코드 형식 반영)</a:t>
+              <a:t>작성자: 원종우</a:t>
+            </a:r>
+          </a:p>
+          <a:p>
+            <a:r>
+              <a:t>요약: JwtAuthenticationFilter에서 UserDetailsService 제거 및 MemberRepository 직접 주입</a:t>
             </a:r>
           </a:p>
           <a:p/>
           <a:p>
             <a:r>
-              <a:t>- LoginResponse: accessToken -&gt; token 필드명 변경 대응</a:t>
-            </a:r>
-          </a:p>
-          <a:p>
-            <a:r>
-              <a:t>- authStore: token 및 refreshToken 저장 로직 업데이트</a:t>
-            </a:r>
-          </a:p>
-          <a:p>
-            <a:r>
-              <a:t>- JoinTeam: WS-XXXX-XXXX 형식의 초대 코드 지원 및 UI 최적화</a:t>
-            </a:r>
-          </a:p>
-          <a:p>
-            <a:r>
-              <a:t>- api: 초대 코드 생성 시 불필요한 바디 전송 제거</a:t>
-            </a:r>
-          </a:p>
-          <a:p>
-            <a:r>
-              <a:t>- teamStore: 백엔드와 동일한 코드 생성 형식(WS-XXXX-XXXX) 적용</a:t>
-            </a:r>
-          </a:p>
-          <a:p>
-            <a:r>
-              <a:t>SHA: 8c4de72</a:t>
+              <a:t>- 만료/무효 토큰이 헤더에 포함된 요청도 예외 없이 안전하게 통과하도록 수정</a:t>
+            </a:r>
+          </a:p>
+          <a:p>
+            <a:r>
+              <a:t>- loadUserByUsername 대신 memberRepository.findById().ifPresent()로 변경</a:t>
+            </a:r>
+          </a:p>
+          <a:p>
+            <a:r>
+              <a:t>- 회원가입 시 기존 토큰이 헤더에 있어도 500 에러 발생하지 않도록 픽스</a:t>
+            </a:r>
+          </a:p>
+          <a:p>
+            <a:r>
+              <a:t>SHA: 6ccbfcd</a:t>
             </a:r>
           </a:p>
         </p:txBody>
@@ -16981,7 +17255,7 @@
           <a:lstStyle/>
           <a:p>
             <a:r>
-              <a:t>버그 수정</a:t>
+              <a:t>기능 개발</a:t>
             </a:r>
           </a:p>
         </p:txBody>
@@ -17012,12 +17286,38 @@
           </a:p>
           <a:p>
             <a:r>
-              <a:t>요약: 팀 참여 시 서버 에러 메시지가 로컬 폴백 메시지에 가려지는 문제 수정</a:t>
-            </a:r>
-          </a:p>
-          <a:p>
-            <a:r>
-              <a:t>SHA: 3f21eaa</a:t>
+              <a:t>요약: 백엔드 API 규격 동기화 (토큰 필드명 및 초대 코드 형식 반영)</a:t>
+            </a:r>
+          </a:p>
+          <a:p/>
+          <a:p>
+            <a:r>
+              <a:t>- LoginResponse: accessToken -&gt; token 필드명 변경 대응</a:t>
+            </a:r>
+          </a:p>
+          <a:p>
+            <a:r>
+              <a:t>- authStore: token 및 refreshToken 저장 로직 업데이트</a:t>
+            </a:r>
+          </a:p>
+          <a:p>
+            <a:r>
+              <a:t>- JoinTeam: WS-XXXX-XXXX 형식의 초대 코드 지원 및 UI 최적화</a:t>
+            </a:r>
+          </a:p>
+          <a:p>
+            <a:r>
+              <a:t>- api: 초대 코드 생성 시 불필요한 바디 전송 제거</a:t>
+            </a:r>
+          </a:p>
+          <a:p>
+            <a:r>
+              <a:t>- teamStore: 백엔드와 동일한 코드 생성 형식(WS-XXXX-XXXX) 적용</a:t>
+            </a:r>
+          </a:p>
+          <a:p>
+            <a:r>
+              <a:t>SHA: 8c4de72</a:t>
             </a:r>
           </a:p>
         </p:txBody>
@@ -17087,68 +17387,28 @@
           </a:p>
           <a:p>
             <a:r>
-              <a:t>요약: 초대 코드 기반 팀 매핑 API 구현 및 인증/예외 처리 개선</a:t>
+              <a:t>요약: GlobalExceptionHandler에 404, 409 예외 핸들러 추가</a:t>
             </a:r>
           </a:p>
           <a:p/>
           <a:p>
             <a:r>
-              <a:t>- Member: managerId 필드 및 linkManager() 메서드 추가</a:t>
-            </a:r>
-          </a:p>
-          <a:p>
-            <a:r>
-              <a:t>- MemberDto: LoginResponse 토큰 필드명 수정 (accessToken → token),</a:t>
-            </a:r>
-          </a:p>
-          <a:p>
-            <a:r>
-              <a:t>  InviteCodeResponse · JoinTeamRequest 레코드 추가</a:t>
-            </a:r>
-          </a:p>
-          <a:p>
-            <a:r>
-              <a:t>- MemberController: POST /invite-code (MANAGER), POST /join-team (EMPLOYEE) 엔드포인트 추가</a:t>
-            </a:r>
-          </a:p>
-          <a:p>
-            <a:r>
-              <a:t>- MemberService: 초대 코드 생성/검증/무효화 로직 구현 (ConcurrentHashMap, 5분 만료),</a:t>
-            </a:r>
-          </a:p>
-          <a:p>
-            <a:r>
-              <a:t>  팀 매핑 후 WebSocket TEAM_LINKED 이벤트 전송</a:t>
-            </a:r>
-          </a:p>
-          <a:p>
-            <a:r>
-              <a:t>- MonitoringService: 존재하지 않는 직원 조회 시 NoSuchElementException으로 변경</a:t>
-            </a:r>
-          </a:p>
-          <a:p>
-            <a:r>
-              <a:t>- GlobalExceptionHandler: 404 (NoSuchElementException) 핸들러 추가</a:t>
-            </a:r>
-          </a:p>
-          <a:p>
-            <a:r>
-              <a:t>- SecurityConfig: 401/403 응답 핸들러 명시적 분리,</a:t>
-            </a:r>
-          </a:p>
-          <a:p>
-            <a:r>
-              <a:t>  invite-code · join-team 경로 authenticated() 추가로 미인증 시 401 보장</a:t>
-            </a:r>
-          </a:p>
-          <a:p>
-            <a:r>
-              <a:t>- test-api.http: 초대 코드 플로우 및 에러 케이스 테스트 추가</a:t>
-            </a:r>
-          </a:p>
-          <a:p>
-            <a:r>
-              <a:t>SHA: fee7784</a:t>
+              <a:t>- NoSuchElementException → 404 NOT_FOUND 처리 (존재하지 않는 직원 ID)</a:t>
+            </a:r>
+          </a:p>
+          <a:p>
+            <a:r>
+              <a:t>- IllegalStateException → 409 INVALID_STATE 처리 (팀 미소속 상태)</a:t>
+            </a:r>
+          </a:p>
+          <a:p>
+            <a:r>
+              <a:t>- AccessDeniedException → 403 ACCESS_DENIED 처리</a:t>
+            </a:r>
+          </a:p>
+          <a:p>
+            <a:r>
+              <a:t>SHA: 239e7dc</a:t>
             </a:r>
           </a:p>
         </p:txBody>
@@ -17187,7 +17447,7 @@
           <a:lstStyle/>
           <a:p>
             <a:r>
-              <a:t>기능 개발</a:t>
+              <a:t>기타</a:t>
             </a:r>
           </a:p>
         </p:txBody>
@@ -17218,38 +17478,12 @@
           </a:p>
           <a:p>
             <a:r>
-              <a:t>요약: SecurityConfig 401/403 응답 분리 및 인증 경로 명시</a:t>
-            </a:r>
-          </a:p>
-          <a:p/>
-          <a:p>
-            <a:r>
-              <a:t>- authenticationEntryPoint 추가로 미인증 요청 → 401 반환</a:t>
-            </a:r>
-          </a:p>
-          <a:p>
-            <a:r>
-              <a:t>- accessDeniedHandler 추가로 권한 부족 요청 → 403 반환</a:t>
-            </a:r>
-          </a:p>
-          <a:p>
-            <a:r>
-              <a:t>- invite-code, join-team 경로 authenticated() 명시로 미인증 시 401 보장</a:t>
-            </a:r>
-          </a:p>
-          <a:p>
-            <a:r>
-              <a:t>- UserDetailsService → MemberRepository 주입으로 변경</a:t>
-            </a:r>
-          </a:p>
-          <a:p>
-            <a:r>
-              <a:t>- @EnableMethodSecurity 추가</a:t>
-            </a:r>
-          </a:p>
-          <a:p>
-            <a:r>
-              <a:t>SHA: 83dd30a</a:t>
+              <a:t>요약: push rebase</a:t>
+            </a:r>
+          </a:p>
+          <a:p>
+            <a:r>
+              <a:t>SHA: ab12b59</a:t>
             </a:r>
           </a:p>
         </p:txBody>
@@ -17288,7 +17522,7 @@
           <a:lstStyle/>
           <a:p>
             <a:r>
-              <a:t>기타</a:t>
+              <a:t>문서 작업</a:t>
             </a:r>
           </a:p>
         </p:txBody>
@@ -17314,17 +17548,38 @@
           </a:p>
           <a:p>
             <a:r>
-              <a:t>작성자: dldnwls07</a:t>
-            </a:r>
-          </a:p>
-          <a:p>
-            <a:r>
-              <a:t>요약: chore: add debug logs for 403 analysis and fix frontend login UX/fallback</a:t>
-            </a:r>
-          </a:p>
-          <a:p>
-            <a:r>
-              <a:t>SHA: 227cec9</a:t>
+              <a:t>작성자: 원종우</a:t>
+            </a:r>
+          </a:p>
+          <a:p>
+            <a:r>
+              <a:t>요약: API 명세서 최신화</a:t>
+            </a:r>
+          </a:p>
+          <a:p/>
+          <a:p>
+            <a:r>
+              <a:t>- 팀 API, 초대 코드 API, 토큰 재발급 API 추가</a:t>
+            </a:r>
+          </a:p>
+          <a:p>
+            <a:r>
+              <a:t>- 공통 에러 응답 형식 추가</a:t>
+            </a:r>
+          </a:p>
+          <a:p>
+            <a:r>
+              <a:t>- WebSocket 구독 경로 및 TEAM_LINKED 이벤트 명세 추가</a:t>
+            </a:r>
+          </a:p>
+          <a:p>
+            <a:r>
+              <a:t>- 보안 설정 및 전체 흐름 업데이트</a:t>
+            </a:r>
+          </a:p>
+          <a:p>
+            <a:r>
+              <a:t>SHA: 76fdacf</a:t>
             </a:r>
           </a:p>
         </p:txBody>
@@ -17389,17 +17644,38 @@
           </a:p>
           <a:p>
             <a:r>
-              <a:t>작성자: dldnwls07</a:t>
-            </a:r>
-          </a:p>
-          <a:p>
-            <a:r>
-              <a:t>요약: fix team join sync bug and add real-time cross-tab sync</a:t>
-            </a:r>
-          </a:p>
-          <a:p>
-            <a:r>
-              <a:t>SHA: 45b8558</a:t>
+              <a:t>작성자: 원종우</a:t>
+            </a:r>
+          </a:p>
+          <a:p>
+            <a:r>
+              <a:t>요약: Member에 managerId 필드 및 팀 매핑 메서드 추가</a:t>
+            </a:r>
+          </a:p>
+          <a:p/>
+          <a:p>
+            <a:r>
+              <a:t>- managerId 필드 추가 (팀 매핑용)</a:t>
+            </a:r>
+          </a:p>
+          <a:p>
+            <a:r>
+              <a:t>- linkManager(Long managerId) 메서드 추가</a:t>
+            </a:r>
+          </a:p>
+          <a:p>
+            <a:r>
+              <a:t>- getManagerId() 명시적 getter 추가 (UserDetails 충돌 방지)</a:t>
+            </a:r>
+          </a:p>
+          <a:p>
+            <a:r>
+              <a:t>- MemberRepository에 findAllByManagerId() 쿼리 메서드 추가</a:t>
+            </a:r>
+          </a:p>
+          <a:p>
+            <a:r>
+              <a:t>SHA: 301661f</a:t>
             </a:r>
           </a:p>
         </p:txBody>
@@ -17464,76 +17740,28 @@
           </a:p>
           <a:p>
             <a:r>
-              <a:t>작성자: dldnwls07</a:t>
-            </a:r>
-          </a:p>
-          <a:p>
-            <a:r>
-              <a:t>요약: 팀 참여 및 생성 시 프론트엔드의 사파리 호환성 및 조용한 에러 처리(Silent Failure) 문제 해결</a:t>
+              <a:t>작성자: 원종우</a:t>
+            </a:r>
+          </a:p>
+          <a:p>
+            <a:r>
+              <a:t>요약: MonitoringService 존재하지 않는 직원 조회 시 404 반환하도록 수정</a:t>
             </a:r>
           </a:p>
           <a:p/>
           <a:p>
             <a:r>
-              <a:t>1. api.ts:</a:t>
-            </a:r>
-          </a:p>
-          <a:p>
-            <a:r>
-              <a:t>   - Safari 등 일부 브라우저에서 Content-Type이 누락되어 빈 응답으로 처리되는 문제 해결</a:t>
-            </a:r>
-          </a:p>
-          <a:p>
-            <a:r>
-              <a:t>   - status 204가 아닌 이상 항상 JSON 파싱을 시도하도록 변경</a:t>
-            </a:r>
-          </a:p>
-          <a:p/>
-          <a:p>
-            <a:r>
-              <a:t>2. CreateTeamModal.tsx:</a:t>
-            </a:r>
-          </a:p>
-          <a:p>
-            <a:r>
-              <a:t>   - 백엔드가 에러를 반환했을 때(예: 서버 재시작으로 인한 토큰 만료 등) 조용히 로컬 폴백 코드를 생성하던 버그 수정</a:t>
-            </a:r>
-          </a:p>
-          <a:p>
-            <a:r>
-              <a:t>   - 백엔드의 응답 코드가 존재하는 경우에만 처리하도록 명시적 분기 추가</a:t>
-            </a:r>
-          </a:p>
-          <a:p/>
-          <a:p>
-            <a:r>
-              <a:t>3. JoinTeam.tsx:</a:t>
-            </a:r>
-          </a:p>
-          <a:p>
-            <a:r>
-              <a:t>   - 서버의 비즈니스 에러 메시지(400, 401 등)를 무시하고 일괄적으로 로컬 폴백 에러로 덮어씌우던 문제 해결</a:t>
-            </a:r>
-          </a:p>
-          <a:p>
-            <a:r>
-              <a:t>   - 실제 서버에서 보낸 에러 메시지(예: '만료된 코드')를 사용자에게 정확히 노출</a:t>
-            </a:r>
-          </a:p>
-          <a:p/>
-          <a:p>
-            <a:r>
-              <a:t>4. MemberService.java:</a:t>
-            </a:r>
-          </a:p>
-          <a:p>
-            <a:r>
-              <a:t>   - joinTeam 시 메모리에만 저장하고 DB에 반영하지 않던 치명적 버그 수정 (memberRepository.save 누락 추가)</a:t>
-            </a:r>
-          </a:p>
-          <a:p>
-            <a:r>
-              <a:t>SHA: 6608319</a:t>
+              <a:t>- IllegalArgumentException → NoSuchElementException으로 변경</a:t>
+            </a:r>
+          </a:p>
+          <a:p>
+            <a:r>
+              <a:t>- GlobalExceptionHandler의 404 핸들러와 연동</a:t>
+            </a:r>
+          </a:p>
+          <a:p>
+            <a:r>
+              <a:t>SHA: b04984c</a:t>
             </a:r>
           </a:p>
         </p:txBody>
@@ -17572,7 +17800,7 @@
           <a:lstStyle/>
           <a:p>
             <a:r>
-              <a:t>문서 작업</a:t>
+              <a:t>기능 개발</a:t>
             </a:r>
           </a:p>
         </p:txBody>
@@ -17598,17 +17826,17 @@
           </a:p>
           <a:p>
             <a:r>
-              <a:t>작성자: 원종우</a:t>
-            </a:r>
-          </a:p>
-          <a:p>
-            <a:r>
-              <a:t>요약: api 명세서 수정</a:t>
-            </a:r>
-          </a:p>
-          <a:p>
-            <a:r>
-              <a:t>SHA: 2f31a96</a:t>
+              <a:t>작성자: dldnwls07</a:t>
+            </a:r>
+          </a:p>
+          <a:p>
+            <a:r>
+              <a:t>요약: 개발 편의를 위한 데이터 초기화 버튼 추가 (백엔드 재시작 시 동기화 용도)</a:t>
+            </a:r>
+          </a:p>
+          <a:p>
+            <a:r>
+              <a:t>SHA: fc03f79</a:t>
             </a:r>
           </a:p>
         </p:txBody>
@@ -17668,58 +17896,58 @@
           <a:lstStyle/>
           <a:p>
             <a:r>
-              <a:t>날짜: 2026-05-07</a:t>
-            </a:r>
-          </a:p>
-          <a:p>
-            <a:r>
-              <a:t>작성자: dldnwls07</a:t>
-            </a:r>
-          </a:p>
-          <a:p>
-            <a:r>
-              <a:t>요약: 팀 기반 관리 시스템 구현 및 사파리 호환성 개선</a:t>
+              <a:t>날짜: 2026-05-08</a:t>
+            </a:r>
+          </a:p>
+          <a:p>
+            <a:r>
+              <a:t>작성자: 원종우</a:t>
+            </a:r>
+          </a:p>
+          <a:p>
+            <a:r>
+              <a:t>요약: 초대 코드 기반 팀 매핑 API 구현</a:t>
             </a:r>
           </a:p>
           <a:p/>
           <a:p>
             <a:r>
-              <a:t>- 관리자가 팀을 생성하고 초대 코드를 발급하는 기능 추가</a:t>
-            </a:r>
-          </a:p>
-          <a:p>
-            <a:r>
-              <a:t>- 직원이 코드를 입력하여 팀에 합류하는 기능 추가</a:t>
-            </a:r>
-          </a:p>
-          <a:p>
-            <a:r>
-              <a:t>- 팀별 모니터링 대시보드 구조 설계 (URL 파라미터 기반)</a:t>
-            </a:r>
-          </a:p>
-          <a:p>
-            <a:r>
-              <a:t>- Safari 브라우저에서 fetch/JSON 패턴 에러 해결</a:t>
-            </a:r>
-          </a:p>
-          <a:p>
-            <a:r>
-              <a:t>- 백엔드 응답 필드명(accessToken, virtualBalance) 동기화</a:t>
-            </a:r>
-          </a:p>
-          <a:p>
-            <a:r>
-              <a:t>- zustand와 localStorage를 이용한 오프라인 폴백 시스템 구축</a:t>
-            </a:r>
-          </a:p>
-          <a:p>
-            <a:r>
-              <a:t>- 미사용 InviteEmployeeModal 삭제</a:t>
-            </a:r>
-          </a:p>
-          <a:p>
-            <a:r>
-              <a:t>SHA: 055aa6f</a:t>
+              <a:t>- MemberDto: LoginResponse token 필드명 수정 (accessToken → token),</a:t>
+            </a:r>
+          </a:p>
+          <a:p>
+            <a:r>
+              <a:t>  InviteCodeResponse · JoinTeamRequest 레코드 추가</a:t>
+            </a:r>
+          </a:p>
+          <a:p>
+            <a:r>
+              <a:t>- MemberService: 초대 코드 생성/검증/무효화 로직 구현</a:t>
+            </a:r>
+          </a:p>
+          <a:p>
+            <a:r>
+              <a:t>  (ConcurrentHashMap in-memory 저장, 5분 만료, 일회성)</a:t>
+            </a:r>
+          </a:p>
+          <a:p>
+            <a:r>
+              <a:t>  팀 매핑 완료 후 WebSocket TEAM_LINKED 이벤트 전송</a:t>
+            </a:r>
+          </a:p>
+          <a:p>
+            <a:r>
+              <a:t>  joinTeam()에서 영속성 컨텍스트 보장을 위해 DB 재조회 처리</a:t>
+            </a:r>
+          </a:p>
+          <a:p>
+            <a:r>
+              <a:t>- MemberController: POST /invite-code (MANAGER), POST /join-team (EMPLOYEE) 추가</a:t>
+            </a:r>
+          </a:p>
+          <a:p>
+            <a:r>
+              <a:t>SHA: 26f546a</a:t>
             </a:r>
           </a:p>
         </p:txBody>
